--- a/lectures/from_propositional_logic_to_probability_theory/proportional_syllogism_on_steroids.pptx
+++ b/lectures/from_propositional_logic_to_probability_theory/proportional_syllogism_on_steroids.pptx
@@ -5,11 +5,12 @@
     <p:sldMasterId id="2147483684" r:id="rId1"/>
   </p:sldMasterIdLst>
   <p:notesMasterIdLst>
-    <p:notesMasterId r:id="rId4"/>
+    <p:notesMasterId r:id="rId5"/>
   </p:notesMasterIdLst>
   <p:sldIdLst>
     <p:sldId id="341" r:id="rId2"/>
-    <p:sldId id="342" r:id="rId3"/>
+    <p:sldId id="343" r:id="rId3"/>
+    <p:sldId id="342" r:id="rId4"/>
   </p:sldIdLst>
   <p:sldSz cx="9144000" cy="914400"/>
   <p:notesSz cx="6858000" cy="9144000"/>
@@ -3921,6 +3922,1128 @@
 </file>
 
 <file path=ppt/slides/slide2.xml><?xml version="1.0" encoding="utf-8"?>
+<p:sld xmlns:a="http://schemas.openxmlformats.org/drawingml/2006/main" xmlns:r="http://schemas.openxmlformats.org/officeDocument/2006/relationships" xmlns:p="http://schemas.openxmlformats.org/presentationml/2006/main">
+  <p:cSld>
+    <p:spTree>
+      <p:nvGrpSpPr>
+        <p:cNvPr id="1" name="">
+          <a:extLst>
+            <a:ext uri="{FF2B5EF4-FFF2-40B4-BE49-F238E27FC236}">
+              <a16:creationId xmlns:a16="http://schemas.microsoft.com/office/drawing/2014/main" id="{3676BE51-1AEE-8756-75D0-C2C2AAE6A2D2}"/>
+            </a:ext>
+          </a:extLst>
+        </p:cNvPr>
+        <p:cNvGrpSpPr/>
+        <p:nvPr/>
+      </p:nvGrpSpPr>
+      <p:grpSpPr>
+        <a:xfrm>
+          <a:off x="0" y="0"/>
+          <a:ext cx="0" cy="0"/>
+          <a:chOff x="0" y="0"/>
+          <a:chExt cx="0" cy="0"/>
+        </a:xfrm>
+      </p:grpSpPr>
+      <p:sp>
+        <p:nvSpPr>
+          <p:cNvPr id="26" name="Oval 25">
+            <a:extLst>
+              <a:ext uri="{FF2B5EF4-FFF2-40B4-BE49-F238E27FC236}">
+                <a16:creationId xmlns:a16="http://schemas.microsoft.com/office/drawing/2014/main" id="{D99E1143-0CD8-4697-C5F5-DC82255600C4}"/>
+              </a:ext>
+            </a:extLst>
+          </p:cNvPr>
+          <p:cNvSpPr>
+            <a:spLocks noChangeAspect="1"/>
+          </p:cNvSpPr>
+          <p:nvPr/>
+        </p:nvSpPr>
+        <p:spPr>
+          <a:xfrm>
+            <a:off x="3398889" y="234616"/>
+            <a:ext cx="457200" cy="457200"/>
+          </a:xfrm>
+          <a:prstGeom prst="ellipse">
+            <a:avLst/>
+          </a:prstGeom>
+          <a:solidFill>
+            <a:schemeClr val="accent1"/>
+          </a:solidFill>
+          <a:ln>
+            <a:solidFill>
+              <a:schemeClr val="bg1"/>
+            </a:solidFill>
+          </a:ln>
+        </p:spPr>
+        <p:style>
+          <a:lnRef idx="2">
+            <a:schemeClr val="accent1">
+              <a:shade val="15000"/>
+            </a:schemeClr>
+          </a:lnRef>
+          <a:fillRef idx="1">
+            <a:schemeClr val="accent1"/>
+          </a:fillRef>
+          <a:effectRef idx="0">
+            <a:schemeClr val="accent1"/>
+          </a:effectRef>
+          <a:fontRef idx="minor">
+            <a:schemeClr val="lt1"/>
+          </a:fontRef>
+        </p:style>
+        <p:txBody>
+          <a:bodyPr rtlCol="0" anchor="ctr"/>
+          <a:lstStyle/>
+          <a:p>
+            <a:pPr algn="ctr"/>
+            <a:endParaRPr lang="en-US"/>
+          </a:p>
+        </p:txBody>
+      </p:sp>
+      <p:sp>
+        <p:nvSpPr>
+          <p:cNvPr id="27" name="Oval 26">
+            <a:extLst>
+              <a:ext uri="{FF2B5EF4-FFF2-40B4-BE49-F238E27FC236}">
+                <a16:creationId xmlns:a16="http://schemas.microsoft.com/office/drawing/2014/main" id="{D693120E-51C3-A3E8-F892-C3F09D133238}"/>
+              </a:ext>
+            </a:extLst>
+          </p:cNvPr>
+          <p:cNvSpPr>
+            <a:spLocks noChangeAspect="1"/>
+          </p:cNvSpPr>
+          <p:nvPr/>
+        </p:nvSpPr>
+        <p:spPr>
+          <a:xfrm>
+            <a:off x="2770585" y="228186"/>
+            <a:ext cx="457200" cy="457200"/>
+          </a:xfrm>
+          <a:prstGeom prst="ellipse">
+            <a:avLst/>
+          </a:prstGeom>
+          <a:solidFill>
+            <a:schemeClr val="accent4"/>
+          </a:solidFill>
+          <a:ln>
+            <a:solidFill>
+              <a:schemeClr val="bg1"/>
+            </a:solidFill>
+          </a:ln>
+        </p:spPr>
+        <p:style>
+          <a:lnRef idx="2">
+            <a:schemeClr val="accent1">
+              <a:shade val="15000"/>
+            </a:schemeClr>
+          </a:lnRef>
+          <a:fillRef idx="1">
+            <a:schemeClr val="accent1"/>
+          </a:fillRef>
+          <a:effectRef idx="0">
+            <a:schemeClr val="accent1"/>
+          </a:effectRef>
+          <a:fontRef idx="minor">
+            <a:schemeClr val="lt1"/>
+          </a:fontRef>
+        </p:style>
+        <p:txBody>
+          <a:bodyPr rtlCol="0" anchor="ctr"/>
+          <a:lstStyle/>
+          <a:p>
+            <a:pPr algn="ctr"/>
+            <a:endParaRPr lang="en-US"/>
+          </a:p>
+        </p:txBody>
+      </p:sp>
+      <p:sp>
+        <p:nvSpPr>
+          <p:cNvPr id="2" name="Oval 1">
+            <a:extLst>
+              <a:ext uri="{FF2B5EF4-FFF2-40B4-BE49-F238E27FC236}">
+                <a16:creationId xmlns:a16="http://schemas.microsoft.com/office/drawing/2014/main" id="{737A75BE-2D36-D20C-63E6-32D2960BFA64}"/>
+              </a:ext>
+            </a:extLst>
+          </p:cNvPr>
+          <p:cNvSpPr>
+            <a:spLocks noChangeAspect="1"/>
+          </p:cNvSpPr>
+          <p:nvPr/>
+        </p:nvSpPr>
+        <p:spPr>
+          <a:xfrm>
+            <a:off x="1497541" y="228600"/>
+            <a:ext cx="457200" cy="457200"/>
+          </a:xfrm>
+          <a:prstGeom prst="ellipse">
+            <a:avLst/>
+          </a:prstGeom>
+          <a:solidFill>
+            <a:schemeClr val="accent4"/>
+          </a:solidFill>
+          <a:ln>
+            <a:solidFill>
+              <a:schemeClr val="bg1"/>
+            </a:solidFill>
+          </a:ln>
+        </p:spPr>
+        <p:style>
+          <a:lnRef idx="2">
+            <a:schemeClr val="accent1">
+              <a:shade val="15000"/>
+            </a:schemeClr>
+          </a:lnRef>
+          <a:fillRef idx="1">
+            <a:schemeClr val="accent1"/>
+          </a:fillRef>
+          <a:effectRef idx="0">
+            <a:schemeClr val="accent1"/>
+          </a:effectRef>
+          <a:fontRef idx="minor">
+            <a:schemeClr val="lt1"/>
+          </a:fontRef>
+        </p:style>
+        <p:txBody>
+          <a:bodyPr rtlCol="0" anchor="ctr"/>
+          <a:lstStyle/>
+          <a:p>
+            <a:pPr algn="ctr"/>
+            <a:endParaRPr lang="en-US"/>
+          </a:p>
+        </p:txBody>
+      </p:sp>
+      <p:sp>
+        <p:nvSpPr>
+          <p:cNvPr id="3" name="Oval 2">
+            <a:extLst>
+              <a:ext uri="{FF2B5EF4-FFF2-40B4-BE49-F238E27FC236}">
+                <a16:creationId xmlns:a16="http://schemas.microsoft.com/office/drawing/2014/main" id="{F8838413-0BD9-BD7B-B9F0-DD0B776B60C1}"/>
+              </a:ext>
+            </a:extLst>
+          </p:cNvPr>
+          <p:cNvSpPr>
+            <a:spLocks noChangeAspect="1"/>
+          </p:cNvSpPr>
+          <p:nvPr/>
+        </p:nvSpPr>
+        <p:spPr>
+          <a:xfrm>
+            <a:off x="2129954" y="228600"/>
+            <a:ext cx="457200" cy="457200"/>
+          </a:xfrm>
+          <a:prstGeom prst="ellipse">
+            <a:avLst/>
+          </a:prstGeom>
+          <a:solidFill>
+            <a:schemeClr val="accent4"/>
+          </a:solidFill>
+          <a:ln>
+            <a:solidFill>
+              <a:schemeClr val="bg1"/>
+            </a:solidFill>
+          </a:ln>
+        </p:spPr>
+        <p:style>
+          <a:lnRef idx="2">
+            <a:schemeClr val="accent1">
+              <a:shade val="15000"/>
+            </a:schemeClr>
+          </a:lnRef>
+          <a:fillRef idx="1">
+            <a:schemeClr val="accent1"/>
+          </a:fillRef>
+          <a:effectRef idx="0">
+            <a:schemeClr val="accent1"/>
+          </a:effectRef>
+          <a:fontRef idx="minor">
+            <a:schemeClr val="lt1"/>
+          </a:fontRef>
+        </p:style>
+        <p:txBody>
+          <a:bodyPr rtlCol="0" anchor="ctr"/>
+          <a:lstStyle/>
+          <a:p>
+            <a:pPr algn="ctr"/>
+            <a:endParaRPr lang="en-US"/>
+          </a:p>
+        </p:txBody>
+      </p:sp>
+      <p:sp>
+        <p:nvSpPr>
+          <p:cNvPr id="6" name="Oval 5">
+            <a:extLst>
+              <a:ext uri="{FF2B5EF4-FFF2-40B4-BE49-F238E27FC236}">
+                <a16:creationId xmlns:a16="http://schemas.microsoft.com/office/drawing/2014/main" id="{3CB09799-CBA5-7E88-0752-369CE44DB8D1}"/>
+              </a:ext>
+            </a:extLst>
+          </p:cNvPr>
+          <p:cNvSpPr>
+            <a:spLocks noChangeAspect="1"/>
+          </p:cNvSpPr>
+          <p:nvPr/>
+        </p:nvSpPr>
+        <p:spPr>
+          <a:xfrm>
+            <a:off x="4027193" y="228600"/>
+            <a:ext cx="457200" cy="457200"/>
+          </a:xfrm>
+          <a:prstGeom prst="ellipse">
+            <a:avLst/>
+          </a:prstGeom>
+          <a:solidFill>
+            <a:schemeClr val="accent1"/>
+          </a:solidFill>
+          <a:ln>
+            <a:solidFill>
+              <a:schemeClr val="bg1"/>
+            </a:solidFill>
+          </a:ln>
+        </p:spPr>
+        <p:style>
+          <a:lnRef idx="2">
+            <a:schemeClr val="accent1">
+              <a:shade val="15000"/>
+            </a:schemeClr>
+          </a:lnRef>
+          <a:fillRef idx="1">
+            <a:schemeClr val="accent1"/>
+          </a:fillRef>
+          <a:effectRef idx="0">
+            <a:schemeClr val="accent1"/>
+          </a:effectRef>
+          <a:fontRef idx="minor">
+            <a:schemeClr val="lt1"/>
+          </a:fontRef>
+        </p:style>
+        <p:txBody>
+          <a:bodyPr rtlCol="0" anchor="ctr"/>
+          <a:lstStyle/>
+          <a:p>
+            <a:pPr algn="ctr"/>
+            <a:endParaRPr lang="en-US"/>
+          </a:p>
+        </p:txBody>
+      </p:sp>
+      <p:sp>
+        <p:nvSpPr>
+          <p:cNvPr id="7" name="Oval 6">
+            <a:extLst>
+              <a:ext uri="{FF2B5EF4-FFF2-40B4-BE49-F238E27FC236}">
+                <a16:creationId xmlns:a16="http://schemas.microsoft.com/office/drawing/2014/main" id="{4898D57F-2B18-C226-3B6A-092C2966978B}"/>
+              </a:ext>
+            </a:extLst>
+          </p:cNvPr>
+          <p:cNvSpPr>
+            <a:spLocks noChangeAspect="1"/>
+          </p:cNvSpPr>
+          <p:nvPr/>
+        </p:nvSpPr>
+        <p:spPr>
+          <a:xfrm>
+            <a:off x="4659606" y="228600"/>
+            <a:ext cx="457200" cy="457200"/>
+          </a:xfrm>
+          <a:prstGeom prst="ellipse">
+            <a:avLst/>
+          </a:prstGeom>
+          <a:solidFill>
+            <a:schemeClr val="accent1"/>
+          </a:solidFill>
+          <a:ln>
+            <a:solidFill>
+              <a:schemeClr val="bg1"/>
+            </a:solidFill>
+          </a:ln>
+        </p:spPr>
+        <p:style>
+          <a:lnRef idx="2">
+            <a:schemeClr val="accent1">
+              <a:shade val="15000"/>
+            </a:schemeClr>
+          </a:lnRef>
+          <a:fillRef idx="1">
+            <a:schemeClr val="accent1"/>
+          </a:fillRef>
+          <a:effectRef idx="0">
+            <a:schemeClr val="accent1"/>
+          </a:effectRef>
+          <a:fontRef idx="minor">
+            <a:schemeClr val="lt1"/>
+          </a:fontRef>
+        </p:style>
+        <p:txBody>
+          <a:bodyPr rtlCol="0" anchor="ctr"/>
+          <a:lstStyle/>
+          <a:p>
+            <a:pPr algn="ctr"/>
+            <a:endParaRPr lang="en-US"/>
+          </a:p>
+        </p:txBody>
+      </p:sp>
+      <p:sp>
+        <p:nvSpPr>
+          <p:cNvPr id="8" name="Oval 7">
+            <a:extLst>
+              <a:ext uri="{FF2B5EF4-FFF2-40B4-BE49-F238E27FC236}">
+                <a16:creationId xmlns:a16="http://schemas.microsoft.com/office/drawing/2014/main" id="{D74C488C-2B7F-0AB6-3BFC-F1D5B987974C}"/>
+              </a:ext>
+            </a:extLst>
+          </p:cNvPr>
+          <p:cNvSpPr>
+            <a:spLocks noChangeAspect="1"/>
+          </p:cNvSpPr>
+          <p:nvPr/>
+        </p:nvSpPr>
+        <p:spPr>
+          <a:xfrm>
+            <a:off x="5292019" y="228600"/>
+            <a:ext cx="457200" cy="457200"/>
+          </a:xfrm>
+          <a:prstGeom prst="ellipse">
+            <a:avLst/>
+          </a:prstGeom>
+          <a:solidFill>
+            <a:schemeClr val="accent1"/>
+          </a:solidFill>
+          <a:ln>
+            <a:solidFill>
+              <a:schemeClr val="bg1"/>
+            </a:solidFill>
+          </a:ln>
+        </p:spPr>
+        <p:style>
+          <a:lnRef idx="2">
+            <a:schemeClr val="accent1">
+              <a:shade val="15000"/>
+            </a:schemeClr>
+          </a:lnRef>
+          <a:fillRef idx="1">
+            <a:schemeClr val="accent1"/>
+          </a:fillRef>
+          <a:effectRef idx="0">
+            <a:schemeClr val="accent1"/>
+          </a:effectRef>
+          <a:fontRef idx="minor">
+            <a:schemeClr val="lt1"/>
+          </a:fontRef>
+        </p:style>
+        <p:txBody>
+          <a:bodyPr rtlCol="0" anchor="ctr"/>
+          <a:lstStyle/>
+          <a:p>
+            <a:pPr algn="ctr"/>
+            <a:endParaRPr lang="en-US"/>
+          </a:p>
+        </p:txBody>
+      </p:sp>
+      <p:sp>
+        <p:nvSpPr>
+          <p:cNvPr id="9" name="Oval 8">
+            <a:extLst>
+              <a:ext uri="{FF2B5EF4-FFF2-40B4-BE49-F238E27FC236}">
+                <a16:creationId xmlns:a16="http://schemas.microsoft.com/office/drawing/2014/main" id="{EB38A921-2924-066A-BC93-323477DC4E74}"/>
+              </a:ext>
+            </a:extLst>
+          </p:cNvPr>
+          <p:cNvSpPr>
+            <a:spLocks noChangeAspect="1"/>
+          </p:cNvSpPr>
+          <p:nvPr/>
+        </p:nvSpPr>
+        <p:spPr>
+          <a:xfrm>
+            <a:off x="5924432" y="228600"/>
+            <a:ext cx="457200" cy="457200"/>
+          </a:xfrm>
+          <a:prstGeom prst="ellipse">
+            <a:avLst/>
+          </a:prstGeom>
+          <a:solidFill>
+            <a:srgbClr val="8EBB6F"/>
+          </a:solidFill>
+          <a:ln>
+            <a:solidFill>
+              <a:schemeClr val="bg1"/>
+            </a:solidFill>
+          </a:ln>
+        </p:spPr>
+        <p:style>
+          <a:lnRef idx="2">
+            <a:schemeClr val="accent1">
+              <a:shade val="15000"/>
+            </a:schemeClr>
+          </a:lnRef>
+          <a:fillRef idx="1">
+            <a:schemeClr val="accent1"/>
+          </a:fillRef>
+          <a:effectRef idx="0">
+            <a:schemeClr val="accent1"/>
+          </a:effectRef>
+          <a:fontRef idx="minor">
+            <a:schemeClr val="lt1"/>
+          </a:fontRef>
+        </p:style>
+        <p:txBody>
+          <a:bodyPr rtlCol="0" anchor="ctr"/>
+          <a:lstStyle/>
+          <a:p>
+            <a:pPr algn="ctr"/>
+            <a:endParaRPr lang="en-US"/>
+          </a:p>
+        </p:txBody>
+      </p:sp>
+      <p:sp>
+        <p:nvSpPr>
+          <p:cNvPr id="10" name="Oval 9">
+            <a:extLst>
+              <a:ext uri="{FF2B5EF4-FFF2-40B4-BE49-F238E27FC236}">
+                <a16:creationId xmlns:a16="http://schemas.microsoft.com/office/drawing/2014/main" id="{2A3F9291-88B7-3857-CF8F-BD9E1811E422}"/>
+              </a:ext>
+            </a:extLst>
+          </p:cNvPr>
+          <p:cNvSpPr>
+            <a:spLocks noChangeAspect="1"/>
+          </p:cNvSpPr>
+          <p:nvPr/>
+        </p:nvSpPr>
+        <p:spPr>
+          <a:xfrm>
+            <a:off x="6556845" y="228600"/>
+            <a:ext cx="457200" cy="457200"/>
+          </a:xfrm>
+          <a:prstGeom prst="ellipse">
+            <a:avLst/>
+          </a:prstGeom>
+          <a:solidFill>
+            <a:srgbClr val="8EBB6F"/>
+          </a:solidFill>
+          <a:ln>
+            <a:solidFill>
+              <a:schemeClr val="bg1"/>
+            </a:solidFill>
+          </a:ln>
+        </p:spPr>
+        <p:style>
+          <a:lnRef idx="2">
+            <a:schemeClr val="accent1">
+              <a:shade val="15000"/>
+            </a:schemeClr>
+          </a:lnRef>
+          <a:fillRef idx="1">
+            <a:schemeClr val="accent1"/>
+          </a:fillRef>
+          <a:effectRef idx="0">
+            <a:schemeClr val="accent1"/>
+          </a:effectRef>
+          <a:fontRef idx="minor">
+            <a:schemeClr val="lt1"/>
+          </a:fontRef>
+        </p:style>
+        <p:txBody>
+          <a:bodyPr rtlCol="0" anchor="ctr"/>
+          <a:lstStyle/>
+          <a:p>
+            <a:pPr algn="ctr"/>
+            <a:endParaRPr lang="en-US"/>
+          </a:p>
+        </p:txBody>
+      </p:sp>
+      <p:sp>
+        <p:nvSpPr>
+          <p:cNvPr id="11" name="Oval 10">
+            <a:extLst>
+              <a:ext uri="{FF2B5EF4-FFF2-40B4-BE49-F238E27FC236}">
+                <a16:creationId xmlns:a16="http://schemas.microsoft.com/office/drawing/2014/main" id="{B05A744D-12B5-8687-4C4E-DEA7C966218B}"/>
+              </a:ext>
+            </a:extLst>
+          </p:cNvPr>
+          <p:cNvSpPr>
+            <a:spLocks noChangeAspect="1"/>
+          </p:cNvSpPr>
+          <p:nvPr/>
+        </p:nvSpPr>
+        <p:spPr>
+          <a:xfrm>
+            <a:off x="7189259" y="228600"/>
+            <a:ext cx="457200" cy="457200"/>
+          </a:xfrm>
+          <a:prstGeom prst="ellipse">
+            <a:avLst/>
+          </a:prstGeom>
+          <a:noFill/>
+          <a:ln>
+            <a:solidFill>
+              <a:schemeClr val="bg2">
+                <a:lumMod val="90000"/>
+              </a:schemeClr>
+            </a:solidFill>
+          </a:ln>
+        </p:spPr>
+        <p:style>
+          <a:lnRef idx="2">
+            <a:schemeClr val="accent1">
+              <a:shade val="15000"/>
+            </a:schemeClr>
+          </a:lnRef>
+          <a:fillRef idx="1">
+            <a:schemeClr val="accent1"/>
+          </a:fillRef>
+          <a:effectRef idx="0">
+            <a:schemeClr val="accent1"/>
+          </a:effectRef>
+          <a:fontRef idx="minor">
+            <a:schemeClr val="lt1"/>
+          </a:fontRef>
+        </p:style>
+        <p:txBody>
+          <a:bodyPr rtlCol="0" anchor="ctr"/>
+          <a:lstStyle/>
+          <a:p>
+            <a:pPr algn="ctr"/>
+            <a:endParaRPr lang="en-US"/>
+          </a:p>
+        </p:txBody>
+      </p:sp>
+      <p:grpSp>
+        <p:nvGrpSpPr>
+          <p:cNvPr id="20" name="Group 19">
+            <a:extLst>
+              <a:ext uri="{FF2B5EF4-FFF2-40B4-BE49-F238E27FC236}">
+                <a16:creationId xmlns:a16="http://schemas.microsoft.com/office/drawing/2014/main" id="{1562CAD8-24B8-FA0F-C49A-5A02CBCA6435}"/>
+              </a:ext>
+            </a:extLst>
+          </p:cNvPr>
+          <p:cNvGrpSpPr/>
+          <p:nvPr/>
+        </p:nvGrpSpPr>
+        <p:grpSpPr>
+          <a:xfrm>
+            <a:off x="5924432" y="228600"/>
+            <a:ext cx="457200" cy="457200"/>
+            <a:chOff x="3394780" y="228600"/>
+            <a:chExt cx="457200" cy="457200"/>
+          </a:xfrm>
+        </p:grpSpPr>
+        <p:sp>
+          <p:nvSpPr>
+            <p:cNvPr id="21" name="Freeform 20">
+              <a:extLst>
+                <a:ext uri="{FF2B5EF4-FFF2-40B4-BE49-F238E27FC236}">
+                  <a16:creationId xmlns:a16="http://schemas.microsoft.com/office/drawing/2014/main" id="{D466B029-7C52-3DD1-2A86-23C25ECFE792}"/>
+                </a:ext>
+              </a:extLst>
+            </p:cNvPr>
+            <p:cNvSpPr>
+              <a:spLocks noChangeAspect="1"/>
+            </p:cNvSpPr>
+            <p:nvPr/>
+          </p:nvSpPr>
+          <p:spPr>
+            <a:xfrm>
+              <a:off x="3394780" y="229014"/>
+              <a:ext cx="224492" cy="456372"/>
+            </a:xfrm>
+            <a:custGeom>
+              <a:avLst/>
+              <a:gdLst>
+                <a:gd name="connsiteX0" fmla="*/ 224492 w 224492"/>
+                <a:gd name="connsiteY0" fmla="*/ 0 h 456372"/>
+                <a:gd name="connsiteX1" fmla="*/ 224492 w 224492"/>
+                <a:gd name="connsiteY1" fmla="*/ 456372 h 456372"/>
+                <a:gd name="connsiteX2" fmla="*/ 182529 w 224492"/>
+                <a:gd name="connsiteY2" fmla="*/ 452142 h 456372"/>
+                <a:gd name="connsiteX3" fmla="*/ 0 w 224492"/>
+                <a:gd name="connsiteY3" fmla="*/ 228186 h 456372"/>
+                <a:gd name="connsiteX4" fmla="*/ 182529 w 224492"/>
+                <a:gd name="connsiteY4" fmla="*/ 4230 h 456372"/>
+                <a:gd name="connsiteX5" fmla="*/ 224492 w 224492"/>
+                <a:gd name="connsiteY5" fmla="*/ 0 h 456372"/>
+              </a:gdLst>
+              <a:ahLst/>
+              <a:cxnLst>
+                <a:cxn ang="0">
+                  <a:pos x="connsiteX0" y="connsiteY0"/>
+                </a:cxn>
+                <a:cxn ang="0">
+                  <a:pos x="connsiteX1" y="connsiteY1"/>
+                </a:cxn>
+                <a:cxn ang="0">
+                  <a:pos x="connsiteX2" y="connsiteY2"/>
+                </a:cxn>
+                <a:cxn ang="0">
+                  <a:pos x="connsiteX3" y="connsiteY3"/>
+                </a:cxn>
+                <a:cxn ang="0">
+                  <a:pos x="connsiteX4" y="connsiteY4"/>
+                </a:cxn>
+                <a:cxn ang="0">
+                  <a:pos x="connsiteX5" y="connsiteY5"/>
+                </a:cxn>
+              </a:cxnLst>
+              <a:rect l="l" t="t" r="r" b="b"/>
+              <a:pathLst>
+                <a:path w="224492" h="456372">
+                  <a:moveTo>
+                    <a:pt x="224492" y="0"/>
+                  </a:moveTo>
+                  <a:lnTo>
+                    <a:pt x="224492" y="456372"/>
+                  </a:lnTo>
+                  <a:lnTo>
+                    <a:pt x="182529" y="452142"/>
+                  </a:lnTo>
+                  <a:cubicBezTo>
+                    <a:pt x="78360" y="430826"/>
+                    <a:pt x="0" y="338657"/>
+                    <a:pt x="0" y="228186"/>
+                  </a:cubicBezTo>
+                  <a:cubicBezTo>
+                    <a:pt x="0" y="117716"/>
+                    <a:pt x="78360" y="25547"/>
+                    <a:pt x="182529" y="4230"/>
+                  </a:cubicBezTo>
+                  <a:lnTo>
+                    <a:pt x="224492" y="0"/>
+                  </a:lnTo>
+                  <a:close/>
+                </a:path>
+              </a:pathLst>
+            </a:custGeom>
+            <a:solidFill>
+              <a:schemeClr val="accent4"/>
+            </a:solidFill>
+            <a:ln>
+              <a:solidFill>
+                <a:schemeClr val="bg1"/>
+              </a:solidFill>
+            </a:ln>
+          </p:spPr>
+          <p:style>
+            <a:lnRef idx="2">
+              <a:schemeClr val="accent1">
+                <a:shade val="15000"/>
+              </a:schemeClr>
+            </a:lnRef>
+            <a:fillRef idx="1">
+              <a:schemeClr val="accent1"/>
+            </a:fillRef>
+            <a:effectRef idx="0">
+              <a:schemeClr val="accent1"/>
+            </a:effectRef>
+            <a:fontRef idx="minor">
+              <a:schemeClr val="lt1"/>
+            </a:fontRef>
+          </p:style>
+          <p:txBody>
+            <a:bodyPr wrap="square" rtlCol="0" anchor="ctr">
+              <a:noAutofit/>
+            </a:bodyPr>
+            <a:lstStyle/>
+            <a:p>
+              <a:pPr algn="ctr"/>
+              <a:endParaRPr lang="en-US" dirty="0"/>
+            </a:p>
+          </p:txBody>
+        </p:sp>
+        <p:sp>
+          <p:nvSpPr>
+            <p:cNvPr id="22" name="Freeform 21">
+              <a:extLst>
+                <a:ext uri="{FF2B5EF4-FFF2-40B4-BE49-F238E27FC236}">
+                  <a16:creationId xmlns:a16="http://schemas.microsoft.com/office/drawing/2014/main" id="{69A8A1A2-E09D-7F52-053B-B2606CFEF96A}"/>
+                </a:ext>
+              </a:extLst>
+            </p:cNvPr>
+            <p:cNvSpPr>
+              <a:spLocks noChangeAspect="1"/>
+            </p:cNvSpPr>
+            <p:nvPr/>
+          </p:nvSpPr>
+          <p:spPr>
+            <a:xfrm>
+              <a:off x="3619272" y="228600"/>
+              <a:ext cx="232708" cy="457200"/>
+            </a:xfrm>
+            <a:custGeom>
+              <a:avLst/>
+              <a:gdLst>
+                <a:gd name="connsiteX0" fmla="*/ 4108 w 232708"/>
+                <a:gd name="connsiteY0" fmla="*/ 0 h 457200"/>
+                <a:gd name="connsiteX1" fmla="*/ 232708 w 232708"/>
+                <a:gd name="connsiteY1" fmla="*/ 228600 h 457200"/>
+                <a:gd name="connsiteX2" fmla="*/ 4108 w 232708"/>
+                <a:gd name="connsiteY2" fmla="*/ 457200 h 457200"/>
+                <a:gd name="connsiteX3" fmla="*/ 0 w 232708"/>
+                <a:gd name="connsiteY3" fmla="*/ 456786 h 457200"/>
+                <a:gd name="connsiteX4" fmla="*/ 0 w 232708"/>
+                <a:gd name="connsiteY4" fmla="*/ 414 h 457200"/>
+                <a:gd name="connsiteX5" fmla="*/ 4108 w 232708"/>
+                <a:gd name="connsiteY5" fmla="*/ 0 h 457200"/>
+              </a:gdLst>
+              <a:ahLst/>
+              <a:cxnLst>
+                <a:cxn ang="0">
+                  <a:pos x="connsiteX0" y="connsiteY0"/>
+                </a:cxn>
+                <a:cxn ang="0">
+                  <a:pos x="connsiteX1" y="connsiteY1"/>
+                </a:cxn>
+                <a:cxn ang="0">
+                  <a:pos x="connsiteX2" y="connsiteY2"/>
+                </a:cxn>
+                <a:cxn ang="0">
+                  <a:pos x="connsiteX3" y="connsiteY3"/>
+                </a:cxn>
+                <a:cxn ang="0">
+                  <a:pos x="connsiteX4" y="connsiteY4"/>
+                </a:cxn>
+                <a:cxn ang="0">
+                  <a:pos x="connsiteX5" y="connsiteY5"/>
+                </a:cxn>
+              </a:cxnLst>
+              <a:rect l="l" t="t" r="r" b="b"/>
+              <a:pathLst>
+                <a:path w="232708" h="457200">
+                  <a:moveTo>
+                    <a:pt x="4108" y="0"/>
+                  </a:moveTo>
+                  <a:cubicBezTo>
+                    <a:pt x="130360" y="0"/>
+                    <a:pt x="232708" y="102348"/>
+                    <a:pt x="232708" y="228600"/>
+                  </a:cubicBezTo>
+                  <a:cubicBezTo>
+                    <a:pt x="232708" y="354852"/>
+                    <a:pt x="130360" y="457200"/>
+                    <a:pt x="4108" y="457200"/>
+                  </a:cubicBezTo>
+                  <a:lnTo>
+                    <a:pt x="0" y="456786"/>
+                  </a:lnTo>
+                  <a:lnTo>
+                    <a:pt x="0" y="414"/>
+                  </a:lnTo>
+                  <a:lnTo>
+                    <a:pt x="4108" y="0"/>
+                  </a:lnTo>
+                  <a:close/>
+                </a:path>
+              </a:pathLst>
+            </a:custGeom>
+            <a:solidFill>
+              <a:schemeClr val="accent1"/>
+            </a:solidFill>
+            <a:ln>
+              <a:solidFill>
+                <a:schemeClr val="bg1"/>
+              </a:solidFill>
+            </a:ln>
+          </p:spPr>
+          <p:style>
+            <a:lnRef idx="2">
+              <a:schemeClr val="accent1">
+                <a:shade val="15000"/>
+              </a:schemeClr>
+            </a:lnRef>
+            <a:fillRef idx="1">
+              <a:schemeClr val="accent1"/>
+            </a:fillRef>
+            <a:effectRef idx="0">
+              <a:schemeClr val="accent1"/>
+            </a:effectRef>
+            <a:fontRef idx="minor">
+              <a:schemeClr val="lt1"/>
+            </a:fontRef>
+          </p:style>
+          <p:txBody>
+            <a:bodyPr wrap="square" rtlCol="0" anchor="ctr">
+              <a:noAutofit/>
+            </a:bodyPr>
+            <a:lstStyle/>
+            <a:p>
+              <a:pPr algn="ctr"/>
+              <a:endParaRPr lang="en-US" dirty="0"/>
+            </a:p>
+          </p:txBody>
+        </p:sp>
+      </p:grpSp>
+      <p:grpSp>
+        <p:nvGrpSpPr>
+          <p:cNvPr id="23" name="Group 22">
+            <a:extLst>
+              <a:ext uri="{FF2B5EF4-FFF2-40B4-BE49-F238E27FC236}">
+                <a16:creationId xmlns:a16="http://schemas.microsoft.com/office/drawing/2014/main" id="{E8BA12F4-524C-52A1-B119-533CDDBE00A5}"/>
+              </a:ext>
+            </a:extLst>
+          </p:cNvPr>
+          <p:cNvGrpSpPr/>
+          <p:nvPr/>
+        </p:nvGrpSpPr>
+        <p:grpSpPr>
+          <a:xfrm>
+            <a:off x="6556845" y="240506"/>
+            <a:ext cx="457200" cy="457200"/>
+            <a:chOff x="3394780" y="228600"/>
+            <a:chExt cx="457200" cy="457200"/>
+          </a:xfrm>
+        </p:grpSpPr>
+        <p:sp>
+          <p:nvSpPr>
+            <p:cNvPr id="24" name="Freeform 23">
+              <a:extLst>
+                <a:ext uri="{FF2B5EF4-FFF2-40B4-BE49-F238E27FC236}">
+                  <a16:creationId xmlns:a16="http://schemas.microsoft.com/office/drawing/2014/main" id="{1D8FAC97-8A60-85C9-2BDF-C4418FF1C1EF}"/>
+                </a:ext>
+              </a:extLst>
+            </p:cNvPr>
+            <p:cNvSpPr>
+              <a:spLocks noChangeAspect="1"/>
+            </p:cNvSpPr>
+            <p:nvPr/>
+          </p:nvSpPr>
+          <p:spPr>
+            <a:xfrm>
+              <a:off x="3394780" y="229014"/>
+              <a:ext cx="224492" cy="456372"/>
+            </a:xfrm>
+            <a:custGeom>
+              <a:avLst/>
+              <a:gdLst>
+                <a:gd name="connsiteX0" fmla="*/ 224492 w 224492"/>
+                <a:gd name="connsiteY0" fmla="*/ 0 h 456372"/>
+                <a:gd name="connsiteX1" fmla="*/ 224492 w 224492"/>
+                <a:gd name="connsiteY1" fmla="*/ 456372 h 456372"/>
+                <a:gd name="connsiteX2" fmla="*/ 182529 w 224492"/>
+                <a:gd name="connsiteY2" fmla="*/ 452142 h 456372"/>
+                <a:gd name="connsiteX3" fmla="*/ 0 w 224492"/>
+                <a:gd name="connsiteY3" fmla="*/ 228186 h 456372"/>
+                <a:gd name="connsiteX4" fmla="*/ 182529 w 224492"/>
+                <a:gd name="connsiteY4" fmla="*/ 4230 h 456372"/>
+                <a:gd name="connsiteX5" fmla="*/ 224492 w 224492"/>
+                <a:gd name="connsiteY5" fmla="*/ 0 h 456372"/>
+              </a:gdLst>
+              <a:ahLst/>
+              <a:cxnLst>
+                <a:cxn ang="0">
+                  <a:pos x="connsiteX0" y="connsiteY0"/>
+                </a:cxn>
+                <a:cxn ang="0">
+                  <a:pos x="connsiteX1" y="connsiteY1"/>
+                </a:cxn>
+                <a:cxn ang="0">
+                  <a:pos x="connsiteX2" y="connsiteY2"/>
+                </a:cxn>
+                <a:cxn ang="0">
+                  <a:pos x="connsiteX3" y="connsiteY3"/>
+                </a:cxn>
+                <a:cxn ang="0">
+                  <a:pos x="connsiteX4" y="connsiteY4"/>
+                </a:cxn>
+                <a:cxn ang="0">
+                  <a:pos x="connsiteX5" y="connsiteY5"/>
+                </a:cxn>
+              </a:cxnLst>
+              <a:rect l="l" t="t" r="r" b="b"/>
+              <a:pathLst>
+                <a:path w="224492" h="456372">
+                  <a:moveTo>
+                    <a:pt x="224492" y="0"/>
+                  </a:moveTo>
+                  <a:lnTo>
+                    <a:pt x="224492" y="456372"/>
+                  </a:lnTo>
+                  <a:lnTo>
+                    <a:pt x="182529" y="452142"/>
+                  </a:lnTo>
+                  <a:cubicBezTo>
+                    <a:pt x="78360" y="430826"/>
+                    <a:pt x="0" y="338657"/>
+                    <a:pt x="0" y="228186"/>
+                  </a:cubicBezTo>
+                  <a:cubicBezTo>
+                    <a:pt x="0" y="117716"/>
+                    <a:pt x="78360" y="25547"/>
+                    <a:pt x="182529" y="4230"/>
+                  </a:cubicBezTo>
+                  <a:lnTo>
+                    <a:pt x="224492" y="0"/>
+                  </a:lnTo>
+                  <a:close/>
+                </a:path>
+              </a:pathLst>
+            </a:custGeom>
+            <a:solidFill>
+              <a:schemeClr val="accent4"/>
+            </a:solidFill>
+            <a:ln>
+              <a:solidFill>
+                <a:schemeClr val="bg1"/>
+              </a:solidFill>
+            </a:ln>
+          </p:spPr>
+          <p:style>
+            <a:lnRef idx="2">
+              <a:schemeClr val="accent1">
+                <a:shade val="15000"/>
+              </a:schemeClr>
+            </a:lnRef>
+            <a:fillRef idx="1">
+              <a:schemeClr val="accent1"/>
+            </a:fillRef>
+            <a:effectRef idx="0">
+              <a:schemeClr val="accent1"/>
+            </a:effectRef>
+            <a:fontRef idx="minor">
+              <a:schemeClr val="lt1"/>
+            </a:fontRef>
+          </p:style>
+          <p:txBody>
+            <a:bodyPr wrap="square" rtlCol="0" anchor="ctr">
+              <a:noAutofit/>
+            </a:bodyPr>
+            <a:lstStyle/>
+            <a:p>
+              <a:pPr algn="ctr"/>
+              <a:endParaRPr lang="en-US" dirty="0"/>
+            </a:p>
+          </p:txBody>
+        </p:sp>
+        <p:sp>
+          <p:nvSpPr>
+            <p:cNvPr id="25" name="Freeform 24">
+              <a:extLst>
+                <a:ext uri="{FF2B5EF4-FFF2-40B4-BE49-F238E27FC236}">
+                  <a16:creationId xmlns:a16="http://schemas.microsoft.com/office/drawing/2014/main" id="{6F98C09D-CAF8-D8DF-076F-7D4B0B759279}"/>
+                </a:ext>
+              </a:extLst>
+            </p:cNvPr>
+            <p:cNvSpPr>
+              <a:spLocks noChangeAspect="1"/>
+            </p:cNvSpPr>
+            <p:nvPr/>
+          </p:nvSpPr>
+          <p:spPr>
+            <a:xfrm>
+              <a:off x="3619272" y="228600"/>
+              <a:ext cx="232708" cy="457200"/>
+            </a:xfrm>
+            <a:custGeom>
+              <a:avLst/>
+              <a:gdLst>
+                <a:gd name="connsiteX0" fmla="*/ 4108 w 232708"/>
+                <a:gd name="connsiteY0" fmla="*/ 0 h 457200"/>
+                <a:gd name="connsiteX1" fmla="*/ 232708 w 232708"/>
+                <a:gd name="connsiteY1" fmla="*/ 228600 h 457200"/>
+                <a:gd name="connsiteX2" fmla="*/ 4108 w 232708"/>
+                <a:gd name="connsiteY2" fmla="*/ 457200 h 457200"/>
+                <a:gd name="connsiteX3" fmla="*/ 0 w 232708"/>
+                <a:gd name="connsiteY3" fmla="*/ 456786 h 457200"/>
+                <a:gd name="connsiteX4" fmla="*/ 0 w 232708"/>
+                <a:gd name="connsiteY4" fmla="*/ 414 h 457200"/>
+                <a:gd name="connsiteX5" fmla="*/ 4108 w 232708"/>
+                <a:gd name="connsiteY5" fmla="*/ 0 h 457200"/>
+              </a:gdLst>
+              <a:ahLst/>
+              <a:cxnLst>
+                <a:cxn ang="0">
+                  <a:pos x="connsiteX0" y="connsiteY0"/>
+                </a:cxn>
+                <a:cxn ang="0">
+                  <a:pos x="connsiteX1" y="connsiteY1"/>
+                </a:cxn>
+                <a:cxn ang="0">
+                  <a:pos x="connsiteX2" y="connsiteY2"/>
+                </a:cxn>
+                <a:cxn ang="0">
+                  <a:pos x="connsiteX3" y="connsiteY3"/>
+                </a:cxn>
+                <a:cxn ang="0">
+                  <a:pos x="connsiteX4" y="connsiteY4"/>
+                </a:cxn>
+                <a:cxn ang="0">
+                  <a:pos x="connsiteX5" y="connsiteY5"/>
+                </a:cxn>
+              </a:cxnLst>
+              <a:rect l="l" t="t" r="r" b="b"/>
+              <a:pathLst>
+                <a:path w="232708" h="457200">
+                  <a:moveTo>
+                    <a:pt x="4108" y="0"/>
+                  </a:moveTo>
+                  <a:cubicBezTo>
+                    <a:pt x="130360" y="0"/>
+                    <a:pt x="232708" y="102348"/>
+                    <a:pt x="232708" y="228600"/>
+                  </a:cubicBezTo>
+                  <a:cubicBezTo>
+                    <a:pt x="232708" y="354852"/>
+                    <a:pt x="130360" y="457200"/>
+                    <a:pt x="4108" y="457200"/>
+                  </a:cubicBezTo>
+                  <a:lnTo>
+                    <a:pt x="0" y="456786"/>
+                  </a:lnTo>
+                  <a:lnTo>
+                    <a:pt x="0" y="414"/>
+                  </a:lnTo>
+                  <a:lnTo>
+                    <a:pt x="4108" y="0"/>
+                  </a:lnTo>
+                  <a:close/>
+                </a:path>
+              </a:pathLst>
+            </a:custGeom>
+            <a:solidFill>
+              <a:schemeClr val="accent1"/>
+            </a:solidFill>
+            <a:ln>
+              <a:solidFill>
+                <a:schemeClr val="bg1"/>
+              </a:solidFill>
+            </a:ln>
+          </p:spPr>
+          <p:style>
+            <a:lnRef idx="2">
+              <a:schemeClr val="accent1">
+                <a:shade val="15000"/>
+              </a:schemeClr>
+            </a:lnRef>
+            <a:fillRef idx="1">
+              <a:schemeClr val="accent1"/>
+            </a:fillRef>
+            <a:effectRef idx="0">
+              <a:schemeClr val="accent1"/>
+            </a:effectRef>
+            <a:fontRef idx="minor">
+              <a:schemeClr val="lt1"/>
+            </a:fontRef>
+          </p:style>
+          <p:txBody>
+            <a:bodyPr wrap="square" rtlCol="0" anchor="ctr">
+              <a:noAutofit/>
+            </a:bodyPr>
+            <a:lstStyle/>
+            <a:p>
+              <a:pPr algn="ctr"/>
+              <a:endParaRPr lang="en-US" dirty="0"/>
+            </a:p>
+          </p:txBody>
+        </p:sp>
+      </p:grpSp>
+    </p:spTree>
+    <p:extLst>
+      <p:ext uri="{BB962C8B-B14F-4D97-AF65-F5344CB8AC3E}">
+        <p14:creationId xmlns:p14="http://schemas.microsoft.com/office/powerpoint/2010/main" val="326321307"/>
+      </p:ext>
+    </p:extLst>
+  </p:cSld>
+  <p:clrMapOvr>
+    <a:masterClrMapping/>
+  </p:clrMapOvr>
+</p:sld>
+</file>
+
+<file path=ppt/slides/slide3.xml><?xml version="1.0" encoding="utf-8"?>
 <p:sld xmlns:a="http://schemas.openxmlformats.org/drawingml/2006/main" xmlns:r="http://schemas.openxmlformats.org/officeDocument/2006/relationships" xmlns:p="http://schemas.openxmlformats.org/presentationml/2006/main">
   <p:cSld>
     <p:spTree>

--- a/lectures/from_propositional_logic_to_probability_theory/proportional_syllogism_on_steroids.pptx
+++ b/lectures/from_propositional_logic_to_probability_theory/proportional_syllogism_on_steroids.pptx
@@ -9,7 +9,7 @@
   </p:notesMasterIdLst>
   <p:sldIdLst>
     <p:sldId id="341" r:id="rId2"/>
-    <p:sldId id="343" r:id="rId3"/>
+    <p:sldId id="345" r:id="rId3"/>
     <p:sldId id="342" r:id="rId4"/>
   </p:sldIdLst>
   <p:sldSz cx="9144000" cy="914400"/>
@@ -3327,741 +3327,12 @@
           <a:chExt cx="0" cy="0"/>
         </a:xfrm>
       </p:grpSpPr>
-      <p:grpSp>
-        <p:nvGrpSpPr>
-          <p:cNvPr id="12" name="Group 11">
-            <a:extLst>
-              <a:ext uri="{FF2B5EF4-FFF2-40B4-BE49-F238E27FC236}">
-                <a16:creationId xmlns:a16="http://schemas.microsoft.com/office/drawing/2014/main" id="{8AB2E877-D303-D77D-82EE-14E55D296B69}"/>
-              </a:ext>
-            </a:extLst>
-          </p:cNvPr>
-          <p:cNvGrpSpPr/>
-          <p:nvPr/>
-        </p:nvGrpSpPr>
-        <p:grpSpPr>
-          <a:xfrm>
-            <a:off x="1497541" y="228600"/>
-            <a:ext cx="6148918" cy="457200"/>
-            <a:chOff x="302004" y="209723"/>
-            <a:chExt cx="6148918" cy="457200"/>
-          </a:xfrm>
-        </p:grpSpPr>
-        <p:sp>
-          <p:nvSpPr>
-            <p:cNvPr id="2" name="Oval 1">
-              <a:extLst>
-                <a:ext uri="{FF2B5EF4-FFF2-40B4-BE49-F238E27FC236}">
-                  <a16:creationId xmlns:a16="http://schemas.microsoft.com/office/drawing/2014/main" id="{E52B60D4-5859-C661-0388-DD0767B813D7}"/>
-                </a:ext>
-              </a:extLst>
-            </p:cNvPr>
-            <p:cNvSpPr>
-              <a:spLocks noChangeAspect="1"/>
-            </p:cNvSpPr>
-            <p:nvPr/>
-          </p:nvSpPr>
-          <p:spPr>
-            <a:xfrm>
-              <a:off x="302004" y="209723"/>
-              <a:ext cx="457200" cy="457200"/>
-            </a:xfrm>
-            <a:prstGeom prst="ellipse">
-              <a:avLst/>
-            </a:prstGeom>
-            <a:solidFill>
-              <a:schemeClr val="accent4"/>
-            </a:solidFill>
-            <a:ln>
-              <a:solidFill>
-                <a:schemeClr val="bg1"/>
-              </a:solidFill>
-            </a:ln>
-          </p:spPr>
-          <p:style>
-            <a:lnRef idx="2">
-              <a:schemeClr val="accent1">
-                <a:shade val="15000"/>
-              </a:schemeClr>
-            </a:lnRef>
-            <a:fillRef idx="1">
-              <a:schemeClr val="accent1"/>
-            </a:fillRef>
-            <a:effectRef idx="0">
-              <a:schemeClr val="accent1"/>
-            </a:effectRef>
-            <a:fontRef idx="minor">
-              <a:schemeClr val="lt1"/>
-            </a:fontRef>
-          </p:style>
-          <p:txBody>
-            <a:bodyPr rtlCol="0" anchor="ctr"/>
-            <a:lstStyle/>
-            <a:p>
-              <a:pPr algn="ctr"/>
-              <a:endParaRPr lang="en-US"/>
-            </a:p>
-          </p:txBody>
-        </p:sp>
-        <p:sp>
-          <p:nvSpPr>
-            <p:cNvPr id="3" name="Oval 2">
-              <a:extLst>
-                <a:ext uri="{FF2B5EF4-FFF2-40B4-BE49-F238E27FC236}">
-                  <a16:creationId xmlns:a16="http://schemas.microsoft.com/office/drawing/2014/main" id="{800101A5-933F-9DAC-2199-34812929D1B6}"/>
-                </a:ext>
-              </a:extLst>
-            </p:cNvPr>
-            <p:cNvSpPr>
-              <a:spLocks noChangeAspect="1"/>
-            </p:cNvSpPr>
-            <p:nvPr/>
-          </p:nvSpPr>
-          <p:spPr>
-            <a:xfrm>
-              <a:off x="934417" y="209723"/>
-              <a:ext cx="457200" cy="457200"/>
-            </a:xfrm>
-            <a:prstGeom prst="ellipse">
-              <a:avLst/>
-            </a:prstGeom>
-            <a:solidFill>
-              <a:schemeClr val="accent4"/>
-            </a:solidFill>
-            <a:ln>
-              <a:solidFill>
-                <a:schemeClr val="bg1"/>
-              </a:solidFill>
-            </a:ln>
-          </p:spPr>
-          <p:style>
-            <a:lnRef idx="2">
-              <a:schemeClr val="accent1">
-                <a:shade val="15000"/>
-              </a:schemeClr>
-            </a:lnRef>
-            <a:fillRef idx="1">
-              <a:schemeClr val="accent1"/>
-            </a:fillRef>
-            <a:effectRef idx="0">
-              <a:schemeClr val="accent1"/>
-            </a:effectRef>
-            <a:fontRef idx="minor">
-              <a:schemeClr val="lt1"/>
-            </a:fontRef>
-          </p:style>
-          <p:txBody>
-            <a:bodyPr rtlCol="0" anchor="ctr"/>
-            <a:lstStyle/>
-            <a:p>
-              <a:pPr algn="ctr"/>
-              <a:endParaRPr lang="en-US"/>
-            </a:p>
-          </p:txBody>
-        </p:sp>
-        <p:sp>
-          <p:nvSpPr>
-            <p:cNvPr id="4" name="Oval 3">
-              <a:extLst>
-                <a:ext uri="{FF2B5EF4-FFF2-40B4-BE49-F238E27FC236}">
-                  <a16:creationId xmlns:a16="http://schemas.microsoft.com/office/drawing/2014/main" id="{BDF9EEF2-CA3B-6BA9-4738-CB8B524BFD3C}"/>
-                </a:ext>
-              </a:extLst>
-            </p:cNvPr>
-            <p:cNvSpPr>
-              <a:spLocks noChangeAspect="1"/>
-            </p:cNvSpPr>
-            <p:nvPr/>
-          </p:nvSpPr>
-          <p:spPr>
-            <a:xfrm>
-              <a:off x="1566830" y="209723"/>
-              <a:ext cx="457200" cy="457200"/>
-            </a:xfrm>
-            <a:prstGeom prst="ellipse">
-              <a:avLst/>
-            </a:prstGeom>
-            <a:solidFill>
-              <a:schemeClr val="accent4"/>
-            </a:solidFill>
-            <a:ln>
-              <a:solidFill>
-                <a:schemeClr val="bg1"/>
-              </a:solidFill>
-            </a:ln>
-          </p:spPr>
-          <p:style>
-            <a:lnRef idx="2">
-              <a:schemeClr val="accent1">
-                <a:shade val="15000"/>
-              </a:schemeClr>
-            </a:lnRef>
-            <a:fillRef idx="1">
-              <a:schemeClr val="accent1"/>
-            </a:fillRef>
-            <a:effectRef idx="0">
-              <a:schemeClr val="accent1"/>
-            </a:effectRef>
-            <a:fontRef idx="minor">
-              <a:schemeClr val="lt1"/>
-            </a:fontRef>
-          </p:style>
-          <p:txBody>
-            <a:bodyPr rtlCol="0" anchor="ctr"/>
-            <a:lstStyle/>
-            <a:p>
-              <a:pPr algn="ctr"/>
-              <a:endParaRPr lang="en-US" dirty="0"/>
-            </a:p>
-          </p:txBody>
-        </p:sp>
-        <p:sp>
-          <p:nvSpPr>
-            <p:cNvPr id="5" name="Oval 4">
-              <a:extLst>
-                <a:ext uri="{FF2B5EF4-FFF2-40B4-BE49-F238E27FC236}">
-                  <a16:creationId xmlns:a16="http://schemas.microsoft.com/office/drawing/2014/main" id="{091324B3-F0C8-509F-F963-6EDC5D07D8C6}"/>
-                </a:ext>
-              </a:extLst>
-            </p:cNvPr>
-            <p:cNvSpPr>
-              <a:spLocks noChangeAspect="1"/>
-            </p:cNvSpPr>
-            <p:nvPr/>
-          </p:nvSpPr>
-          <p:spPr>
-            <a:xfrm>
-              <a:off x="2199243" y="209723"/>
-              <a:ext cx="457200" cy="457200"/>
-            </a:xfrm>
-            <a:prstGeom prst="ellipse">
-              <a:avLst/>
-            </a:prstGeom>
-            <a:solidFill>
-              <a:schemeClr val="accent1"/>
-            </a:solidFill>
-            <a:ln>
-              <a:solidFill>
-                <a:schemeClr val="bg1"/>
-              </a:solidFill>
-            </a:ln>
-          </p:spPr>
-          <p:style>
-            <a:lnRef idx="2">
-              <a:schemeClr val="accent1">
-                <a:shade val="15000"/>
-              </a:schemeClr>
-            </a:lnRef>
-            <a:fillRef idx="1">
-              <a:schemeClr val="accent1"/>
-            </a:fillRef>
-            <a:effectRef idx="0">
-              <a:schemeClr val="accent1"/>
-            </a:effectRef>
-            <a:fontRef idx="minor">
-              <a:schemeClr val="lt1"/>
-            </a:fontRef>
-          </p:style>
-          <p:txBody>
-            <a:bodyPr rtlCol="0" anchor="ctr"/>
-            <a:lstStyle/>
-            <a:p>
-              <a:pPr algn="ctr"/>
-              <a:endParaRPr lang="en-US"/>
-            </a:p>
-          </p:txBody>
-        </p:sp>
-        <p:sp>
-          <p:nvSpPr>
-            <p:cNvPr id="6" name="Oval 5">
-              <a:extLst>
-                <a:ext uri="{FF2B5EF4-FFF2-40B4-BE49-F238E27FC236}">
-                  <a16:creationId xmlns:a16="http://schemas.microsoft.com/office/drawing/2014/main" id="{67F0A257-6881-2D81-6340-3BC4F1F39A18}"/>
-                </a:ext>
-              </a:extLst>
-            </p:cNvPr>
-            <p:cNvSpPr>
-              <a:spLocks noChangeAspect="1"/>
-            </p:cNvSpPr>
-            <p:nvPr/>
-          </p:nvSpPr>
-          <p:spPr>
-            <a:xfrm>
-              <a:off x="2831656" y="209723"/>
-              <a:ext cx="457200" cy="457200"/>
-            </a:xfrm>
-            <a:prstGeom prst="ellipse">
-              <a:avLst/>
-            </a:prstGeom>
-            <a:solidFill>
-              <a:schemeClr val="accent1"/>
-            </a:solidFill>
-            <a:ln>
-              <a:solidFill>
-                <a:schemeClr val="bg1"/>
-              </a:solidFill>
-            </a:ln>
-          </p:spPr>
-          <p:style>
-            <a:lnRef idx="2">
-              <a:schemeClr val="accent1">
-                <a:shade val="15000"/>
-              </a:schemeClr>
-            </a:lnRef>
-            <a:fillRef idx="1">
-              <a:schemeClr val="accent1"/>
-            </a:fillRef>
-            <a:effectRef idx="0">
-              <a:schemeClr val="accent1"/>
-            </a:effectRef>
-            <a:fontRef idx="minor">
-              <a:schemeClr val="lt1"/>
-            </a:fontRef>
-          </p:style>
-          <p:txBody>
-            <a:bodyPr rtlCol="0" anchor="ctr"/>
-            <a:lstStyle/>
-            <a:p>
-              <a:pPr algn="ctr"/>
-              <a:endParaRPr lang="en-US"/>
-            </a:p>
-          </p:txBody>
-        </p:sp>
-        <p:sp>
-          <p:nvSpPr>
-            <p:cNvPr id="7" name="Oval 6">
-              <a:extLst>
-                <a:ext uri="{FF2B5EF4-FFF2-40B4-BE49-F238E27FC236}">
-                  <a16:creationId xmlns:a16="http://schemas.microsoft.com/office/drawing/2014/main" id="{319EF128-1B27-212D-F1F2-2014F51A17D1}"/>
-                </a:ext>
-              </a:extLst>
-            </p:cNvPr>
-            <p:cNvSpPr>
-              <a:spLocks noChangeAspect="1"/>
-            </p:cNvSpPr>
-            <p:nvPr/>
-          </p:nvSpPr>
-          <p:spPr>
-            <a:xfrm>
-              <a:off x="3464069" y="209723"/>
-              <a:ext cx="457200" cy="457200"/>
-            </a:xfrm>
-            <a:prstGeom prst="ellipse">
-              <a:avLst/>
-            </a:prstGeom>
-            <a:solidFill>
-              <a:schemeClr val="accent1"/>
-            </a:solidFill>
-            <a:ln>
-              <a:solidFill>
-                <a:schemeClr val="bg1"/>
-              </a:solidFill>
-            </a:ln>
-          </p:spPr>
-          <p:style>
-            <a:lnRef idx="2">
-              <a:schemeClr val="accent1">
-                <a:shade val="15000"/>
-              </a:schemeClr>
-            </a:lnRef>
-            <a:fillRef idx="1">
-              <a:schemeClr val="accent1"/>
-            </a:fillRef>
-            <a:effectRef idx="0">
-              <a:schemeClr val="accent1"/>
-            </a:effectRef>
-            <a:fontRef idx="minor">
-              <a:schemeClr val="lt1"/>
-            </a:fontRef>
-          </p:style>
-          <p:txBody>
-            <a:bodyPr rtlCol="0" anchor="ctr"/>
-            <a:lstStyle/>
-            <a:p>
-              <a:pPr algn="ctr"/>
-              <a:endParaRPr lang="en-US"/>
-            </a:p>
-          </p:txBody>
-        </p:sp>
-        <p:sp>
-          <p:nvSpPr>
-            <p:cNvPr id="8" name="Oval 7">
-              <a:extLst>
-                <a:ext uri="{FF2B5EF4-FFF2-40B4-BE49-F238E27FC236}">
-                  <a16:creationId xmlns:a16="http://schemas.microsoft.com/office/drawing/2014/main" id="{2FF70347-6CE9-BBBB-0AF8-AB3A56584DEB}"/>
-                </a:ext>
-              </a:extLst>
-            </p:cNvPr>
-            <p:cNvSpPr>
-              <a:spLocks noChangeAspect="1"/>
-            </p:cNvSpPr>
-            <p:nvPr/>
-          </p:nvSpPr>
-          <p:spPr>
-            <a:xfrm>
-              <a:off x="4096482" y="209723"/>
-              <a:ext cx="457200" cy="457200"/>
-            </a:xfrm>
-            <a:prstGeom prst="ellipse">
-              <a:avLst/>
-            </a:prstGeom>
-            <a:solidFill>
-              <a:schemeClr val="accent1"/>
-            </a:solidFill>
-            <a:ln>
-              <a:solidFill>
-                <a:schemeClr val="bg1"/>
-              </a:solidFill>
-            </a:ln>
-          </p:spPr>
-          <p:style>
-            <a:lnRef idx="2">
-              <a:schemeClr val="accent1">
-                <a:shade val="15000"/>
-              </a:schemeClr>
-            </a:lnRef>
-            <a:fillRef idx="1">
-              <a:schemeClr val="accent1"/>
-            </a:fillRef>
-            <a:effectRef idx="0">
-              <a:schemeClr val="accent1"/>
-            </a:effectRef>
-            <a:fontRef idx="minor">
-              <a:schemeClr val="lt1"/>
-            </a:fontRef>
-          </p:style>
-          <p:txBody>
-            <a:bodyPr rtlCol="0" anchor="ctr"/>
-            <a:lstStyle/>
-            <a:p>
-              <a:pPr algn="ctr"/>
-              <a:endParaRPr lang="en-US"/>
-            </a:p>
-          </p:txBody>
-        </p:sp>
-        <p:sp>
-          <p:nvSpPr>
-            <p:cNvPr id="9" name="Oval 8">
-              <a:extLst>
-                <a:ext uri="{FF2B5EF4-FFF2-40B4-BE49-F238E27FC236}">
-                  <a16:creationId xmlns:a16="http://schemas.microsoft.com/office/drawing/2014/main" id="{1D7C7847-7F27-8DF9-23E8-F393BD883349}"/>
-                </a:ext>
-              </a:extLst>
-            </p:cNvPr>
-            <p:cNvSpPr>
-              <a:spLocks noChangeAspect="1"/>
-            </p:cNvSpPr>
-            <p:nvPr/>
-          </p:nvSpPr>
-          <p:spPr>
-            <a:xfrm>
-              <a:off x="4728895" y="209723"/>
-              <a:ext cx="457200" cy="457200"/>
-            </a:xfrm>
-            <a:prstGeom prst="ellipse">
-              <a:avLst/>
-            </a:prstGeom>
-            <a:solidFill>
-              <a:srgbClr val="8EBB6F"/>
-            </a:solidFill>
-            <a:ln>
-              <a:solidFill>
-                <a:schemeClr val="bg1"/>
-              </a:solidFill>
-            </a:ln>
-          </p:spPr>
-          <p:style>
-            <a:lnRef idx="2">
-              <a:schemeClr val="accent1">
-                <a:shade val="15000"/>
-              </a:schemeClr>
-            </a:lnRef>
-            <a:fillRef idx="1">
-              <a:schemeClr val="accent1"/>
-            </a:fillRef>
-            <a:effectRef idx="0">
-              <a:schemeClr val="accent1"/>
-            </a:effectRef>
-            <a:fontRef idx="minor">
-              <a:schemeClr val="lt1"/>
-            </a:fontRef>
-          </p:style>
-          <p:txBody>
-            <a:bodyPr rtlCol="0" anchor="ctr"/>
-            <a:lstStyle/>
-            <a:p>
-              <a:pPr algn="ctr"/>
-              <a:endParaRPr lang="en-US"/>
-            </a:p>
-          </p:txBody>
-        </p:sp>
-        <p:sp>
-          <p:nvSpPr>
-            <p:cNvPr id="10" name="Oval 9">
-              <a:extLst>
-                <a:ext uri="{FF2B5EF4-FFF2-40B4-BE49-F238E27FC236}">
-                  <a16:creationId xmlns:a16="http://schemas.microsoft.com/office/drawing/2014/main" id="{7A24C665-D135-20FA-4439-90CC7C61BB26}"/>
-                </a:ext>
-              </a:extLst>
-            </p:cNvPr>
-            <p:cNvSpPr>
-              <a:spLocks noChangeAspect="1"/>
-            </p:cNvSpPr>
-            <p:nvPr/>
-          </p:nvSpPr>
-          <p:spPr>
-            <a:xfrm>
-              <a:off x="5361308" y="209723"/>
-              <a:ext cx="457200" cy="457200"/>
-            </a:xfrm>
-            <a:prstGeom prst="ellipse">
-              <a:avLst/>
-            </a:prstGeom>
-            <a:solidFill>
-              <a:srgbClr val="8EBB6F"/>
-            </a:solidFill>
-            <a:ln>
-              <a:solidFill>
-                <a:schemeClr val="bg1"/>
-              </a:solidFill>
-            </a:ln>
-          </p:spPr>
-          <p:style>
-            <a:lnRef idx="2">
-              <a:schemeClr val="accent1">
-                <a:shade val="15000"/>
-              </a:schemeClr>
-            </a:lnRef>
-            <a:fillRef idx="1">
-              <a:schemeClr val="accent1"/>
-            </a:fillRef>
-            <a:effectRef idx="0">
-              <a:schemeClr val="accent1"/>
-            </a:effectRef>
-            <a:fontRef idx="minor">
-              <a:schemeClr val="lt1"/>
-            </a:fontRef>
-          </p:style>
-          <p:txBody>
-            <a:bodyPr rtlCol="0" anchor="ctr"/>
-            <a:lstStyle/>
-            <a:p>
-              <a:pPr algn="ctr"/>
-              <a:endParaRPr lang="en-US"/>
-            </a:p>
-          </p:txBody>
-        </p:sp>
-        <p:sp>
-          <p:nvSpPr>
-            <p:cNvPr id="11" name="Oval 10">
-              <a:extLst>
-                <a:ext uri="{FF2B5EF4-FFF2-40B4-BE49-F238E27FC236}">
-                  <a16:creationId xmlns:a16="http://schemas.microsoft.com/office/drawing/2014/main" id="{C6E515BF-83A5-B6D0-49E0-E96D02BE8EF1}"/>
-                </a:ext>
-              </a:extLst>
-            </p:cNvPr>
-            <p:cNvSpPr>
-              <a:spLocks noChangeAspect="1"/>
-            </p:cNvSpPr>
-            <p:nvPr/>
-          </p:nvSpPr>
-          <p:spPr>
-            <a:xfrm>
-              <a:off x="5993722" y="209723"/>
-              <a:ext cx="457200" cy="457200"/>
-            </a:xfrm>
-            <a:prstGeom prst="ellipse">
-              <a:avLst/>
-            </a:prstGeom>
-            <a:noFill/>
-            <a:ln>
-              <a:solidFill>
-                <a:schemeClr val="bg2">
-                  <a:lumMod val="90000"/>
-                </a:schemeClr>
-              </a:solidFill>
-            </a:ln>
-          </p:spPr>
-          <p:style>
-            <a:lnRef idx="2">
-              <a:schemeClr val="accent1">
-                <a:shade val="15000"/>
-              </a:schemeClr>
-            </a:lnRef>
-            <a:fillRef idx="1">
-              <a:schemeClr val="accent1"/>
-            </a:fillRef>
-            <a:effectRef idx="0">
-              <a:schemeClr val="accent1"/>
-            </a:effectRef>
-            <a:fontRef idx="minor">
-              <a:schemeClr val="lt1"/>
-            </a:fontRef>
-          </p:style>
-          <p:txBody>
-            <a:bodyPr rtlCol="0" anchor="ctr"/>
-            <a:lstStyle/>
-            <a:p>
-              <a:pPr algn="ctr"/>
-              <a:endParaRPr lang="en-US"/>
-            </a:p>
-          </p:txBody>
-        </p:sp>
-      </p:grpSp>
-    </p:spTree>
-    <p:extLst>
-      <p:ext uri="{BB962C8B-B14F-4D97-AF65-F5344CB8AC3E}">
-        <p14:creationId xmlns:p14="http://schemas.microsoft.com/office/powerpoint/2010/main" val="3681102296"/>
-      </p:ext>
-    </p:extLst>
-  </p:cSld>
-  <p:clrMapOvr>
-    <a:masterClrMapping/>
-  </p:clrMapOvr>
-</p:sld>
-</file>
-
-<file path=ppt/slides/slide2.xml><?xml version="1.0" encoding="utf-8"?>
-<p:sld xmlns:a="http://schemas.openxmlformats.org/drawingml/2006/main" xmlns:r="http://schemas.openxmlformats.org/officeDocument/2006/relationships" xmlns:p="http://schemas.openxmlformats.org/presentationml/2006/main">
-  <p:cSld>
-    <p:spTree>
-      <p:nvGrpSpPr>
-        <p:cNvPr id="1" name="">
-          <a:extLst>
-            <a:ext uri="{FF2B5EF4-FFF2-40B4-BE49-F238E27FC236}">
-              <a16:creationId xmlns:a16="http://schemas.microsoft.com/office/drawing/2014/main" id="{3676BE51-1AEE-8756-75D0-C2C2AAE6A2D2}"/>
-            </a:ext>
-          </a:extLst>
-        </p:cNvPr>
-        <p:cNvGrpSpPr/>
-        <p:nvPr/>
-      </p:nvGrpSpPr>
-      <p:grpSpPr>
-        <a:xfrm>
-          <a:off x="0" y="0"/>
-          <a:ext cx="0" cy="0"/>
-          <a:chOff x="0" y="0"/>
-          <a:chExt cx="0" cy="0"/>
-        </a:xfrm>
-      </p:grpSpPr>
-      <p:sp>
-        <p:nvSpPr>
-          <p:cNvPr id="26" name="Oval 25">
-            <a:extLst>
-              <a:ext uri="{FF2B5EF4-FFF2-40B4-BE49-F238E27FC236}">
-                <a16:creationId xmlns:a16="http://schemas.microsoft.com/office/drawing/2014/main" id="{D99E1143-0CD8-4697-C5F5-DC82255600C4}"/>
-              </a:ext>
-            </a:extLst>
-          </p:cNvPr>
-          <p:cNvSpPr>
-            <a:spLocks noChangeAspect="1"/>
-          </p:cNvSpPr>
-          <p:nvPr/>
-        </p:nvSpPr>
-        <p:spPr>
-          <a:xfrm>
-            <a:off x="3398889" y="234616"/>
-            <a:ext cx="457200" cy="457200"/>
-          </a:xfrm>
-          <a:prstGeom prst="ellipse">
-            <a:avLst/>
-          </a:prstGeom>
-          <a:solidFill>
-            <a:schemeClr val="accent1"/>
-          </a:solidFill>
-          <a:ln>
-            <a:solidFill>
-              <a:schemeClr val="bg1"/>
-            </a:solidFill>
-          </a:ln>
-        </p:spPr>
-        <p:style>
-          <a:lnRef idx="2">
-            <a:schemeClr val="accent1">
-              <a:shade val="15000"/>
-            </a:schemeClr>
-          </a:lnRef>
-          <a:fillRef idx="1">
-            <a:schemeClr val="accent1"/>
-          </a:fillRef>
-          <a:effectRef idx="0">
-            <a:schemeClr val="accent1"/>
-          </a:effectRef>
-          <a:fontRef idx="minor">
-            <a:schemeClr val="lt1"/>
-          </a:fontRef>
-        </p:style>
-        <p:txBody>
-          <a:bodyPr rtlCol="0" anchor="ctr"/>
-          <a:lstStyle/>
-          <a:p>
-            <a:pPr algn="ctr"/>
-            <a:endParaRPr lang="en-US"/>
-          </a:p>
-        </p:txBody>
-      </p:sp>
-      <p:sp>
-        <p:nvSpPr>
-          <p:cNvPr id="27" name="Oval 26">
-            <a:extLst>
-              <a:ext uri="{FF2B5EF4-FFF2-40B4-BE49-F238E27FC236}">
-                <a16:creationId xmlns:a16="http://schemas.microsoft.com/office/drawing/2014/main" id="{D693120E-51C3-A3E8-F892-C3F09D133238}"/>
-              </a:ext>
-            </a:extLst>
-          </p:cNvPr>
-          <p:cNvSpPr>
-            <a:spLocks noChangeAspect="1"/>
-          </p:cNvSpPr>
-          <p:nvPr/>
-        </p:nvSpPr>
-        <p:spPr>
-          <a:xfrm>
-            <a:off x="2770585" y="228186"/>
-            <a:ext cx="457200" cy="457200"/>
-          </a:xfrm>
-          <a:prstGeom prst="ellipse">
-            <a:avLst/>
-          </a:prstGeom>
-          <a:solidFill>
-            <a:schemeClr val="accent4"/>
-          </a:solidFill>
-          <a:ln>
-            <a:solidFill>
-              <a:schemeClr val="bg1"/>
-            </a:solidFill>
-          </a:ln>
-        </p:spPr>
-        <p:style>
-          <a:lnRef idx="2">
-            <a:schemeClr val="accent1">
-              <a:shade val="15000"/>
-            </a:schemeClr>
-          </a:lnRef>
-          <a:fillRef idx="1">
-            <a:schemeClr val="accent1"/>
-          </a:fillRef>
-          <a:effectRef idx="0">
-            <a:schemeClr val="accent1"/>
-          </a:effectRef>
-          <a:fontRef idx="minor">
-            <a:schemeClr val="lt1"/>
-          </a:fontRef>
-        </p:style>
-        <p:txBody>
-          <a:bodyPr rtlCol="0" anchor="ctr"/>
-          <a:lstStyle/>
-          <a:p>
-            <a:pPr algn="ctr"/>
-            <a:endParaRPr lang="en-US"/>
-          </a:p>
-        </p:txBody>
-      </p:sp>
       <p:sp>
         <p:nvSpPr>
           <p:cNvPr id="2" name="Oval 1">
             <a:extLst>
               <a:ext uri="{FF2B5EF4-FFF2-40B4-BE49-F238E27FC236}">
-                <a16:creationId xmlns:a16="http://schemas.microsoft.com/office/drawing/2014/main" id="{737A75BE-2D36-D20C-63E6-32D2960BFA64}"/>
+                <a16:creationId xmlns:a16="http://schemas.microsoft.com/office/drawing/2014/main" id="{E52B60D4-5859-C661-0388-DD0767B813D7}"/>
               </a:ext>
             </a:extLst>
           </p:cNvPr>
@@ -4117,7 +3388,7 @@
           <p:cNvPr id="3" name="Oval 2">
             <a:extLst>
               <a:ext uri="{FF2B5EF4-FFF2-40B4-BE49-F238E27FC236}">
-                <a16:creationId xmlns:a16="http://schemas.microsoft.com/office/drawing/2014/main" id="{F8838413-0BD9-BD7B-B9F0-DD0B776B60C1}"/>
+                <a16:creationId xmlns:a16="http://schemas.microsoft.com/office/drawing/2014/main" id="{800101A5-933F-9DAC-2199-34812929D1B6}"/>
               </a:ext>
             </a:extLst>
           </p:cNvPr>
@@ -4170,10 +3441,122 @@
       </p:sp>
       <p:sp>
         <p:nvSpPr>
+          <p:cNvPr id="4" name="Oval 3">
+            <a:extLst>
+              <a:ext uri="{FF2B5EF4-FFF2-40B4-BE49-F238E27FC236}">
+                <a16:creationId xmlns:a16="http://schemas.microsoft.com/office/drawing/2014/main" id="{BDF9EEF2-CA3B-6BA9-4738-CB8B524BFD3C}"/>
+              </a:ext>
+            </a:extLst>
+          </p:cNvPr>
+          <p:cNvSpPr>
+            <a:spLocks noChangeAspect="1"/>
+          </p:cNvSpPr>
+          <p:nvPr/>
+        </p:nvSpPr>
+        <p:spPr>
+          <a:xfrm>
+            <a:off x="2762367" y="228600"/>
+            <a:ext cx="457200" cy="457200"/>
+          </a:xfrm>
+          <a:prstGeom prst="ellipse">
+            <a:avLst/>
+          </a:prstGeom>
+          <a:solidFill>
+            <a:schemeClr val="accent4"/>
+          </a:solidFill>
+          <a:ln>
+            <a:solidFill>
+              <a:schemeClr val="bg1"/>
+            </a:solidFill>
+          </a:ln>
+        </p:spPr>
+        <p:style>
+          <a:lnRef idx="2">
+            <a:schemeClr val="accent1">
+              <a:shade val="15000"/>
+            </a:schemeClr>
+          </a:lnRef>
+          <a:fillRef idx="1">
+            <a:schemeClr val="accent1"/>
+          </a:fillRef>
+          <a:effectRef idx="0">
+            <a:schemeClr val="accent1"/>
+          </a:effectRef>
+          <a:fontRef idx="minor">
+            <a:schemeClr val="lt1"/>
+          </a:fontRef>
+        </p:style>
+        <p:txBody>
+          <a:bodyPr rtlCol="0" anchor="ctr"/>
+          <a:lstStyle/>
+          <a:p>
+            <a:pPr algn="ctr"/>
+            <a:endParaRPr lang="en-US" dirty="0"/>
+          </a:p>
+        </p:txBody>
+      </p:sp>
+      <p:sp>
+        <p:nvSpPr>
+          <p:cNvPr id="5" name="Oval 4">
+            <a:extLst>
+              <a:ext uri="{FF2B5EF4-FFF2-40B4-BE49-F238E27FC236}">
+                <a16:creationId xmlns:a16="http://schemas.microsoft.com/office/drawing/2014/main" id="{091324B3-F0C8-509F-F963-6EDC5D07D8C6}"/>
+              </a:ext>
+            </a:extLst>
+          </p:cNvPr>
+          <p:cNvSpPr>
+            <a:spLocks noChangeAspect="1"/>
+          </p:cNvSpPr>
+          <p:nvPr/>
+        </p:nvSpPr>
+        <p:spPr>
+          <a:xfrm>
+            <a:off x="3394780" y="228600"/>
+            <a:ext cx="457200" cy="457200"/>
+          </a:xfrm>
+          <a:prstGeom prst="ellipse">
+            <a:avLst/>
+          </a:prstGeom>
+          <a:solidFill>
+            <a:schemeClr val="accent1"/>
+          </a:solidFill>
+          <a:ln>
+            <a:solidFill>
+              <a:schemeClr val="bg1"/>
+            </a:solidFill>
+          </a:ln>
+        </p:spPr>
+        <p:style>
+          <a:lnRef idx="2">
+            <a:schemeClr val="accent1">
+              <a:shade val="15000"/>
+            </a:schemeClr>
+          </a:lnRef>
+          <a:fillRef idx="1">
+            <a:schemeClr val="accent1"/>
+          </a:fillRef>
+          <a:effectRef idx="0">
+            <a:schemeClr val="accent1"/>
+          </a:effectRef>
+          <a:fontRef idx="minor">
+            <a:schemeClr val="lt1"/>
+          </a:fontRef>
+        </p:style>
+        <p:txBody>
+          <a:bodyPr rtlCol="0" anchor="ctr"/>
+          <a:lstStyle/>
+          <a:p>
+            <a:pPr algn="ctr"/>
+            <a:endParaRPr lang="en-US"/>
+          </a:p>
+        </p:txBody>
+      </p:sp>
+      <p:sp>
+        <p:nvSpPr>
           <p:cNvPr id="6" name="Oval 5">
             <a:extLst>
               <a:ext uri="{FF2B5EF4-FFF2-40B4-BE49-F238E27FC236}">
-                <a16:creationId xmlns:a16="http://schemas.microsoft.com/office/drawing/2014/main" id="{3CB09799-CBA5-7E88-0752-369CE44DB8D1}"/>
+                <a16:creationId xmlns:a16="http://schemas.microsoft.com/office/drawing/2014/main" id="{67F0A257-6881-2D81-6340-3BC4F1F39A18}"/>
               </a:ext>
             </a:extLst>
           </p:cNvPr>
@@ -4229,7 +3612,7 @@
           <p:cNvPr id="7" name="Oval 6">
             <a:extLst>
               <a:ext uri="{FF2B5EF4-FFF2-40B4-BE49-F238E27FC236}">
-                <a16:creationId xmlns:a16="http://schemas.microsoft.com/office/drawing/2014/main" id="{4898D57F-2B18-C226-3B6A-092C2966978B}"/>
+                <a16:creationId xmlns:a16="http://schemas.microsoft.com/office/drawing/2014/main" id="{319EF128-1B27-212D-F1F2-2014F51A17D1}"/>
               </a:ext>
             </a:extLst>
           </p:cNvPr>
@@ -4285,7 +3668,7 @@
           <p:cNvPr id="8" name="Oval 7">
             <a:extLst>
               <a:ext uri="{FF2B5EF4-FFF2-40B4-BE49-F238E27FC236}">
-                <a16:creationId xmlns:a16="http://schemas.microsoft.com/office/drawing/2014/main" id="{D74C488C-2B7F-0AB6-3BFC-F1D5B987974C}"/>
+                <a16:creationId xmlns:a16="http://schemas.microsoft.com/office/drawing/2014/main" id="{2FF70347-6CE9-BBBB-0AF8-AB3A56584DEB}"/>
               </a:ext>
             </a:extLst>
           </p:cNvPr>
@@ -4341,7 +3724,7 @@
           <p:cNvPr id="9" name="Oval 8">
             <a:extLst>
               <a:ext uri="{FF2B5EF4-FFF2-40B4-BE49-F238E27FC236}">
-                <a16:creationId xmlns:a16="http://schemas.microsoft.com/office/drawing/2014/main" id="{EB38A921-2924-066A-BC93-323477DC4E74}"/>
+                <a16:creationId xmlns:a16="http://schemas.microsoft.com/office/drawing/2014/main" id="{1D7C7847-7F27-8DF9-23E8-F393BD883349}"/>
               </a:ext>
             </a:extLst>
           </p:cNvPr>
@@ -4397,7 +3780,7 @@
           <p:cNvPr id="10" name="Oval 9">
             <a:extLst>
               <a:ext uri="{FF2B5EF4-FFF2-40B4-BE49-F238E27FC236}">
-                <a16:creationId xmlns:a16="http://schemas.microsoft.com/office/drawing/2014/main" id="{2A3F9291-88B7-3857-CF8F-BD9E1811E422}"/>
+                <a16:creationId xmlns:a16="http://schemas.microsoft.com/office/drawing/2014/main" id="{7A24C665-D135-20FA-4439-90CC7C61BB26}"/>
               </a:ext>
             </a:extLst>
           </p:cNvPr>
@@ -4453,7 +3836,7 @@
           <p:cNvPr id="11" name="Oval 10">
             <a:extLst>
               <a:ext uri="{FF2B5EF4-FFF2-40B4-BE49-F238E27FC236}">
-                <a16:creationId xmlns:a16="http://schemas.microsoft.com/office/drawing/2014/main" id="{B05A744D-12B5-8687-4C4E-DEA7C966218B}"/>
+                <a16:creationId xmlns:a16="http://schemas.microsoft.com/office/drawing/2014/main" id="{C6E515BF-83A5-B6D0-49E0-E96D02BE8EF1}"/>
               </a:ext>
             </a:extLst>
           </p:cNvPr>
@@ -4504,536 +3887,554 @@
           </a:p>
         </p:txBody>
       </p:sp>
-      <p:grpSp>
-        <p:nvGrpSpPr>
-          <p:cNvPr id="20" name="Group 19">
+    </p:spTree>
+    <p:extLst>
+      <p:ext uri="{BB962C8B-B14F-4D97-AF65-F5344CB8AC3E}">
+        <p14:creationId xmlns:p14="http://schemas.microsoft.com/office/powerpoint/2010/main" val="3681102296"/>
+      </p:ext>
+    </p:extLst>
+  </p:cSld>
+  <p:clrMapOvr>
+    <a:masterClrMapping/>
+  </p:clrMapOvr>
+</p:sld>
+</file>
+
+<file path=ppt/slides/slide2.xml><?xml version="1.0" encoding="utf-8"?>
+<p:sld xmlns:a="http://schemas.openxmlformats.org/drawingml/2006/main" xmlns:r="http://schemas.openxmlformats.org/officeDocument/2006/relationships" xmlns:p="http://schemas.openxmlformats.org/presentationml/2006/main">
+  <p:cSld>
+    <p:spTree>
+      <p:nvGrpSpPr>
+        <p:cNvPr id="1" name="">
+          <a:extLst>
+            <a:ext uri="{FF2B5EF4-FFF2-40B4-BE49-F238E27FC236}">
+              <a16:creationId xmlns:a16="http://schemas.microsoft.com/office/drawing/2014/main" id="{28B893AA-EDCE-6917-2A2A-A6BF18D025C0}"/>
+            </a:ext>
+          </a:extLst>
+        </p:cNvPr>
+        <p:cNvGrpSpPr/>
+        <p:nvPr/>
+      </p:nvGrpSpPr>
+      <p:grpSpPr>
+        <a:xfrm>
+          <a:off x="0" y="0"/>
+          <a:ext cx="0" cy="0"/>
+          <a:chOff x="0" y="0"/>
+          <a:chExt cx="0" cy="0"/>
+        </a:xfrm>
+      </p:grpSpPr>
+      <p:pic>
+        <p:nvPicPr>
+          <p:cNvPr id="12" name="Picture 11">
             <a:extLst>
               <a:ext uri="{FF2B5EF4-FFF2-40B4-BE49-F238E27FC236}">
-                <a16:creationId xmlns:a16="http://schemas.microsoft.com/office/drawing/2014/main" id="{1562CAD8-24B8-FA0F-C49A-5A02CBCA6435}"/>
+                <a16:creationId xmlns:a16="http://schemas.microsoft.com/office/drawing/2014/main" id="{FAE91083-D0D7-7C70-62E7-C3F3C5EDE9A0}"/>
               </a:ext>
             </a:extLst>
           </p:cNvPr>
-          <p:cNvGrpSpPr/>
+          <p:cNvPicPr>
+            <a:picLocks noChangeAspect="1"/>
+          </p:cNvPicPr>
           <p:nvPr/>
-        </p:nvGrpSpPr>
-        <p:grpSpPr>
+        </p:nvPicPr>
+        <p:blipFill>
+          <a:blip r:embed="rId2"/>
+          <a:stretch>
+            <a:fillRect/>
+          </a:stretch>
+        </p:blipFill>
+        <p:spPr>
           <a:xfrm>
-            <a:off x="5924432" y="228600"/>
-            <a:ext cx="457200" cy="457200"/>
-            <a:chOff x="3394780" y="228600"/>
-            <a:chExt cx="457200" cy="457200"/>
+            <a:off x="6544145" y="215900"/>
+            <a:ext cx="469900" cy="482600"/>
           </a:xfrm>
-        </p:grpSpPr>
-        <p:sp>
-          <p:nvSpPr>
-            <p:cNvPr id="21" name="Freeform 20">
-              <a:extLst>
-                <a:ext uri="{FF2B5EF4-FFF2-40B4-BE49-F238E27FC236}">
-                  <a16:creationId xmlns:a16="http://schemas.microsoft.com/office/drawing/2014/main" id="{D466B029-7C52-3DD1-2A86-23C25ECFE792}"/>
-                </a:ext>
-              </a:extLst>
-            </p:cNvPr>
-            <p:cNvSpPr>
-              <a:spLocks noChangeAspect="1"/>
-            </p:cNvSpPr>
-            <p:nvPr/>
-          </p:nvSpPr>
-          <p:spPr>
-            <a:xfrm>
-              <a:off x="3394780" y="229014"/>
-              <a:ext cx="224492" cy="456372"/>
-            </a:xfrm>
-            <a:custGeom>
-              <a:avLst/>
-              <a:gdLst>
-                <a:gd name="connsiteX0" fmla="*/ 224492 w 224492"/>
-                <a:gd name="connsiteY0" fmla="*/ 0 h 456372"/>
-                <a:gd name="connsiteX1" fmla="*/ 224492 w 224492"/>
-                <a:gd name="connsiteY1" fmla="*/ 456372 h 456372"/>
-                <a:gd name="connsiteX2" fmla="*/ 182529 w 224492"/>
-                <a:gd name="connsiteY2" fmla="*/ 452142 h 456372"/>
-                <a:gd name="connsiteX3" fmla="*/ 0 w 224492"/>
-                <a:gd name="connsiteY3" fmla="*/ 228186 h 456372"/>
-                <a:gd name="connsiteX4" fmla="*/ 182529 w 224492"/>
-                <a:gd name="connsiteY4" fmla="*/ 4230 h 456372"/>
-                <a:gd name="connsiteX5" fmla="*/ 224492 w 224492"/>
-                <a:gd name="connsiteY5" fmla="*/ 0 h 456372"/>
-              </a:gdLst>
-              <a:ahLst/>
-              <a:cxnLst>
-                <a:cxn ang="0">
-                  <a:pos x="connsiteX0" y="connsiteY0"/>
-                </a:cxn>
-                <a:cxn ang="0">
-                  <a:pos x="connsiteX1" y="connsiteY1"/>
-                </a:cxn>
-                <a:cxn ang="0">
-                  <a:pos x="connsiteX2" y="connsiteY2"/>
-                </a:cxn>
-                <a:cxn ang="0">
-                  <a:pos x="connsiteX3" y="connsiteY3"/>
-                </a:cxn>
-                <a:cxn ang="0">
-                  <a:pos x="connsiteX4" y="connsiteY4"/>
-                </a:cxn>
-                <a:cxn ang="0">
-                  <a:pos x="connsiteX5" y="connsiteY5"/>
-                </a:cxn>
-              </a:cxnLst>
-              <a:rect l="l" t="t" r="r" b="b"/>
-              <a:pathLst>
-                <a:path w="224492" h="456372">
-                  <a:moveTo>
-                    <a:pt x="224492" y="0"/>
-                  </a:moveTo>
-                  <a:lnTo>
-                    <a:pt x="224492" y="456372"/>
-                  </a:lnTo>
-                  <a:lnTo>
-                    <a:pt x="182529" y="452142"/>
-                  </a:lnTo>
-                  <a:cubicBezTo>
-                    <a:pt x="78360" y="430826"/>
-                    <a:pt x="0" y="338657"/>
-                    <a:pt x="0" y="228186"/>
-                  </a:cubicBezTo>
-                  <a:cubicBezTo>
-                    <a:pt x="0" y="117716"/>
-                    <a:pt x="78360" y="25547"/>
-                    <a:pt x="182529" y="4230"/>
-                  </a:cubicBezTo>
-                  <a:lnTo>
-                    <a:pt x="224492" y="0"/>
-                  </a:lnTo>
-                  <a:close/>
-                </a:path>
-              </a:pathLst>
-            </a:custGeom>
-            <a:solidFill>
-              <a:schemeClr val="accent4"/>
-            </a:solidFill>
-            <a:ln>
-              <a:solidFill>
-                <a:schemeClr val="bg1"/>
-              </a:solidFill>
-            </a:ln>
-          </p:spPr>
-          <p:style>
-            <a:lnRef idx="2">
-              <a:schemeClr val="accent1">
-                <a:shade val="15000"/>
-              </a:schemeClr>
-            </a:lnRef>
-            <a:fillRef idx="1">
-              <a:schemeClr val="accent1"/>
-            </a:fillRef>
-            <a:effectRef idx="0">
-              <a:schemeClr val="accent1"/>
-            </a:effectRef>
-            <a:fontRef idx="minor">
-              <a:schemeClr val="lt1"/>
-            </a:fontRef>
-          </p:style>
-          <p:txBody>
-            <a:bodyPr wrap="square" rtlCol="0" anchor="ctr">
-              <a:noAutofit/>
-            </a:bodyPr>
-            <a:lstStyle/>
-            <a:p>
-              <a:pPr algn="ctr"/>
-              <a:endParaRPr lang="en-US" dirty="0"/>
-            </a:p>
-          </p:txBody>
-        </p:sp>
-        <p:sp>
-          <p:nvSpPr>
-            <p:cNvPr id="22" name="Freeform 21">
-              <a:extLst>
-                <a:ext uri="{FF2B5EF4-FFF2-40B4-BE49-F238E27FC236}">
-                  <a16:creationId xmlns:a16="http://schemas.microsoft.com/office/drawing/2014/main" id="{69A8A1A2-E09D-7F52-053B-B2606CFEF96A}"/>
-                </a:ext>
-              </a:extLst>
-            </p:cNvPr>
-            <p:cNvSpPr>
-              <a:spLocks noChangeAspect="1"/>
-            </p:cNvSpPr>
-            <p:nvPr/>
-          </p:nvSpPr>
-          <p:spPr>
-            <a:xfrm>
-              <a:off x="3619272" y="228600"/>
-              <a:ext cx="232708" cy="457200"/>
-            </a:xfrm>
-            <a:custGeom>
-              <a:avLst/>
-              <a:gdLst>
-                <a:gd name="connsiteX0" fmla="*/ 4108 w 232708"/>
-                <a:gd name="connsiteY0" fmla="*/ 0 h 457200"/>
-                <a:gd name="connsiteX1" fmla="*/ 232708 w 232708"/>
-                <a:gd name="connsiteY1" fmla="*/ 228600 h 457200"/>
-                <a:gd name="connsiteX2" fmla="*/ 4108 w 232708"/>
-                <a:gd name="connsiteY2" fmla="*/ 457200 h 457200"/>
-                <a:gd name="connsiteX3" fmla="*/ 0 w 232708"/>
-                <a:gd name="connsiteY3" fmla="*/ 456786 h 457200"/>
-                <a:gd name="connsiteX4" fmla="*/ 0 w 232708"/>
-                <a:gd name="connsiteY4" fmla="*/ 414 h 457200"/>
-                <a:gd name="connsiteX5" fmla="*/ 4108 w 232708"/>
-                <a:gd name="connsiteY5" fmla="*/ 0 h 457200"/>
-              </a:gdLst>
-              <a:ahLst/>
-              <a:cxnLst>
-                <a:cxn ang="0">
-                  <a:pos x="connsiteX0" y="connsiteY0"/>
-                </a:cxn>
-                <a:cxn ang="0">
-                  <a:pos x="connsiteX1" y="connsiteY1"/>
-                </a:cxn>
-                <a:cxn ang="0">
-                  <a:pos x="connsiteX2" y="connsiteY2"/>
-                </a:cxn>
-                <a:cxn ang="0">
-                  <a:pos x="connsiteX3" y="connsiteY3"/>
-                </a:cxn>
-                <a:cxn ang="0">
-                  <a:pos x="connsiteX4" y="connsiteY4"/>
-                </a:cxn>
-                <a:cxn ang="0">
-                  <a:pos x="connsiteX5" y="connsiteY5"/>
-                </a:cxn>
-              </a:cxnLst>
-              <a:rect l="l" t="t" r="r" b="b"/>
-              <a:pathLst>
-                <a:path w="232708" h="457200">
-                  <a:moveTo>
-                    <a:pt x="4108" y="0"/>
-                  </a:moveTo>
-                  <a:cubicBezTo>
-                    <a:pt x="130360" y="0"/>
-                    <a:pt x="232708" y="102348"/>
-                    <a:pt x="232708" y="228600"/>
-                  </a:cubicBezTo>
-                  <a:cubicBezTo>
-                    <a:pt x="232708" y="354852"/>
-                    <a:pt x="130360" y="457200"/>
-                    <a:pt x="4108" y="457200"/>
-                  </a:cubicBezTo>
-                  <a:lnTo>
-                    <a:pt x="0" y="456786"/>
-                  </a:lnTo>
-                  <a:lnTo>
-                    <a:pt x="0" y="414"/>
-                  </a:lnTo>
-                  <a:lnTo>
-                    <a:pt x="4108" y="0"/>
-                  </a:lnTo>
-                  <a:close/>
-                </a:path>
-              </a:pathLst>
-            </a:custGeom>
-            <a:solidFill>
-              <a:schemeClr val="accent1"/>
-            </a:solidFill>
-            <a:ln>
-              <a:solidFill>
-                <a:schemeClr val="bg1"/>
-              </a:solidFill>
-            </a:ln>
-          </p:spPr>
-          <p:style>
-            <a:lnRef idx="2">
-              <a:schemeClr val="accent1">
-                <a:shade val="15000"/>
-              </a:schemeClr>
-            </a:lnRef>
-            <a:fillRef idx="1">
-              <a:schemeClr val="accent1"/>
-            </a:fillRef>
-            <a:effectRef idx="0">
-              <a:schemeClr val="accent1"/>
-            </a:effectRef>
-            <a:fontRef idx="minor">
-              <a:schemeClr val="lt1"/>
-            </a:fontRef>
-          </p:style>
-          <p:txBody>
-            <a:bodyPr wrap="square" rtlCol="0" anchor="ctr">
-              <a:noAutofit/>
-            </a:bodyPr>
-            <a:lstStyle/>
-            <a:p>
-              <a:pPr algn="ctr"/>
-              <a:endParaRPr lang="en-US" dirty="0"/>
-            </a:p>
-          </p:txBody>
-        </p:sp>
-      </p:grpSp>
-      <p:grpSp>
-        <p:nvGrpSpPr>
-          <p:cNvPr id="23" name="Group 22">
+          <a:prstGeom prst="rect">
+            <a:avLst/>
+          </a:prstGeom>
+        </p:spPr>
+      </p:pic>
+      <p:pic>
+        <p:nvPicPr>
+          <p:cNvPr id="13" name="Picture 12">
             <a:extLst>
               <a:ext uri="{FF2B5EF4-FFF2-40B4-BE49-F238E27FC236}">
-                <a16:creationId xmlns:a16="http://schemas.microsoft.com/office/drawing/2014/main" id="{E8BA12F4-524C-52A1-B119-533CDDBE00A5}"/>
+                <a16:creationId xmlns:a16="http://schemas.microsoft.com/office/drawing/2014/main" id="{D9809FF8-A505-E160-79DE-41AFA6D9EC45}"/>
               </a:ext>
             </a:extLst>
           </p:cNvPr>
-          <p:cNvGrpSpPr/>
+          <p:cNvPicPr>
+            <a:picLocks noChangeAspect="1"/>
+          </p:cNvPicPr>
           <p:nvPr/>
-        </p:nvGrpSpPr>
-        <p:grpSpPr>
+        </p:nvPicPr>
+        <p:blipFill>
+          <a:blip r:embed="rId2"/>
+          <a:stretch>
+            <a:fillRect/>
+          </a:stretch>
+        </p:blipFill>
+        <p:spPr>
           <a:xfrm>
-            <a:off x="6556845" y="240506"/>
+            <a:off x="5924432" y="215900"/>
+            <a:ext cx="469900" cy="482600"/>
+          </a:xfrm>
+          <a:prstGeom prst="rect">
+            <a:avLst/>
+          </a:prstGeom>
+        </p:spPr>
+      </p:pic>
+      <p:sp>
+        <p:nvSpPr>
+          <p:cNvPr id="2" name="Oval 1">
+            <a:extLst>
+              <a:ext uri="{FF2B5EF4-FFF2-40B4-BE49-F238E27FC236}">
+                <a16:creationId xmlns:a16="http://schemas.microsoft.com/office/drawing/2014/main" id="{703DE418-CBE7-B5A1-22A5-E49D4363808F}"/>
+              </a:ext>
+            </a:extLst>
+          </p:cNvPr>
+          <p:cNvSpPr>
+            <a:spLocks noChangeAspect="1"/>
+          </p:cNvSpPr>
+          <p:nvPr/>
+        </p:nvSpPr>
+        <p:spPr>
+          <a:xfrm>
+            <a:off x="1497541" y="228600"/>
             <a:ext cx="457200" cy="457200"/>
-            <a:chOff x="3394780" y="228600"/>
-            <a:chExt cx="457200" cy="457200"/>
           </a:xfrm>
-        </p:grpSpPr>
-        <p:sp>
-          <p:nvSpPr>
-            <p:cNvPr id="24" name="Freeform 23">
-              <a:extLst>
-                <a:ext uri="{FF2B5EF4-FFF2-40B4-BE49-F238E27FC236}">
-                  <a16:creationId xmlns:a16="http://schemas.microsoft.com/office/drawing/2014/main" id="{1D8FAC97-8A60-85C9-2BDF-C4418FF1C1EF}"/>
-                </a:ext>
-              </a:extLst>
-            </p:cNvPr>
-            <p:cNvSpPr>
-              <a:spLocks noChangeAspect="1"/>
-            </p:cNvSpPr>
-            <p:nvPr/>
-          </p:nvSpPr>
-          <p:spPr>
-            <a:xfrm>
-              <a:off x="3394780" y="229014"/>
-              <a:ext cx="224492" cy="456372"/>
-            </a:xfrm>
-            <a:custGeom>
-              <a:avLst/>
-              <a:gdLst>
-                <a:gd name="connsiteX0" fmla="*/ 224492 w 224492"/>
-                <a:gd name="connsiteY0" fmla="*/ 0 h 456372"/>
-                <a:gd name="connsiteX1" fmla="*/ 224492 w 224492"/>
-                <a:gd name="connsiteY1" fmla="*/ 456372 h 456372"/>
-                <a:gd name="connsiteX2" fmla="*/ 182529 w 224492"/>
-                <a:gd name="connsiteY2" fmla="*/ 452142 h 456372"/>
-                <a:gd name="connsiteX3" fmla="*/ 0 w 224492"/>
-                <a:gd name="connsiteY3" fmla="*/ 228186 h 456372"/>
-                <a:gd name="connsiteX4" fmla="*/ 182529 w 224492"/>
-                <a:gd name="connsiteY4" fmla="*/ 4230 h 456372"/>
-                <a:gd name="connsiteX5" fmla="*/ 224492 w 224492"/>
-                <a:gd name="connsiteY5" fmla="*/ 0 h 456372"/>
-              </a:gdLst>
-              <a:ahLst/>
-              <a:cxnLst>
-                <a:cxn ang="0">
-                  <a:pos x="connsiteX0" y="connsiteY0"/>
-                </a:cxn>
-                <a:cxn ang="0">
-                  <a:pos x="connsiteX1" y="connsiteY1"/>
-                </a:cxn>
-                <a:cxn ang="0">
-                  <a:pos x="connsiteX2" y="connsiteY2"/>
-                </a:cxn>
-                <a:cxn ang="0">
-                  <a:pos x="connsiteX3" y="connsiteY3"/>
-                </a:cxn>
-                <a:cxn ang="0">
-                  <a:pos x="connsiteX4" y="connsiteY4"/>
-                </a:cxn>
-                <a:cxn ang="0">
-                  <a:pos x="connsiteX5" y="connsiteY5"/>
-                </a:cxn>
-              </a:cxnLst>
-              <a:rect l="l" t="t" r="r" b="b"/>
-              <a:pathLst>
-                <a:path w="224492" h="456372">
-                  <a:moveTo>
-                    <a:pt x="224492" y="0"/>
-                  </a:moveTo>
-                  <a:lnTo>
-                    <a:pt x="224492" y="456372"/>
-                  </a:lnTo>
-                  <a:lnTo>
-                    <a:pt x="182529" y="452142"/>
-                  </a:lnTo>
-                  <a:cubicBezTo>
-                    <a:pt x="78360" y="430826"/>
-                    <a:pt x="0" y="338657"/>
-                    <a:pt x="0" y="228186"/>
-                  </a:cubicBezTo>
-                  <a:cubicBezTo>
-                    <a:pt x="0" y="117716"/>
-                    <a:pt x="78360" y="25547"/>
-                    <a:pt x="182529" y="4230"/>
-                  </a:cubicBezTo>
-                  <a:lnTo>
-                    <a:pt x="224492" y="0"/>
-                  </a:lnTo>
-                  <a:close/>
-                </a:path>
-              </a:pathLst>
-            </a:custGeom>
+          <a:prstGeom prst="ellipse">
+            <a:avLst/>
+          </a:prstGeom>
+          <a:solidFill>
+            <a:schemeClr val="accent4"/>
+          </a:solidFill>
+          <a:ln>
             <a:solidFill>
-              <a:schemeClr val="accent4"/>
+              <a:schemeClr val="bg1"/>
             </a:solidFill>
-            <a:ln>
-              <a:solidFill>
-                <a:schemeClr val="bg1"/>
-              </a:solidFill>
-            </a:ln>
-          </p:spPr>
-          <p:style>
-            <a:lnRef idx="2">
-              <a:schemeClr val="accent1">
-                <a:shade val="15000"/>
+          </a:ln>
+        </p:spPr>
+        <p:style>
+          <a:lnRef idx="2">
+            <a:schemeClr val="accent1">
+              <a:shade val="15000"/>
+            </a:schemeClr>
+          </a:lnRef>
+          <a:fillRef idx="1">
+            <a:schemeClr val="accent1"/>
+          </a:fillRef>
+          <a:effectRef idx="0">
+            <a:schemeClr val="accent1"/>
+          </a:effectRef>
+          <a:fontRef idx="minor">
+            <a:schemeClr val="lt1"/>
+          </a:fontRef>
+        </p:style>
+        <p:txBody>
+          <a:bodyPr rtlCol="0" anchor="ctr"/>
+          <a:lstStyle/>
+          <a:p>
+            <a:pPr algn="ctr"/>
+            <a:endParaRPr lang="en-US"/>
+          </a:p>
+        </p:txBody>
+      </p:sp>
+      <p:sp>
+        <p:nvSpPr>
+          <p:cNvPr id="3" name="Oval 2">
+            <a:extLst>
+              <a:ext uri="{FF2B5EF4-FFF2-40B4-BE49-F238E27FC236}">
+                <a16:creationId xmlns:a16="http://schemas.microsoft.com/office/drawing/2014/main" id="{C992189C-6770-B099-C04E-7EAE3BFC49A8}"/>
+              </a:ext>
+            </a:extLst>
+          </p:cNvPr>
+          <p:cNvSpPr>
+            <a:spLocks noChangeAspect="1"/>
+          </p:cNvSpPr>
+          <p:nvPr/>
+        </p:nvSpPr>
+        <p:spPr>
+          <a:xfrm>
+            <a:off x="2129954" y="228600"/>
+            <a:ext cx="457200" cy="457200"/>
+          </a:xfrm>
+          <a:prstGeom prst="ellipse">
+            <a:avLst/>
+          </a:prstGeom>
+          <a:solidFill>
+            <a:schemeClr val="accent4"/>
+          </a:solidFill>
+          <a:ln>
+            <a:solidFill>
+              <a:schemeClr val="bg1"/>
+            </a:solidFill>
+          </a:ln>
+        </p:spPr>
+        <p:style>
+          <a:lnRef idx="2">
+            <a:schemeClr val="accent1">
+              <a:shade val="15000"/>
+            </a:schemeClr>
+          </a:lnRef>
+          <a:fillRef idx="1">
+            <a:schemeClr val="accent1"/>
+          </a:fillRef>
+          <a:effectRef idx="0">
+            <a:schemeClr val="accent1"/>
+          </a:effectRef>
+          <a:fontRef idx="minor">
+            <a:schemeClr val="lt1"/>
+          </a:fontRef>
+        </p:style>
+        <p:txBody>
+          <a:bodyPr rtlCol="0" anchor="ctr"/>
+          <a:lstStyle/>
+          <a:p>
+            <a:pPr algn="ctr"/>
+            <a:endParaRPr lang="en-US"/>
+          </a:p>
+        </p:txBody>
+      </p:sp>
+      <p:sp>
+        <p:nvSpPr>
+          <p:cNvPr id="4" name="Oval 3">
+            <a:extLst>
+              <a:ext uri="{FF2B5EF4-FFF2-40B4-BE49-F238E27FC236}">
+                <a16:creationId xmlns:a16="http://schemas.microsoft.com/office/drawing/2014/main" id="{CFD0347E-BB33-C30D-D653-3F3A7B76DABB}"/>
+              </a:ext>
+            </a:extLst>
+          </p:cNvPr>
+          <p:cNvSpPr>
+            <a:spLocks noChangeAspect="1"/>
+          </p:cNvSpPr>
+          <p:nvPr/>
+        </p:nvSpPr>
+        <p:spPr>
+          <a:xfrm>
+            <a:off x="2762367" y="228600"/>
+            <a:ext cx="457200" cy="457200"/>
+          </a:xfrm>
+          <a:prstGeom prst="ellipse">
+            <a:avLst/>
+          </a:prstGeom>
+          <a:solidFill>
+            <a:schemeClr val="accent4"/>
+          </a:solidFill>
+          <a:ln>
+            <a:solidFill>
+              <a:schemeClr val="bg1"/>
+            </a:solidFill>
+          </a:ln>
+        </p:spPr>
+        <p:style>
+          <a:lnRef idx="2">
+            <a:schemeClr val="accent1">
+              <a:shade val="15000"/>
+            </a:schemeClr>
+          </a:lnRef>
+          <a:fillRef idx="1">
+            <a:schemeClr val="accent1"/>
+          </a:fillRef>
+          <a:effectRef idx="0">
+            <a:schemeClr val="accent1"/>
+          </a:effectRef>
+          <a:fontRef idx="minor">
+            <a:schemeClr val="lt1"/>
+          </a:fontRef>
+        </p:style>
+        <p:txBody>
+          <a:bodyPr rtlCol="0" anchor="ctr"/>
+          <a:lstStyle/>
+          <a:p>
+            <a:pPr algn="ctr"/>
+            <a:endParaRPr lang="en-US" dirty="0"/>
+          </a:p>
+        </p:txBody>
+      </p:sp>
+      <p:sp>
+        <p:nvSpPr>
+          <p:cNvPr id="5" name="Oval 4">
+            <a:extLst>
+              <a:ext uri="{FF2B5EF4-FFF2-40B4-BE49-F238E27FC236}">
+                <a16:creationId xmlns:a16="http://schemas.microsoft.com/office/drawing/2014/main" id="{59A2DC48-EE2C-1943-DE03-42B4C977B9D9}"/>
+              </a:ext>
+            </a:extLst>
+          </p:cNvPr>
+          <p:cNvSpPr>
+            <a:spLocks noChangeAspect="1"/>
+          </p:cNvSpPr>
+          <p:nvPr/>
+        </p:nvSpPr>
+        <p:spPr>
+          <a:xfrm>
+            <a:off x="3394780" y="228600"/>
+            <a:ext cx="457200" cy="457200"/>
+          </a:xfrm>
+          <a:prstGeom prst="ellipse">
+            <a:avLst/>
+          </a:prstGeom>
+          <a:solidFill>
+            <a:schemeClr val="accent1"/>
+          </a:solidFill>
+          <a:ln>
+            <a:solidFill>
+              <a:schemeClr val="bg1"/>
+            </a:solidFill>
+          </a:ln>
+        </p:spPr>
+        <p:style>
+          <a:lnRef idx="2">
+            <a:schemeClr val="accent1">
+              <a:shade val="15000"/>
+            </a:schemeClr>
+          </a:lnRef>
+          <a:fillRef idx="1">
+            <a:schemeClr val="accent1"/>
+          </a:fillRef>
+          <a:effectRef idx="0">
+            <a:schemeClr val="accent1"/>
+          </a:effectRef>
+          <a:fontRef idx="minor">
+            <a:schemeClr val="lt1"/>
+          </a:fontRef>
+        </p:style>
+        <p:txBody>
+          <a:bodyPr rtlCol="0" anchor="ctr"/>
+          <a:lstStyle/>
+          <a:p>
+            <a:pPr algn="ctr"/>
+            <a:endParaRPr lang="en-US"/>
+          </a:p>
+        </p:txBody>
+      </p:sp>
+      <p:sp>
+        <p:nvSpPr>
+          <p:cNvPr id="6" name="Oval 5">
+            <a:extLst>
+              <a:ext uri="{FF2B5EF4-FFF2-40B4-BE49-F238E27FC236}">
+                <a16:creationId xmlns:a16="http://schemas.microsoft.com/office/drawing/2014/main" id="{B9811543-34B4-AC3F-F524-0339F3F285D0}"/>
+              </a:ext>
+            </a:extLst>
+          </p:cNvPr>
+          <p:cNvSpPr>
+            <a:spLocks noChangeAspect="1"/>
+          </p:cNvSpPr>
+          <p:nvPr/>
+        </p:nvSpPr>
+        <p:spPr>
+          <a:xfrm>
+            <a:off x="4027193" y="228600"/>
+            <a:ext cx="457200" cy="457200"/>
+          </a:xfrm>
+          <a:prstGeom prst="ellipse">
+            <a:avLst/>
+          </a:prstGeom>
+          <a:solidFill>
+            <a:schemeClr val="accent1"/>
+          </a:solidFill>
+          <a:ln>
+            <a:solidFill>
+              <a:schemeClr val="bg1"/>
+            </a:solidFill>
+          </a:ln>
+        </p:spPr>
+        <p:style>
+          <a:lnRef idx="2">
+            <a:schemeClr val="accent1">
+              <a:shade val="15000"/>
+            </a:schemeClr>
+          </a:lnRef>
+          <a:fillRef idx="1">
+            <a:schemeClr val="accent1"/>
+          </a:fillRef>
+          <a:effectRef idx="0">
+            <a:schemeClr val="accent1"/>
+          </a:effectRef>
+          <a:fontRef idx="minor">
+            <a:schemeClr val="lt1"/>
+          </a:fontRef>
+        </p:style>
+        <p:txBody>
+          <a:bodyPr rtlCol="0" anchor="ctr"/>
+          <a:lstStyle/>
+          <a:p>
+            <a:pPr algn="ctr"/>
+            <a:endParaRPr lang="en-US"/>
+          </a:p>
+        </p:txBody>
+      </p:sp>
+      <p:sp>
+        <p:nvSpPr>
+          <p:cNvPr id="7" name="Oval 6">
+            <a:extLst>
+              <a:ext uri="{FF2B5EF4-FFF2-40B4-BE49-F238E27FC236}">
+                <a16:creationId xmlns:a16="http://schemas.microsoft.com/office/drawing/2014/main" id="{190C5A1C-9DE1-D066-8C9C-9FE0F77DD25C}"/>
+              </a:ext>
+            </a:extLst>
+          </p:cNvPr>
+          <p:cNvSpPr>
+            <a:spLocks noChangeAspect="1"/>
+          </p:cNvSpPr>
+          <p:nvPr/>
+        </p:nvSpPr>
+        <p:spPr>
+          <a:xfrm>
+            <a:off x="4659606" y="228600"/>
+            <a:ext cx="457200" cy="457200"/>
+          </a:xfrm>
+          <a:prstGeom prst="ellipse">
+            <a:avLst/>
+          </a:prstGeom>
+          <a:solidFill>
+            <a:schemeClr val="accent1"/>
+          </a:solidFill>
+          <a:ln>
+            <a:solidFill>
+              <a:schemeClr val="bg1"/>
+            </a:solidFill>
+          </a:ln>
+        </p:spPr>
+        <p:style>
+          <a:lnRef idx="2">
+            <a:schemeClr val="accent1">
+              <a:shade val="15000"/>
+            </a:schemeClr>
+          </a:lnRef>
+          <a:fillRef idx="1">
+            <a:schemeClr val="accent1"/>
+          </a:fillRef>
+          <a:effectRef idx="0">
+            <a:schemeClr val="accent1"/>
+          </a:effectRef>
+          <a:fontRef idx="minor">
+            <a:schemeClr val="lt1"/>
+          </a:fontRef>
+        </p:style>
+        <p:txBody>
+          <a:bodyPr rtlCol="0" anchor="ctr"/>
+          <a:lstStyle/>
+          <a:p>
+            <a:pPr algn="ctr"/>
+            <a:endParaRPr lang="en-US"/>
+          </a:p>
+        </p:txBody>
+      </p:sp>
+      <p:sp>
+        <p:nvSpPr>
+          <p:cNvPr id="8" name="Oval 7">
+            <a:extLst>
+              <a:ext uri="{FF2B5EF4-FFF2-40B4-BE49-F238E27FC236}">
+                <a16:creationId xmlns:a16="http://schemas.microsoft.com/office/drawing/2014/main" id="{F976BF1B-FC2E-4691-B09F-FFDAF26D62E3}"/>
+              </a:ext>
+            </a:extLst>
+          </p:cNvPr>
+          <p:cNvSpPr>
+            <a:spLocks noChangeAspect="1"/>
+          </p:cNvSpPr>
+          <p:nvPr/>
+        </p:nvSpPr>
+        <p:spPr>
+          <a:xfrm>
+            <a:off x="5292019" y="228600"/>
+            <a:ext cx="457200" cy="457200"/>
+          </a:xfrm>
+          <a:prstGeom prst="ellipse">
+            <a:avLst/>
+          </a:prstGeom>
+          <a:solidFill>
+            <a:schemeClr val="accent1"/>
+          </a:solidFill>
+          <a:ln>
+            <a:solidFill>
+              <a:schemeClr val="bg1"/>
+            </a:solidFill>
+          </a:ln>
+        </p:spPr>
+        <p:style>
+          <a:lnRef idx="2">
+            <a:schemeClr val="accent1">
+              <a:shade val="15000"/>
+            </a:schemeClr>
+          </a:lnRef>
+          <a:fillRef idx="1">
+            <a:schemeClr val="accent1"/>
+          </a:fillRef>
+          <a:effectRef idx="0">
+            <a:schemeClr val="accent1"/>
+          </a:effectRef>
+          <a:fontRef idx="minor">
+            <a:schemeClr val="lt1"/>
+          </a:fontRef>
+        </p:style>
+        <p:txBody>
+          <a:bodyPr rtlCol="0" anchor="ctr"/>
+          <a:lstStyle/>
+          <a:p>
+            <a:pPr algn="ctr"/>
+            <a:endParaRPr lang="en-US"/>
+          </a:p>
+        </p:txBody>
+      </p:sp>
+      <p:sp>
+        <p:nvSpPr>
+          <p:cNvPr id="11" name="Oval 10">
+            <a:extLst>
+              <a:ext uri="{FF2B5EF4-FFF2-40B4-BE49-F238E27FC236}">
+                <a16:creationId xmlns:a16="http://schemas.microsoft.com/office/drawing/2014/main" id="{AFD830F1-9380-5D2F-9160-66013A1F93D1}"/>
+              </a:ext>
+            </a:extLst>
+          </p:cNvPr>
+          <p:cNvSpPr>
+            <a:spLocks noChangeAspect="1"/>
+          </p:cNvSpPr>
+          <p:nvPr/>
+        </p:nvSpPr>
+        <p:spPr>
+          <a:xfrm>
+            <a:off x="7189259" y="228600"/>
+            <a:ext cx="457200" cy="457200"/>
+          </a:xfrm>
+          <a:prstGeom prst="ellipse">
+            <a:avLst/>
+          </a:prstGeom>
+          <a:noFill/>
+          <a:ln>
+            <a:solidFill>
+              <a:schemeClr val="bg2">
+                <a:lumMod val="90000"/>
               </a:schemeClr>
-            </a:lnRef>
-            <a:fillRef idx="1">
-              <a:schemeClr val="accent1"/>
-            </a:fillRef>
-            <a:effectRef idx="0">
-              <a:schemeClr val="accent1"/>
-            </a:effectRef>
-            <a:fontRef idx="minor">
-              <a:schemeClr val="lt1"/>
-            </a:fontRef>
-          </p:style>
-          <p:txBody>
-            <a:bodyPr wrap="square" rtlCol="0" anchor="ctr">
-              <a:noAutofit/>
-            </a:bodyPr>
-            <a:lstStyle/>
-            <a:p>
-              <a:pPr algn="ctr"/>
-              <a:endParaRPr lang="en-US" dirty="0"/>
-            </a:p>
-          </p:txBody>
-        </p:sp>
-        <p:sp>
-          <p:nvSpPr>
-            <p:cNvPr id="25" name="Freeform 24">
-              <a:extLst>
-                <a:ext uri="{FF2B5EF4-FFF2-40B4-BE49-F238E27FC236}">
-                  <a16:creationId xmlns:a16="http://schemas.microsoft.com/office/drawing/2014/main" id="{6F98C09D-CAF8-D8DF-076F-7D4B0B759279}"/>
-                </a:ext>
-              </a:extLst>
-            </p:cNvPr>
-            <p:cNvSpPr>
-              <a:spLocks noChangeAspect="1"/>
-            </p:cNvSpPr>
-            <p:nvPr/>
-          </p:nvSpPr>
-          <p:spPr>
-            <a:xfrm>
-              <a:off x="3619272" y="228600"/>
-              <a:ext cx="232708" cy="457200"/>
-            </a:xfrm>
-            <a:custGeom>
-              <a:avLst/>
-              <a:gdLst>
-                <a:gd name="connsiteX0" fmla="*/ 4108 w 232708"/>
-                <a:gd name="connsiteY0" fmla="*/ 0 h 457200"/>
-                <a:gd name="connsiteX1" fmla="*/ 232708 w 232708"/>
-                <a:gd name="connsiteY1" fmla="*/ 228600 h 457200"/>
-                <a:gd name="connsiteX2" fmla="*/ 4108 w 232708"/>
-                <a:gd name="connsiteY2" fmla="*/ 457200 h 457200"/>
-                <a:gd name="connsiteX3" fmla="*/ 0 w 232708"/>
-                <a:gd name="connsiteY3" fmla="*/ 456786 h 457200"/>
-                <a:gd name="connsiteX4" fmla="*/ 0 w 232708"/>
-                <a:gd name="connsiteY4" fmla="*/ 414 h 457200"/>
-                <a:gd name="connsiteX5" fmla="*/ 4108 w 232708"/>
-                <a:gd name="connsiteY5" fmla="*/ 0 h 457200"/>
-              </a:gdLst>
-              <a:ahLst/>
-              <a:cxnLst>
-                <a:cxn ang="0">
-                  <a:pos x="connsiteX0" y="connsiteY0"/>
-                </a:cxn>
-                <a:cxn ang="0">
-                  <a:pos x="connsiteX1" y="connsiteY1"/>
-                </a:cxn>
-                <a:cxn ang="0">
-                  <a:pos x="connsiteX2" y="connsiteY2"/>
-                </a:cxn>
-                <a:cxn ang="0">
-                  <a:pos x="connsiteX3" y="connsiteY3"/>
-                </a:cxn>
-                <a:cxn ang="0">
-                  <a:pos x="connsiteX4" y="connsiteY4"/>
-                </a:cxn>
-                <a:cxn ang="0">
-                  <a:pos x="connsiteX5" y="connsiteY5"/>
-                </a:cxn>
-              </a:cxnLst>
-              <a:rect l="l" t="t" r="r" b="b"/>
-              <a:pathLst>
-                <a:path w="232708" h="457200">
-                  <a:moveTo>
-                    <a:pt x="4108" y="0"/>
-                  </a:moveTo>
-                  <a:cubicBezTo>
-                    <a:pt x="130360" y="0"/>
-                    <a:pt x="232708" y="102348"/>
-                    <a:pt x="232708" y="228600"/>
-                  </a:cubicBezTo>
-                  <a:cubicBezTo>
-                    <a:pt x="232708" y="354852"/>
-                    <a:pt x="130360" y="457200"/>
-                    <a:pt x="4108" y="457200"/>
-                  </a:cubicBezTo>
-                  <a:lnTo>
-                    <a:pt x="0" y="456786"/>
-                  </a:lnTo>
-                  <a:lnTo>
-                    <a:pt x="0" y="414"/>
-                  </a:lnTo>
-                  <a:lnTo>
-                    <a:pt x="4108" y="0"/>
-                  </a:lnTo>
-                  <a:close/>
-                </a:path>
-              </a:pathLst>
-            </a:custGeom>
-            <a:solidFill>
-              <a:schemeClr val="accent1"/>
             </a:solidFill>
-            <a:ln>
-              <a:solidFill>
-                <a:schemeClr val="bg1"/>
-              </a:solidFill>
-            </a:ln>
-          </p:spPr>
-          <p:style>
-            <a:lnRef idx="2">
-              <a:schemeClr val="accent1">
-                <a:shade val="15000"/>
-              </a:schemeClr>
-            </a:lnRef>
-            <a:fillRef idx="1">
-              <a:schemeClr val="accent1"/>
-            </a:fillRef>
-            <a:effectRef idx="0">
-              <a:schemeClr val="accent1"/>
-            </a:effectRef>
-            <a:fontRef idx="minor">
-              <a:schemeClr val="lt1"/>
-            </a:fontRef>
-          </p:style>
-          <p:txBody>
-            <a:bodyPr wrap="square" rtlCol="0" anchor="ctr">
-              <a:noAutofit/>
-            </a:bodyPr>
-            <a:lstStyle/>
-            <a:p>
-              <a:pPr algn="ctr"/>
-              <a:endParaRPr lang="en-US" dirty="0"/>
-            </a:p>
-          </p:txBody>
-        </p:sp>
-      </p:grpSp>
+          </a:ln>
+        </p:spPr>
+        <p:style>
+          <a:lnRef idx="2">
+            <a:schemeClr val="accent1">
+              <a:shade val="15000"/>
+            </a:schemeClr>
+          </a:lnRef>
+          <a:fillRef idx="1">
+            <a:schemeClr val="accent1"/>
+          </a:fillRef>
+          <a:effectRef idx="0">
+            <a:schemeClr val="accent1"/>
+          </a:effectRef>
+          <a:fontRef idx="minor">
+            <a:schemeClr val="lt1"/>
+          </a:fontRef>
+        </p:style>
+        <p:txBody>
+          <a:bodyPr rtlCol="0" anchor="ctr"/>
+          <a:lstStyle/>
+          <a:p>
+            <a:pPr algn="ctr"/>
+            <a:endParaRPr lang="en-US"/>
+          </a:p>
+        </p:txBody>
+      </p:sp>
     </p:spTree>
     <p:extLst>
       <p:ext uri="{BB962C8B-B14F-4D97-AF65-F5344CB8AC3E}">
-        <p14:creationId xmlns:p14="http://schemas.microsoft.com/office/powerpoint/2010/main" val="326321307"/>
+        <p14:creationId xmlns:p14="http://schemas.microsoft.com/office/powerpoint/2010/main" val="3670978504"/>
       </p:ext>
     </p:extLst>
   </p:cSld>

--- a/lectures/from_propositional_logic_to_probability_theory/proportional_syllogism_on_steroids.pptx
+++ b/lectures/from_propositional_logic_to_probability_theory/proportional_syllogism_on_steroids.pptx
@@ -2,15 +2,18 @@
 <file path=ppt/presentation.xml><?xml version="1.0" encoding="utf-8"?>
 <p:presentation xmlns:a="http://schemas.openxmlformats.org/drawingml/2006/main" xmlns:r="http://schemas.openxmlformats.org/officeDocument/2006/relationships" xmlns:p="http://schemas.openxmlformats.org/presentationml/2006/main" saveSubsetFonts="1" autoCompressPictures="0">
   <p:sldMasterIdLst>
-    <p:sldMasterId id="2147483684" r:id="rId1"/>
+    <p:sldMasterId id="2147483708" r:id="rId1"/>
   </p:sldMasterIdLst>
   <p:notesMasterIdLst>
-    <p:notesMasterId r:id="rId5"/>
+    <p:notesMasterId r:id="rId8"/>
   </p:notesMasterIdLst>
   <p:sldIdLst>
     <p:sldId id="341" r:id="rId2"/>
     <p:sldId id="345" r:id="rId3"/>
-    <p:sldId id="342" r:id="rId4"/>
+    <p:sldId id="347" r:id="rId4"/>
+    <p:sldId id="348" r:id="rId5"/>
+    <p:sldId id="350" r:id="rId6"/>
+    <p:sldId id="351" r:id="rId7"/>
   </p:sldIdLst>
   <p:sldSz cx="9144000" cy="914400"/>
   <p:notesSz cx="6858000" cy="9144000"/>
@@ -199,7 +202,7 @@
           <a:p>
             <a:fld id="{DAACEE9B-BF2B-DB41-AEE4-5ABA9299869A}" type="datetimeFigureOut">
               <a:rPr lang="en-US" smtClean="0"/>
-              <a:t>2/11/25</a:t>
+              <a:t>2/12/25</a:t>
             </a:fld>
             <a:endParaRPr lang="en-US"/>
           </a:p>
@@ -597,7 +600,7 @@
           <a:p>
             <a:fld id="{A8E55732-6528-B243-8582-5E1C83D6385F}" type="datetimeFigureOut">
               <a:rPr lang="en-US" smtClean="0"/>
-              <a:t>2/11/25</a:t>
+              <a:t>2/12/25</a:t>
             </a:fld>
             <a:endParaRPr lang="en-US"/>
           </a:p>
@@ -648,7 +651,7 @@
     </p:spTree>
     <p:extLst>
       <p:ext uri="{BB962C8B-B14F-4D97-AF65-F5344CB8AC3E}">
-        <p14:creationId xmlns:p14="http://schemas.microsoft.com/office/powerpoint/2010/main" val="3006306538"/>
+        <p14:creationId xmlns:p14="http://schemas.microsoft.com/office/powerpoint/2010/main" val="1134663018"/>
       </p:ext>
     </p:extLst>
   </p:cSld>
@@ -767,7 +770,7 @@
           <a:p>
             <a:fld id="{A8E55732-6528-B243-8582-5E1C83D6385F}" type="datetimeFigureOut">
               <a:rPr lang="en-US" smtClean="0"/>
-              <a:t>2/11/25</a:t>
+              <a:t>2/12/25</a:t>
             </a:fld>
             <a:endParaRPr lang="en-US"/>
           </a:p>
@@ -818,7 +821,7 @@
     </p:spTree>
     <p:extLst>
       <p:ext uri="{BB962C8B-B14F-4D97-AF65-F5344CB8AC3E}">
-        <p14:creationId xmlns:p14="http://schemas.microsoft.com/office/powerpoint/2010/main" val="2999258260"/>
+        <p14:creationId xmlns:p14="http://schemas.microsoft.com/office/powerpoint/2010/main" val="4124902059"/>
       </p:ext>
     </p:extLst>
   </p:cSld>
@@ -947,7 +950,7 @@
           <a:p>
             <a:fld id="{A8E55732-6528-B243-8582-5E1C83D6385F}" type="datetimeFigureOut">
               <a:rPr lang="en-US" smtClean="0"/>
-              <a:t>2/11/25</a:t>
+              <a:t>2/12/25</a:t>
             </a:fld>
             <a:endParaRPr lang="en-US"/>
           </a:p>
@@ -998,7 +1001,7 @@
     </p:spTree>
     <p:extLst>
       <p:ext uri="{BB962C8B-B14F-4D97-AF65-F5344CB8AC3E}">
-        <p14:creationId xmlns:p14="http://schemas.microsoft.com/office/powerpoint/2010/main" val="3090531004"/>
+        <p14:creationId xmlns:p14="http://schemas.microsoft.com/office/powerpoint/2010/main" val="1958675220"/>
       </p:ext>
     </p:extLst>
   </p:cSld>
@@ -1117,7 +1120,7 @@
           <a:p>
             <a:fld id="{A8E55732-6528-B243-8582-5E1C83D6385F}" type="datetimeFigureOut">
               <a:rPr lang="en-US" smtClean="0"/>
-              <a:t>2/11/25</a:t>
+              <a:t>2/12/25</a:t>
             </a:fld>
             <a:endParaRPr lang="en-US"/>
           </a:p>
@@ -1168,7 +1171,7 @@
     </p:spTree>
     <p:extLst>
       <p:ext uri="{BB962C8B-B14F-4D97-AF65-F5344CB8AC3E}">
-        <p14:creationId xmlns:p14="http://schemas.microsoft.com/office/powerpoint/2010/main" val="915445573"/>
+        <p14:creationId xmlns:p14="http://schemas.microsoft.com/office/powerpoint/2010/main" val="3913703279"/>
       </p:ext>
     </p:extLst>
   </p:cSld>
@@ -1363,7 +1366,7 @@
           <a:p>
             <a:fld id="{A8E55732-6528-B243-8582-5E1C83D6385F}" type="datetimeFigureOut">
               <a:rPr lang="en-US" smtClean="0"/>
-              <a:t>2/11/25</a:t>
+              <a:t>2/12/25</a:t>
             </a:fld>
             <a:endParaRPr lang="en-US"/>
           </a:p>
@@ -1414,7 +1417,7 @@
     </p:spTree>
     <p:extLst>
       <p:ext uri="{BB962C8B-B14F-4D97-AF65-F5344CB8AC3E}">
-        <p14:creationId xmlns:p14="http://schemas.microsoft.com/office/powerpoint/2010/main" val="1359620007"/>
+        <p14:creationId xmlns:p14="http://schemas.microsoft.com/office/powerpoint/2010/main" val="4108269881"/>
       </p:ext>
     </p:extLst>
   </p:cSld>
@@ -1595,7 +1598,7 @@
           <a:p>
             <a:fld id="{A8E55732-6528-B243-8582-5E1C83D6385F}" type="datetimeFigureOut">
               <a:rPr lang="en-US" smtClean="0"/>
-              <a:t>2/11/25</a:t>
+              <a:t>2/12/25</a:t>
             </a:fld>
             <a:endParaRPr lang="en-US"/>
           </a:p>
@@ -1646,7 +1649,7 @@
     </p:spTree>
     <p:extLst>
       <p:ext uri="{BB962C8B-B14F-4D97-AF65-F5344CB8AC3E}">
-        <p14:creationId xmlns:p14="http://schemas.microsoft.com/office/powerpoint/2010/main" val="1378001016"/>
+        <p14:creationId xmlns:p14="http://schemas.microsoft.com/office/powerpoint/2010/main" val="826199021"/>
       </p:ext>
     </p:extLst>
   </p:cSld>
@@ -1962,7 +1965,7 @@
           <a:p>
             <a:fld id="{A8E55732-6528-B243-8582-5E1C83D6385F}" type="datetimeFigureOut">
               <a:rPr lang="en-US" smtClean="0"/>
-              <a:t>2/11/25</a:t>
+              <a:t>2/12/25</a:t>
             </a:fld>
             <a:endParaRPr lang="en-US"/>
           </a:p>
@@ -2013,7 +2016,7 @@
     </p:spTree>
     <p:extLst>
       <p:ext uri="{BB962C8B-B14F-4D97-AF65-F5344CB8AC3E}">
-        <p14:creationId xmlns:p14="http://schemas.microsoft.com/office/powerpoint/2010/main" val="1042996336"/>
+        <p14:creationId xmlns:p14="http://schemas.microsoft.com/office/powerpoint/2010/main" val="913763002"/>
       </p:ext>
     </p:extLst>
   </p:cSld>
@@ -2080,7 +2083,7 @@
           <a:p>
             <a:fld id="{A8E55732-6528-B243-8582-5E1C83D6385F}" type="datetimeFigureOut">
               <a:rPr lang="en-US" smtClean="0"/>
-              <a:t>2/11/25</a:t>
+              <a:t>2/12/25</a:t>
             </a:fld>
             <a:endParaRPr lang="en-US"/>
           </a:p>
@@ -2131,7 +2134,7 @@
     </p:spTree>
     <p:extLst>
       <p:ext uri="{BB962C8B-B14F-4D97-AF65-F5344CB8AC3E}">
-        <p14:creationId xmlns:p14="http://schemas.microsoft.com/office/powerpoint/2010/main" val="3341845172"/>
+        <p14:creationId xmlns:p14="http://schemas.microsoft.com/office/powerpoint/2010/main" val="1787256607"/>
       </p:ext>
     </p:extLst>
   </p:cSld>
@@ -2175,7 +2178,7 @@
           <a:p>
             <a:fld id="{A8E55732-6528-B243-8582-5E1C83D6385F}" type="datetimeFigureOut">
               <a:rPr lang="en-US" smtClean="0"/>
-              <a:t>2/11/25</a:t>
+              <a:t>2/12/25</a:t>
             </a:fld>
             <a:endParaRPr lang="en-US"/>
           </a:p>
@@ -2226,7 +2229,7 @@
     </p:spTree>
     <p:extLst>
       <p:ext uri="{BB962C8B-B14F-4D97-AF65-F5344CB8AC3E}">
-        <p14:creationId xmlns:p14="http://schemas.microsoft.com/office/powerpoint/2010/main" val="3200434898"/>
+        <p14:creationId xmlns:p14="http://schemas.microsoft.com/office/powerpoint/2010/main" val="3729998400"/>
       </p:ext>
     </p:extLst>
   </p:cSld>
@@ -2452,7 +2455,7 @@
           <a:p>
             <a:fld id="{A8E55732-6528-B243-8582-5E1C83D6385F}" type="datetimeFigureOut">
               <a:rPr lang="en-US" smtClean="0"/>
-              <a:t>2/11/25</a:t>
+              <a:t>2/12/25</a:t>
             </a:fld>
             <a:endParaRPr lang="en-US"/>
           </a:p>
@@ -2503,7 +2506,7 @@
     </p:spTree>
     <p:extLst>
       <p:ext uri="{BB962C8B-B14F-4D97-AF65-F5344CB8AC3E}">
-        <p14:creationId xmlns:p14="http://schemas.microsoft.com/office/powerpoint/2010/main" val="1140867432"/>
+        <p14:creationId xmlns:p14="http://schemas.microsoft.com/office/powerpoint/2010/main" val="3677165517"/>
       </p:ext>
     </p:extLst>
   </p:cSld>
@@ -2709,7 +2712,7 @@
           <a:p>
             <a:fld id="{A8E55732-6528-B243-8582-5E1C83D6385F}" type="datetimeFigureOut">
               <a:rPr lang="en-US" smtClean="0"/>
-              <a:t>2/11/25</a:t>
+              <a:t>2/12/25</a:t>
             </a:fld>
             <a:endParaRPr lang="en-US"/>
           </a:p>
@@ -2760,7 +2763,7 @@
     </p:spTree>
     <p:extLst>
       <p:ext uri="{BB962C8B-B14F-4D97-AF65-F5344CB8AC3E}">
-        <p14:creationId xmlns:p14="http://schemas.microsoft.com/office/powerpoint/2010/main" val="109407507"/>
+        <p14:creationId xmlns:p14="http://schemas.microsoft.com/office/powerpoint/2010/main" val="3707976555"/>
       </p:ext>
     </p:extLst>
   </p:cSld>
@@ -2922,7 +2925,7 @@
           <a:p>
             <a:fld id="{A8E55732-6528-B243-8582-5E1C83D6385F}" type="datetimeFigureOut">
               <a:rPr lang="en-US" smtClean="0"/>
-              <a:t>2/11/25</a:t>
+              <a:t>2/12/25</a:t>
             </a:fld>
             <a:endParaRPr lang="en-US"/>
           </a:p>
@@ -3009,23 +3012,23 @@
     </p:spTree>
     <p:extLst>
       <p:ext uri="{BB962C8B-B14F-4D97-AF65-F5344CB8AC3E}">
-        <p14:creationId xmlns:p14="http://schemas.microsoft.com/office/powerpoint/2010/main" val="711560402"/>
+        <p14:creationId xmlns:p14="http://schemas.microsoft.com/office/powerpoint/2010/main" val="3017104199"/>
       </p:ext>
     </p:extLst>
   </p:cSld>
   <p:clrMap bg1="lt1" tx1="dk1" bg2="lt2" tx2="dk2" accent1="accent1" accent2="accent2" accent3="accent3" accent4="accent4" accent5="accent5" accent6="accent6" hlink="hlink" folHlink="folHlink"/>
   <p:sldLayoutIdLst>
-    <p:sldLayoutId id="2147483685" r:id="rId1"/>
-    <p:sldLayoutId id="2147483686" r:id="rId2"/>
-    <p:sldLayoutId id="2147483687" r:id="rId3"/>
-    <p:sldLayoutId id="2147483688" r:id="rId4"/>
-    <p:sldLayoutId id="2147483689" r:id="rId5"/>
-    <p:sldLayoutId id="2147483690" r:id="rId6"/>
-    <p:sldLayoutId id="2147483691" r:id="rId7"/>
-    <p:sldLayoutId id="2147483692" r:id="rId8"/>
-    <p:sldLayoutId id="2147483693" r:id="rId9"/>
-    <p:sldLayoutId id="2147483694" r:id="rId10"/>
-    <p:sldLayoutId id="2147483695" r:id="rId11"/>
+    <p:sldLayoutId id="2147483709" r:id="rId1"/>
+    <p:sldLayoutId id="2147483710" r:id="rId2"/>
+    <p:sldLayoutId id="2147483711" r:id="rId3"/>
+    <p:sldLayoutId id="2147483712" r:id="rId4"/>
+    <p:sldLayoutId id="2147483713" r:id="rId5"/>
+    <p:sldLayoutId id="2147483714" r:id="rId6"/>
+    <p:sldLayoutId id="2147483715" r:id="rId7"/>
+    <p:sldLayoutId id="2147483716" r:id="rId8"/>
+    <p:sldLayoutId id="2147483717" r:id="rId9"/>
+    <p:sldLayoutId id="2147483718" r:id="rId10"/>
+    <p:sldLayoutId id="2147483719" r:id="rId11"/>
   </p:sldLayoutIdLst>
   <p:txStyles>
     <p:titleStyle>
@@ -3518,7 +3521,7 @@
             <a:avLst/>
           </a:prstGeom>
           <a:solidFill>
-            <a:schemeClr val="accent1"/>
+            <a:srgbClr val="8EBB6F"/>
           </a:solidFill>
           <a:ln>
             <a:solidFill>
@@ -3568,174 +3571,6 @@
         <p:spPr>
           <a:xfrm>
             <a:off x="4027193" y="228600"/>
-            <a:ext cx="457200" cy="457200"/>
-          </a:xfrm>
-          <a:prstGeom prst="ellipse">
-            <a:avLst/>
-          </a:prstGeom>
-          <a:solidFill>
-            <a:schemeClr val="accent1"/>
-          </a:solidFill>
-          <a:ln>
-            <a:solidFill>
-              <a:schemeClr val="bg1"/>
-            </a:solidFill>
-          </a:ln>
-        </p:spPr>
-        <p:style>
-          <a:lnRef idx="2">
-            <a:schemeClr val="accent1">
-              <a:shade val="15000"/>
-            </a:schemeClr>
-          </a:lnRef>
-          <a:fillRef idx="1">
-            <a:schemeClr val="accent1"/>
-          </a:fillRef>
-          <a:effectRef idx="0">
-            <a:schemeClr val="accent1"/>
-          </a:effectRef>
-          <a:fontRef idx="minor">
-            <a:schemeClr val="lt1"/>
-          </a:fontRef>
-        </p:style>
-        <p:txBody>
-          <a:bodyPr rtlCol="0" anchor="ctr"/>
-          <a:lstStyle/>
-          <a:p>
-            <a:pPr algn="ctr"/>
-            <a:endParaRPr lang="en-US"/>
-          </a:p>
-        </p:txBody>
-      </p:sp>
-      <p:sp>
-        <p:nvSpPr>
-          <p:cNvPr id="7" name="Oval 6">
-            <a:extLst>
-              <a:ext uri="{FF2B5EF4-FFF2-40B4-BE49-F238E27FC236}">
-                <a16:creationId xmlns:a16="http://schemas.microsoft.com/office/drawing/2014/main" id="{319EF128-1B27-212D-F1F2-2014F51A17D1}"/>
-              </a:ext>
-            </a:extLst>
-          </p:cNvPr>
-          <p:cNvSpPr>
-            <a:spLocks noChangeAspect="1"/>
-          </p:cNvSpPr>
-          <p:nvPr/>
-        </p:nvSpPr>
-        <p:spPr>
-          <a:xfrm>
-            <a:off x="4659606" y="228600"/>
-            <a:ext cx="457200" cy="457200"/>
-          </a:xfrm>
-          <a:prstGeom prst="ellipse">
-            <a:avLst/>
-          </a:prstGeom>
-          <a:solidFill>
-            <a:schemeClr val="accent1"/>
-          </a:solidFill>
-          <a:ln>
-            <a:solidFill>
-              <a:schemeClr val="bg1"/>
-            </a:solidFill>
-          </a:ln>
-        </p:spPr>
-        <p:style>
-          <a:lnRef idx="2">
-            <a:schemeClr val="accent1">
-              <a:shade val="15000"/>
-            </a:schemeClr>
-          </a:lnRef>
-          <a:fillRef idx="1">
-            <a:schemeClr val="accent1"/>
-          </a:fillRef>
-          <a:effectRef idx="0">
-            <a:schemeClr val="accent1"/>
-          </a:effectRef>
-          <a:fontRef idx="minor">
-            <a:schemeClr val="lt1"/>
-          </a:fontRef>
-        </p:style>
-        <p:txBody>
-          <a:bodyPr rtlCol="0" anchor="ctr"/>
-          <a:lstStyle/>
-          <a:p>
-            <a:pPr algn="ctr"/>
-            <a:endParaRPr lang="en-US"/>
-          </a:p>
-        </p:txBody>
-      </p:sp>
-      <p:sp>
-        <p:nvSpPr>
-          <p:cNvPr id="8" name="Oval 7">
-            <a:extLst>
-              <a:ext uri="{FF2B5EF4-FFF2-40B4-BE49-F238E27FC236}">
-                <a16:creationId xmlns:a16="http://schemas.microsoft.com/office/drawing/2014/main" id="{2FF70347-6CE9-BBBB-0AF8-AB3A56584DEB}"/>
-              </a:ext>
-            </a:extLst>
-          </p:cNvPr>
-          <p:cNvSpPr>
-            <a:spLocks noChangeAspect="1"/>
-          </p:cNvSpPr>
-          <p:nvPr/>
-        </p:nvSpPr>
-        <p:spPr>
-          <a:xfrm>
-            <a:off x="5292019" y="228600"/>
-            <a:ext cx="457200" cy="457200"/>
-          </a:xfrm>
-          <a:prstGeom prst="ellipse">
-            <a:avLst/>
-          </a:prstGeom>
-          <a:solidFill>
-            <a:schemeClr val="accent1"/>
-          </a:solidFill>
-          <a:ln>
-            <a:solidFill>
-              <a:schemeClr val="bg1"/>
-            </a:solidFill>
-          </a:ln>
-        </p:spPr>
-        <p:style>
-          <a:lnRef idx="2">
-            <a:schemeClr val="accent1">
-              <a:shade val="15000"/>
-            </a:schemeClr>
-          </a:lnRef>
-          <a:fillRef idx="1">
-            <a:schemeClr val="accent1"/>
-          </a:fillRef>
-          <a:effectRef idx="0">
-            <a:schemeClr val="accent1"/>
-          </a:effectRef>
-          <a:fontRef idx="minor">
-            <a:schemeClr val="lt1"/>
-          </a:fontRef>
-        </p:style>
-        <p:txBody>
-          <a:bodyPr rtlCol="0" anchor="ctr"/>
-          <a:lstStyle/>
-          <a:p>
-            <a:pPr algn="ctr"/>
-            <a:endParaRPr lang="en-US"/>
-          </a:p>
-        </p:txBody>
-      </p:sp>
-      <p:sp>
-        <p:nvSpPr>
-          <p:cNvPr id="9" name="Oval 8">
-            <a:extLst>
-              <a:ext uri="{FF2B5EF4-FFF2-40B4-BE49-F238E27FC236}">
-                <a16:creationId xmlns:a16="http://schemas.microsoft.com/office/drawing/2014/main" id="{1D7C7847-7F27-8DF9-23E8-F393BD883349}"/>
-              </a:ext>
-            </a:extLst>
-          </p:cNvPr>
-          <p:cNvSpPr>
-            <a:spLocks noChangeAspect="1"/>
-          </p:cNvSpPr>
-          <p:nvPr/>
-        </p:nvSpPr>
-        <p:spPr>
-          <a:xfrm>
-            <a:off x="5924432" y="228600"/>
             <a:ext cx="457200" cy="457200"/>
           </a:xfrm>
           <a:prstGeom prst="ellipse">
@@ -3771,6 +3606,174 @@
           <a:lstStyle/>
           <a:p>
             <a:pPr algn="ctr"/>
+            <a:endParaRPr lang="en-US" dirty="0"/>
+          </a:p>
+        </p:txBody>
+      </p:sp>
+      <p:sp>
+        <p:nvSpPr>
+          <p:cNvPr id="7" name="Oval 6">
+            <a:extLst>
+              <a:ext uri="{FF2B5EF4-FFF2-40B4-BE49-F238E27FC236}">
+                <a16:creationId xmlns:a16="http://schemas.microsoft.com/office/drawing/2014/main" id="{319EF128-1B27-212D-F1F2-2014F51A17D1}"/>
+              </a:ext>
+            </a:extLst>
+          </p:cNvPr>
+          <p:cNvSpPr>
+            <a:spLocks noChangeAspect="1"/>
+          </p:cNvSpPr>
+          <p:nvPr/>
+        </p:nvSpPr>
+        <p:spPr>
+          <a:xfrm>
+            <a:off x="4659606" y="228600"/>
+            <a:ext cx="457200" cy="457200"/>
+          </a:xfrm>
+          <a:prstGeom prst="ellipse">
+            <a:avLst/>
+          </a:prstGeom>
+          <a:solidFill>
+            <a:schemeClr val="accent1"/>
+          </a:solidFill>
+          <a:ln>
+            <a:solidFill>
+              <a:schemeClr val="bg1"/>
+            </a:solidFill>
+          </a:ln>
+        </p:spPr>
+        <p:style>
+          <a:lnRef idx="2">
+            <a:schemeClr val="accent1">
+              <a:shade val="15000"/>
+            </a:schemeClr>
+          </a:lnRef>
+          <a:fillRef idx="1">
+            <a:schemeClr val="accent1"/>
+          </a:fillRef>
+          <a:effectRef idx="0">
+            <a:schemeClr val="accent1"/>
+          </a:effectRef>
+          <a:fontRef idx="minor">
+            <a:schemeClr val="lt1"/>
+          </a:fontRef>
+        </p:style>
+        <p:txBody>
+          <a:bodyPr rtlCol="0" anchor="ctr"/>
+          <a:lstStyle/>
+          <a:p>
+            <a:pPr algn="ctr"/>
+            <a:endParaRPr lang="en-US"/>
+          </a:p>
+        </p:txBody>
+      </p:sp>
+      <p:sp>
+        <p:nvSpPr>
+          <p:cNvPr id="8" name="Oval 7">
+            <a:extLst>
+              <a:ext uri="{FF2B5EF4-FFF2-40B4-BE49-F238E27FC236}">
+                <a16:creationId xmlns:a16="http://schemas.microsoft.com/office/drawing/2014/main" id="{2FF70347-6CE9-BBBB-0AF8-AB3A56584DEB}"/>
+              </a:ext>
+            </a:extLst>
+          </p:cNvPr>
+          <p:cNvSpPr>
+            <a:spLocks noChangeAspect="1"/>
+          </p:cNvSpPr>
+          <p:nvPr/>
+        </p:nvSpPr>
+        <p:spPr>
+          <a:xfrm>
+            <a:off x="5292019" y="228600"/>
+            <a:ext cx="457200" cy="457200"/>
+          </a:xfrm>
+          <a:prstGeom prst="ellipse">
+            <a:avLst/>
+          </a:prstGeom>
+          <a:solidFill>
+            <a:schemeClr val="accent1"/>
+          </a:solidFill>
+          <a:ln>
+            <a:solidFill>
+              <a:schemeClr val="bg1"/>
+            </a:solidFill>
+          </a:ln>
+        </p:spPr>
+        <p:style>
+          <a:lnRef idx="2">
+            <a:schemeClr val="accent1">
+              <a:shade val="15000"/>
+            </a:schemeClr>
+          </a:lnRef>
+          <a:fillRef idx="1">
+            <a:schemeClr val="accent1"/>
+          </a:fillRef>
+          <a:effectRef idx="0">
+            <a:schemeClr val="accent1"/>
+          </a:effectRef>
+          <a:fontRef idx="minor">
+            <a:schemeClr val="lt1"/>
+          </a:fontRef>
+        </p:style>
+        <p:txBody>
+          <a:bodyPr rtlCol="0" anchor="ctr"/>
+          <a:lstStyle/>
+          <a:p>
+            <a:pPr algn="ctr"/>
+            <a:endParaRPr lang="en-US"/>
+          </a:p>
+        </p:txBody>
+      </p:sp>
+      <p:sp>
+        <p:nvSpPr>
+          <p:cNvPr id="9" name="Oval 8">
+            <a:extLst>
+              <a:ext uri="{FF2B5EF4-FFF2-40B4-BE49-F238E27FC236}">
+                <a16:creationId xmlns:a16="http://schemas.microsoft.com/office/drawing/2014/main" id="{1D7C7847-7F27-8DF9-23E8-F393BD883349}"/>
+              </a:ext>
+            </a:extLst>
+          </p:cNvPr>
+          <p:cNvSpPr>
+            <a:spLocks noChangeAspect="1"/>
+          </p:cNvSpPr>
+          <p:nvPr/>
+        </p:nvSpPr>
+        <p:spPr>
+          <a:xfrm>
+            <a:off x="5924432" y="228600"/>
+            <a:ext cx="457200" cy="457200"/>
+          </a:xfrm>
+          <a:prstGeom prst="ellipse">
+            <a:avLst/>
+          </a:prstGeom>
+          <a:solidFill>
+            <a:schemeClr val="accent1"/>
+          </a:solidFill>
+          <a:ln>
+            <a:solidFill>
+              <a:schemeClr val="bg1"/>
+            </a:solidFill>
+          </a:ln>
+        </p:spPr>
+        <p:style>
+          <a:lnRef idx="2">
+            <a:schemeClr val="accent1">
+              <a:shade val="15000"/>
+            </a:schemeClr>
+          </a:lnRef>
+          <a:fillRef idx="1">
+            <a:schemeClr val="accent1"/>
+          </a:fillRef>
+          <a:effectRef idx="0">
+            <a:schemeClr val="accent1"/>
+          </a:effectRef>
+          <a:fontRef idx="minor">
+            <a:schemeClr val="lt1"/>
+          </a:fontRef>
+        </p:style>
+        <p:txBody>
+          <a:bodyPr rtlCol="0" anchor="ctr"/>
+          <a:lstStyle/>
+          <a:p>
+            <a:pPr algn="ctr"/>
             <a:endParaRPr lang="en-US"/>
           </a:p>
         </p:txBody>
@@ -3798,7 +3801,7 @@
             <a:avLst/>
           </a:prstGeom>
           <a:solidFill>
-            <a:srgbClr val="8EBB6F"/>
+            <a:schemeClr val="accent1"/>
           </a:solidFill>
           <a:ln>
             <a:solidFill>
@@ -3945,7 +3948,7 @@
         </p:blipFill>
         <p:spPr>
           <a:xfrm>
-            <a:off x="6544145" y="215900"/>
+            <a:off x="4014493" y="215900"/>
             <a:ext cx="469900" cy="482600"/>
           </a:xfrm>
           <a:prstGeom prst="rect">
@@ -3975,7 +3978,7 @@
         </p:blipFill>
         <p:spPr>
           <a:xfrm>
-            <a:off x="5924432" y="215900"/>
+            <a:off x="3394780" y="215900"/>
             <a:ext cx="469900" cy="482600"/>
           </a:xfrm>
           <a:prstGeom prst="rect">
@@ -4167,7 +4170,7 @@
         </p:nvSpPr>
         <p:spPr>
           <a:xfrm>
-            <a:off x="3394780" y="228600"/>
+            <a:off x="4659606" y="228600"/>
             <a:ext cx="457200" cy="457200"/>
           </a:xfrm>
           <a:prstGeom prst="ellipse">
@@ -4223,7 +4226,7 @@
         </p:nvSpPr>
         <p:spPr>
           <a:xfrm>
-            <a:off x="4027193" y="228600"/>
+            <a:off x="5292019" y="228600"/>
             <a:ext cx="457200" cy="457200"/>
           </a:xfrm>
           <a:prstGeom prst="ellipse">
@@ -4279,7 +4282,7 @@
         </p:nvSpPr>
         <p:spPr>
           <a:xfrm>
-            <a:off x="4659606" y="228600"/>
+            <a:off x="5924432" y="228600"/>
             <a:ext cx="457200" cy="457200"/>
           </a:xfrm>
           <a:prstGeom prst="ellipse">
@@ -4335,7 +4338,7 @@
         </p:nvSpPr>
         <p:spPr>
           <a:xfrm>
-            <a:off x="5292019" y="228600"/>
+            <a:off x="6556845" y="228600"/>
             <a:ext cx="457200" cy="457200"/>
           </a:xfrm>
           <a:prstGeom prst="ellipse">
@@ -4452,7 +4455,7 @@
         <p:cNvPr id="1" name="">
           <a:extLst>
             <a:ext uri="{FF2B5EF4-FFF2-40B4-BE49-F238E27FC236}">
-              <a16:creationId xmlns:a16="http://schemas.microsoft.com/office/drawing/2014/main" id="{D956DFBB-6B4A-7D10-11FA-F411E5F8BBD5}"/>
+              <a16:creationId xmlns:a16="http://schemas.microsoft.com/office/drawing/2014/main" id="{9AF18FC1-E9B0-5537-ADCA-F1FCD0E47137}"/>
             </a:ext>
           </a:extLst>
         </p:cNvPr>
@@ -4467,591 +4470,2280 @@
           <a:chExt cx="0" cy="0"/>
         </a:xfrm>
       </p:grpSpPr>
-      <p:grpSp>
-        <p:nvGrpSpPr>
-          <p:cNvPr id="12" name="Group 11">
+      <p:sp>
+        <p:nvSpPr>
+          <p:cNvPr id="13" name="Oval 12">
             <a:extLst>
               <a:ext uri="{FF2B5EF4-FFF2-40B4-BE49-F238E27FC236}">
-                <a16:creationId xmlns:a16="http://schemas.microsoft.com/office/drawing/2014/main" id="{0EDA14D8-AB90-14F3-B711-721E334471DF}"/>
+                <a16:creationId xmlns:a16="http://schemas.microsoft.com/office/drawing/2014/main" id="{10B9CBAD-E246-186A-82C7-2A7166B37724}"/>
               </a:ext>
             </a:extLst>
           </p:cNvPr>
-          <p:cNvGrpSpPr/>
+          <p:cNvSpPr>
+            <a:spLocks noChangeAspect="1"/>
+          </p:cNvSpPr>
           <p:nvPr/>
-        </p:nvGrpSpPr>
-        <p:grpSpPr>
+        </p:nvSpPr>
+        <p:spPr>
+          <a:xfrm>
+            <a:off x="5924431" y="228600"/>
+            <a:ext cx="457200" cy="457200"/>
+          </a:xfrm>
+          <a:prstGeom prst="ellipse">
+            <a:avLst/>
+          </a:prstGeom>
+          <a:solidFill>
+            <a:schemeClr val="accent1"/>
+          </a:solidFill>
+          <a:ln>
+            <a:solidFill>
+              <a:schemeClr val="bg1"/>
+            </a:solidFill>
+          </a:ln>
+        </p:spPr>
+        <p:style>
+          <a:lnRef idx="2">
+            <a:schemeClr val="accent1">
+              <a:shade val="15000"/>
+            </a:schemeClr>
+          </a:lnRef>
+          <a:fillRef idx="1">
+            <a:schemeClr val="accent1"/>
+          </a:fillRef>
+          <a:effectRef idx="0">
+            <a:schemeClr val="accent1"/>
+          </a:effectRef>
+          <a:fontRef idx="minor">
+            <a:schemeClr val="lt1"/>
+          </a:fontRef>
+        </p:style>
+        <p:txBody>
+          <a:bodyPr rtlCol="0" anchor="ctr"/>
+          <a:lstStyle/>
+          <a:p>
+            <a:pPr algn="ctr"/>
+            <a:endParaRPr lang="en-US"/>
+          </a:p>
+        </p:txBody>
+      </p:sp>
+      <p:sp>
+        <p:nvSpPr>
+          <p:cNvPr id="14" name="Oval 13">
+            <a:extLst>
+              <a:ext uri="{FF2B5EF4-FFF2-40B4-BE49-F238E27FC236}">
+                <a16:creationId xmlns:a16="http://schemas.microsoft.com/office/drawing/2014/main" id="{E377DAFA-8758-035A-513A-07D8B9CF1244}"/>
+              </a:ext>
+            </a:extLst>
+          </p:cNvPr>
+          <p:cNvSpPr>
+            <a:spLocks noChangeAspect="1"/>
+          </p:cNvSpPr>
+          <p:nvPr/>
+        </p:nvSpPr>
+        <p:spPr>
+          <a:xfrm>
+            <a:off x="6556844" y="228600"/>
+            <a:ext cx="457200" cy="457200"/>
+          </a:xfrm>
+          <a:prstGeom prst="ellipse">
+            <a:avLst/>
+          </a:prstGeom>
+          <a:solidFill>
+            <a:schemeClr val="accent1"/>
+          </a:solidFill>
+          <a:ln>
+            <a:solidFill>
+              <a:schemeClr val="bg1"/>
+            </a:solidFill>
+          </a:ln>
+        </p:spPr>
+        <p:style>
+          <a:lnRef idx="2">
+            <a:schemeClr val="accent1">
+              <a:shade val="15000"/>
+            </a:schemeClr>
+          </a:lnRef>
+          <a:fillRef idx="1">
+            <a:schemeClr val="accent1"/>
+          </a:fillRef>
+          <a:effectRef idx="0">
+            <a:schemeClr val="accent1"/>
+          </a:effectRef>
+          <a:fontRef idx="minor">
+            <a:schemeClr val="lt1"/>
+          </a:fontRef>
+        </p:style>
+        <p:txBody>
+          <a:bodyPr rtlCol="0" anchor="ctr"/>
+          <a:lstStyle/>
+          <a:p>
+            <a:pPr algn="ctr"/>
+            <a:endParaRPr lang="en-US"/>
+          </a:p>
+        </p:txBody>
+      </p:sp>
+      <p:sp>
+        <p:nvSpPr>
+          <p:cNvPr id="2" name="Oval 1">
+            <a:extLst>
+              <a:ext uri="{FF2B5EF4-FFF2-40B4-BE49-F238E27FC236}">
+                <a16:creationId xmlns:a16="http://schemas.microsoft.com/office/drawing/2014/main" id="{D9955EF0-E199-CFF8-1071-B7D1BCB3C43F}"/>
+              </a:ext>
+            </a:extLst>
+          </p:cNvPr>
+          <p:cNvSpPr>
+            <a:spLocks noChangeAspect="1"/>
+          </p:cNvSpPr>
+          <p:nvPr/>
+        </p:nvSpPr>
+        <p:spPr>
           <a:xfrm>
             <a:off x="1497541" y="228600"/>
-            <a:ext cx="6148918" cy="457200"/>
-            <a:chOff x="302004" y="209723"/>
-            <a:chExt cx="6148918" cy="457200"/>
-          </a:xfrm>
-        </p:grpSpPr>
-        <p:sp>
-          <p:nvSpPr>
-            <p:cNvPr id="2" name="Oval 1">
-              <a:extLst>
-                <a:ext uri="{FF2B5EF4-FFF2-40B4-BE49-F238E27FC236}">
-                  <a16:creationId xmlns:a16="http://schemas.microsoft.com/office/drawing/2014/main" id="{7EA3F6C6-0470-DDD2-D5C0-278345834B62}"/>
-                </a:ext>
-              </a:extLst>
-            </p:cNvPr>
-            <p:cNvSpPr>
-              <a:spLocks noChangeAspect="1"/>
-            </p:cNvSpPr>
-            <p:nvPr/>
-          </p:nvSpPr>
-          <p:spPr>
-            <a:xfrm>
-              <a:off x="302004" y="209723"/>
-              <a:ext cx="457200" cy="457200"/>
-            </a:xfrm>
-            <a:prstGeom prst="ellipse">
-              <a:avLst/>
-            </a:prstGeom>
+            <a:ext cx="457200" cy="457200"/>
+          </a:xfrm>
+          <a:prstGeom prst="ellipse">
+            <a:avLst/>
+          </a:prstGeom>
+          <a:solidFill>
+            <a:schemeClr val="accent4"/>
+          </a:solidFill>
+          <a:ln>
             <a:solidFill>
-              <a:schemeClr val="accent4"/>
+              <a:schemeClr val="bg1"/>
             </a:solidFill>
-            <a:ln>
-              <a:solidFill>
-                <a:schemeClr val="bg1"/>
-              </a:solidFill>
-            </a:ln>
-          </p:spPr>
-          <p:style>
-            <a:lnRef idx="2">
-              <a:schemeClr val="accent1">
-                <a:shade val="15000"/>
+          </a:ln>
+        </p:spPr>
+        <p:style>
+          <a:lnRef idx="2">
+            <a:schemeClr val="accent1">
+              <a:shade val="15000"/>
+            </a:schemeClr>
+          </a:lnRef>
+          <a:fillRef idx="1">
+            <a:schemeClr val="accent1"/>
+          </a:fillRef>
+          <a:effectRef idx="0">
+            <a:schemeClr val="accent1"/>
+          </a:effectRef>
+          <a:fontRef idx="minor">
+            <a:schemeClr val="lt1"/>
+          </a:fontRef>
+        </p:style>
+        <p:txBody>
+          <a:bodyPr rtlCol="0" anchor="ctr"/>
+          <a:lstStyle/>
+          <a:p>
+            <a:pPr algn="ctr"/>
+            <a:endParaRPr lang="en-US"/>
+          </a:p>
+        </p:txBody>
+      </p:sp>
+      <p:sp>
+        <p:nvSpPr>
+          <p:cNvPr id="3" name="Oval 2">
+            <a:extLst>
+              <a:ext uri="{FF2B5EF4-FFF2-40B4-BE49-F238E27FC236}">
+                <a16:creationId xmlns:a16="http://schemas.microsoft.com/office/drawing/2014/main" id="{B4FB6800-24DE-FA46-7A27-6155C39BD906}"/>
+              </a:ext>
+            </a:extLst>
+          </p:cNvPr>
+          <p:cNvSpPr>
+            <a:spLocks noChangeAspect="1"/>
+          </p:cNvSpPr>
+          <p:nvPr/>
+        </p:nvSpPr>
+        <p:spPr>
+          <a:xfrm>
+            <a:off x="2129954" y="228600"/>
+            <a:ext cx="457200" cy="457200"/>
+          </a:xfrm>
+          <a:prstGeom prst="ellipse">
+            <a:avLst/>
+          </a:prstGeom>
+          <a:solidFill>
+            <a:schemeClr val="accent4"/>
+          </a:solidFill>
+          <a:ln>
+            <a:solidFill>
+              <a:schemeClr val="bg1"/>
+            </a:solidFill>
+          </a:ln>
+        </p:spPr>
+        <p:style>
+          <a:lnRef idx="2">
+            <a:schemeClr val="accent1">
+              <a:shade val="15000"/>
+            </a:schemeClr>
+          </a:lnRef>
+          <a:fillRef idx="1">
+            <a:schemeClr val="accent1"/>
+          </a:fillRef>
+          <a:effectRef idx="0">
+            <a:schemeClr val="accent1"/>
+          </a:effectRef>
+          <a:fontRef idx="minor">
+            <a:schemeClr val="lt1"/>
+          </a:fontRef>
+        </p:style>
+        <p:txBody>
+          <a:bodyPr rtlCol="0" anchor="ctr"/>
+          <a:lstStyle/>
+          <a:p>
+            <a:pPr algn="ctr"/>
+            <a:endParaRPr lang="en-US"/>
+          </a:p>
+        </p:txBody>
+      </p:sp>
+      <p:sp>
+        <p:nvSpPr>
+          <p:cNvPr id="4" name="Oval 3">
+            <a:extLst>
+              <a:ext uri="{FF2B5EF4-FFF2-40B4-BE49-F238E27FC236}">
+                <a16:creationId xmlns:a16="http://schemas.microsoft.com/office/drawing/2014/main" id="{0F62C9B4-6B80-5114-3AC9-CC62240A57C1}"/>
+              </a:ext>
+            </a:extLst>
+          </p:cNvPr>
+          <p:cNvSpPr>
+            <a:spLocks noChangeAspect="1"/>
+          </p:cNvSpPr>
+          <p:nvPr/>
+        </p:nvSpPr>
+        <p:spPr>
+          <a:xfrm>
+            <a:off x="2762367" y="228600"/>
+            <a:ext cx="457200" cy="457200"/>
+          </a:xfrm>
+          <a:prstGeom prst="ellipse">
+            <a:avLst/>
+          </a:prstGeom>
+          <a:solidFill>
+            <a:schemeClr val="accent4"/>
+          </a:solidFill>
+          <a:ln>
+            <a:solidFill>
+              <a:schemeClr val="bg1"/>
+            </a:solidFill>
+          </a:ln>
+        </p:spPr>
+        <p:style>
+          <a:lnRef idx="2">
+            <a:schemeClr val="accent1">
+              <a:shade val="15000"/>
+            </a:schemeClr>
+          </a:lnRef>
+          <a:fillRef idx="1">
+            <a:schemeClr val="accent1"/>
+          </a:fillRef>
+          <a:effectRef idx="0">
+            <a:schemeClr val="accent1"/>
+          </a:effectRef>
+          <a:fontRef idx="minor">
+            <a:schemeClr val="lt1"/>
+          </a:fontRef>
+        </p:style>
+        <p:txBody>
+          <a:bodyPr rtlCol="0" anchor="ctr"/>
+          <a:lstStyle/>
+          <a:p>
+            <a:pPr algn="ctr"/>
+            <a:endParaRPr lang="en-US" dirty="0"/>
+          </a:p>
+        </p:txBody>
+      </p:sp>
+      <p:sp>
+        <p:nvSpPr>
+          <p:cNvPr id="5" name="Oval 4">
+            <a:extLst>
+              <a:ext uri="{FF2B5EF4-FFF2-40B4-BE49-F238E27FC236}">
+                <a16:creationId xmlns:a16="http://schemas.microsoft.com/office/drawing/2014/main" id="{B7D17ECF-7B48-8A61-613B-290CAE74AFD6}"/>
+              </a:ext>
+            </a:extLst>
+          </p:cNvPr>
+          <p:cNvSpPr>
+            <a:spLocks noChangeAspect="1"/>
+          </p:cNvSpPr>
+          <p:nvPr/>
+        </p:nvSpPr>
+        <p:spPr>
+          <a:xfrm>
+            <a:off x="3394780" y="228600"/>
+            <a:ext cx="457200" cy="457200"/>
+          </a:xfrm>
+          <a:prstGeom prst="ellipse">
+            <a:avLst/>
+          </a:prstGeom>
+          <a:solidFill>
+            <a:schemeClr val="accent1"/>
+          </a:solidFill>
+          <a:ln>
+            <a:solidFill>
+              <a:schemeClr val="bg1"/>
+            </a:solidFill>
+          </a:ln>
+        </p:spPr>
+        <p:style>
+          <a:lnRef idx="2">
+            <a:schemeClr val="accent1">
+              <a:shade val="15000"/>
+            </a:schemeClr>
+          </a:lnRef>
+          <a:fillRef idx="1">
+            <a:schemeClr val="accent1"/>
+          </a:fillRef>
+          <a:effectRef idx="0">
+            <a:schemeClr val="accent1"/>
+          </a:effectRef>
+          <a:fontRef idx="minor">
+            <a:schemeClr val="lt1"/>
+          </a:fontRef>
+        </p:style>
+        <p:txBody>
+          <a:bodyPr rtlCol="0" anchor="ctr"/>
+          <a:lstStyle/>
+          <a:p>
+            <a:pPr algn="ctr"/>
+            <a:endParaRPr lang="en-US"/>
+          </a:p>
+        </p:txBody>
+      </p:sp>
+      <p:sp>
+        <p:nvSpPr>
+          <p:cNvPr id="6" name="Oval 5">
+            <a:extLst>
+              <a:ext uri="{FF2B5EF4-FFF2-40B4-BE49-F238E27FC236}">
+                <a16:creationId xmlns:a16="http://schemas.microsoft.com/office/drawing/2014/main" id="{C3DDA213-83B3-AB90-5A9D-1FF95CA3CC55}"/>
+              </a:ext>
+            </a:extLst>
+          </p:cNvPr>
+          <p:cNvSpPr>
+            <a:spLocks noChangeAspect="1"/>
+          </p:cNvSpPr>
+          <p:nvPr/>
+        </p:nvSpPr>
+        <p:spPr>
+          <a:xfrm>
+            <a:off x="4027193" y="228600"/>
+            <a:ext cx="457200" cy="457200"/>
+          </a:xfrm>
+          <a:prstGeom prst="ellipse">
+            <a:avLst/>
+          </a:prstGeom>
+          <a:solidFill>
+            <a:schemeClr val="accent1"/>
+          </a:solidFill>
+          <a:ln>
+            <a:solidFill>
+              <a:schemeClr val="bg1"/>
+            </a:solidFill>
+          </a:ln>
+        </p:spPr>
+        <p:style>
+          <a:lnRef idx="2">
+            <a:schemeClr val="accent1">
+              <a:shade val="15000"/>
+            </a:schemeClr>
+          </a:lnRef>
+          <a:fillRef idx="1">
+            <a:schemeClr val="accent1"/>
+          </a:fillRef>
+          <a:effectRef idx="0">
+            <a:schemeClr val="accent1"/>
+          </a:effectRef>
+          <a:fontRef idx="minor">
+            <a:schemeClr val="lt1"/>
+          </a:fontRef>
+        </p:style>
+        <p:txBody>
+          <a:bodyPr rtlCol="0" anchor="ctr"/>
+          <a:lstStyle/>
+          <a:p>
+            <a:pPr algn="ctr"/>
+            <a:endParaRPr lang="en-US"/>
+          </a:p>
+        </p:txBody>
+      </p:sp>
+      <p:sp>
+        <p:nvSpPr>
+          <p:cNvPr id="7" name="Oval 6">
+            <a:extLst>
+              <a:ext uri="{FF2B5EF4-FFF2-40B4-BE49-F238E27FC236}">
+                <a16:creationId xmlns:a16="http://schemas.microsoft.com/office/drawing/2014/main" id="{C6E8C9A8-B388-66A9-6605-8A67C78A3EDC}"/>
+              </a:ext>
+            </a:extLst>
+          </p:cNvPr>
+          <p:cNvSpPr>
+            <a:spLocks noChangeAspect="1"/>
+          </p:cNvSpPr>
+          <p:nvPr/>
+        </p:nvSpPr>
+        <p:spPr>
+          <a:xfrm>
+            <a:off x="4659606" y="228600"/>
+            <a:ext cx="457200" cy="457200"/>
+          </a:xfrm>
+          <a:prstGeom prst="ellipse">
+            <a:avLst/>
+          </a:prstGeom>
+          <a:solidFill>
+            <a:schemeClr val="accent1"/>
+          </a:solidFill>
+          <a:ln>
+            <a:solidFill>
+              <a:schemeClr val="bg1"/>
+            </a:solidFill>
+          </a:ln>
+        </p:spPr>
+        <p:style>
+          <a:lnRef idx="2">
+            <a:schemeClr val="accent1">
+              <a:shade val="15000"/>
+            </a:schemeClr>
+          </a:lnRef>
+          <a:fillRef idx="1">
+            <a:schemeClr val="accent1"/>
+          </a:fillRef>
+          <a:effectRef idx="0">
+            <a:schemeClr val="accent1"/>
+          </a:effectRef>
+          <a:fontRef idx="minor">
+            <a:schemeClr val="lt1"/>
+          </a:fontRef>
+        </p:style>
+        <p:txBody>
+          <a:bodyPr rtlCol="0" anchor="ctr"/>
+          <a:lstStyle/>
+          <a:p>
+            <a:pPr algn="ctr"/>
+            <a:endParaRPr lang="en-US"/>
+          </a:p>
+        </p:txBody>
+      </p:sp>
+      <p:sp>
+        <p:nvSpPr>
+          <p:cNvPr id="8" name="Oval 7">
+            <a:extLst>
+              <a:ext uri="{FF2B5EF4-FFF2-40B4-BE49-F238E27FC236}">
+                <a16:creationId xmlns:a16="http://schemas.microsoft.com/office/drawing/2014/main" id="{E6926976-5891-AFBB-6810-C9439959DB91}"/>
+              </a:ext>
+            </a:extLst>
+          </p:cNvPr>
+          <p:cNvSpPr>
+            <a:spLocks noChangeAspect="1"/>
+          </p:cNvSpPr>
+          <p:nvPr/>
+        </p:nvSpPr>
+        <p:spPr>
+          <a:xfrm>
+            <a:off x="5292019" y="228600"/>
+            <a:ext cx="457200" cy="457200"/>
+          </a:xfrm>
+          <a:prstGeom prst="ellipse">
+            <a:avLst/>
+          </a:prstGeom>
+          <a:solidFill>
+            <a:schemeClr val="accent1"/>
+          </a:solidFill>
+          <a:ln>
+            <a:solidFill>
+              <a:schemeClr val="bg1"/>
+            </a:solidFill>
+          </a:ln>
+        </p:spPr>
+        <p:style>
+          <a:lnRef idx="2">
+            <a:schemeClr val="accent1">
+              <a:shade val="15000"/>
+            </a:schemeClr>
+          </a:lnRef>
+          <a:fillRef idx="1">
+            <a:schemeClr val="accent1"/>
+          </a:fillRef>
+          <a:effectRef idx="0">
+            <a:schemeClr val="accent1"/>
+          </a:effectRef>
+          <a:fontRef idx="minor">
+            <a:schemeClr val="lt1"/>
+          </a:fontRef>
+        </p:style>
+        <p:txBody>
+          <a:bodyPr rtlCol="0" anchor="ctr"/>
+          <a:lstStyle/>
+          <a:p>
+            <a:pPr algn="ctr"/>
+            <a:endParaRPr lang="en-US"/>
+          </a:p>
+        </p:txBody>
+      </p:sp>
+      <p:sp>
+        <p:nvSpPr>
+          <p:cNvPr id="11" name="Oval 10">
+            <a:extLst>
+              <a:ext uri="{FF2B5EF4-FFF2-40B4-BE49-F238E27FC236}">
+                <a16:creationId xmlns:a16="http://schemas.microsoft.com/office/drawing/2014/main" id="{3E2BC2D2-6506-3C64-DE06-C510CE5CD963}"/>
+              </a:ext>
+            </a:extLst>
+          </p:cNvPr>
+          <p:cNvSpPr>
+            <a:spLocks noChangeAspect="1"/>
+          </p:cNvSpPr>
+          <p:nvPr/>
+        </p:nvSpPr>
+        <p:spPr>
+          <a:xfrm>
+            <a:off x="7189259" y="228600"/>
+            <a:ext cx="457200" cy="457200"/>
+          </a:xfrm>
+          <a:prstGeom prst="ellipse">
+            <a:avLst/>
+          </a:prstGeom>
+          <a:noFill/>
+          <a:ln>
+            <a:solidFill>
+              <a:schemeClr val="bg2">
+                <a:lumMod val="90000"/>
               </a:schemeClr>
-            </a:lnRef>
-            <a:fillRef idx="1">
-              <a:schemeClr val="accent1"/>
-            </a:fillRef>
-            <a:effectRef idx="0">
-              <a:schemeClr val="accent1"/>
-            </a:effectRef>
-            <a:fontRef idx="minor">
-              <a:schemeClr val="lt1"/>
-            </a:fontRef>
-          </p:style>
-          <p:txBody>
-            <a:bodyPr rtlCol="0" anchor="ctr"/>
-            <a:lstStyle/>
-            <a:p>
-              <a:pPr algn="ctr"/>
-              <a:endParaRPr lang="en-US"/>
-            </a:p>
-          </p:txBody>
-        </p:sp>
-        <p:sp>
-          <p:nvSpPr>
-            <p:cNvPr id="3" name="Oval 2">
-              <a:extLst>
-                <a:ext uri="{FF2B5EF4-FFF2-40B4-BE49-F238E27FC236}">
-                  <a16:creationId xmlns:a16="http://schemas.microsoft.com/office/drawing/2014/main" id="{44631069-FA1F-9B00-D8C2-86C1413A9986}"/>
-                </a:ext>
-              </a:extLst>
-            </p:cNvPr>
-            <p:cNvSpPr>
-              <a:spLocks noChangeAspect="1"/>
-            </p:cNvSpPr>
-            <p:nvPr/>
-          </p:nvSpPr>
-          <p:spPr>
-            <a:xfrm>
-              <a:off x="934417" y="209723"/>
-              <a:ext cx="457200" cy="457200"/>
-            </a:xfrm>
-            <a:prstGeom prst="ellipse">
-              <a:avLst/>
-            </a:prstGeom>
-            <a:solidFill>
-              <a:schemeClr val="accent4"/>
             </a:solidFill>
-            <a:ln>
-              <a:solidFill>
-                <a:schemeClr val="bg1"/>
-              </a:solidFill>
-            </a:ln>
-          </p:spPr>
-          <p:style>
-            <a:lnRef idx="2">
-              <a:schemeClr val="accent1">
-                <a:shade val="15000"/>
-              </a:schemeClr>
-            </a:lnRef>
-            <a:fillRef idx="1">
-              <a:schemeClr val="accent1"/>
-            </a:fillRef>
-            <a:effectRef idx="0">
-              <a:schemeClr val="accent1"/>
-            </a:effectRef>
-            <a:fontRef idx="minor">
-              <a:schemeClr val="lt1"/>
-            </a:fontRef>
-          </p:style>
-          <p:txBody>
-            <a:bodyPr rtlCol="0" anchor="ctr"/>
-            <a:lstStyle/>
-            <a:p>
-              <a:pPr algn="ctr"/>
-              <a:endParaRPr lang="en-US"/>
-            </a:p>
-          </p:txBody>
-        </p:sp>
-        <p:sp>
-          <p:nvSpPr>
-            <p:cNvPr id="4" name="Oval 3">
-              <a:extLst>
-                <a:ext uri="{FF2B5EF4-FFF2-40B4-BE49-F238E27FC236}">
-                  <a16:creationId xmlns:a16="http://schemas.microsoft.com/office/drawing/2014/main" id="{B96D1335-EBAE-4E8D-B13B-66FFD2DEB532}"/>
-                </a:ext>
-              </a:extLst>
-            </p:cNvPr>
-            <p:cNvSpPr>
-              <a:spLocks noChangeAspect="1"/>
-            </p:cNvSpPr>
-            <p:nvPr/>
-          </p:nvSpPr>
-          <p:spPr>
-            <a:xfrm>
-              <a:off x="1566830" y="209723"/>
-              <a:ext cx="457200" cy="457200"/>
-            </a:xfrm>
-            <a:prstGeom prst="ellipse">
-              <a:avLst/>
-            </a:prstGeom>
-            <a:solidFill>
-              <a:schemeClr val="accent4"/>
-            </a:solidFill>
-            <a:ln>
-              <a:solidFill>
-                <a:schemeClr val="bg1"/>
-              </a:solidFill>
-            </a:ln>
-          </p:spPr>
-          <p:style>
-            <a:lnRef idx="2">
-              <a:schemeClr val="accent1">
-                <a:shade val="15000"/>
-              </a:schemeClr>
-            </a:lnRef>
-            <a:fillRef idx="1">
-              <a:schemeClr val="accent1"/>
-            </a:fillRef>
-            <a:effectRef idx="0">
-              <a:schemeClr val="accent1"/>
-            </a:effectRef>
-            <a:fontRef idx="minor">
-              <a:schemeClr val="lt1"/>
-            </a:fontRef>
-          </p:style>
-          <p:txBody>
-            <a:bodyPr rtlCol="0" anchor="ctr"/>
-            <a:lstStyle/>
-            <a:p>
-              <a:pPr algn="ctr"/>
-              <a:endParaRPr lang="en-US" dirty="0"/>
-            </a:p>
-          </p:txBody>
-        </p:sp>
-        <p:sp>
-          <p:nvSpPr>
-            <p:cNvPr id="5" name="Oval 4">
-              <a:extLst>
-                <a:ext uri="{FF2B5EF4-FFF2-40B4-BE49-F238E27FC236}">
-                  <a16:creationId xmlns:a16="http://schemas.microsoft.com/office/drawing/2014/main" id="{8EFB953F-3900-F459-30EE-859F58E1BC84}"/>
-                </a:ext>
-              </a:extLst>
-            </p:cNvPr>
-            <p:cNvSpPr>
-              <a:spLocks noChangeAspect="1"/>
-            </p:cNvSpPr>
-            <p:nvPr/>
-          </p:nvSpPr>
-          <p:spPr>
-            <a:xfrm>
-              <a:off x="2199243" y="209723"/>
-              <a:ext cx="457200" cy="457200"/>
-            </a:xfrm>
-            <a:prstGeom prst="ellipse">
-              <a:avLst/>
-            </a:prstGeom>
-            <a:solidFill>
-              <a:schemeClr val="accent1"/>
-            </a:solidFill>
-            <a:ln>
-              <a:solidFill>
-                <a:schemeClr val="bg1"/>
-              </a:solidFill>
-            </a:ln>
-          </p:spPr>
-          <p:style>
-            <a:lnRef idx="2">
-              <a:schemeClr val="accent1">
-                <a:shade val="15000"/>
-              </a:schemeClr>
-            </a:lnRef>
-            <a:fillRef idx="1">
-              <a:schemeClr val="accent1"/>
-            </a:fillRef>
-            <a:effectRef idx="0">
-              <a:schemeClr val="accent1"/>
-            </a:effectRef>
-            <a:fontRef idx="minor">
-              <a:schemeClr val="lt1"/>
-            </a:fontRef>
-          </p:style>
-          <p:txBody>
-            <a:bodyPr rtlCol="0" anchor="ctr"/>
-            <a:lstStyle/>
-            <a:p>
-              <a:pPr algn="ctr"/>
-              <a:endParaRPr lang="en-US"/>
-            </a:p>
-          </p:txBody>
-        </p:sp>
-        <p:sp>
-          <p:nvSpPr>
-            <p:cNvPr id="6" name="Oval 5">
-              <a:extLst>
-                <a:ext uri="{FF2B5EF4-FFF2-40B4-BE49-F238E27FC236}">
-                  <a16:creationId xmlns:a16="http://schemas.microsoft.com/office/drawing/2014/main" id="{11EFD31E-1EC4-0BBC-8F36-3DAEED8E9C52}"/>
-                </a:ext>
-              </a:extLst>
-            </p:cNvPr>
-            <p:cNvSpPr>
-              <a:spLocks noChangeAspect="1"/>
-            </p:cNvSpPr>
-            <p:nvPr/>
-          </p:nvSpPr>
-          <p:spPr>
-            <a:xfrm>
-              <a:off x="2831656" y="209723"/>
-              <a:ext cx="457200" cy="457200"/>
-            </a:xfrm>
-            <a:prstGeom prst="ellipse">
-              <a:avLst/>
-            </a:prstGeom>
-            <a:solidFill>
-              <a:schemeClr val="accent1"/>
-            </a:solidFill>
-            <a:ln>
-              <a:solidFill>
-                <a:schemeClr val="bg1"/>
-              </a:solidFill>
-            </a:ln>
-          </p:spPr>
-          <p:style>
-            <a:lnRef idx="2">
-              <a:schemeClr val="accent1">
-                <a:shade val="15000"/>
-              </a:schemeClr>
-            </a:lnRef>
-            <a:fillRef idx="1">
-              <a:schemeClr val="accent1"/>
-            </a:fillRef>
-            <a:effectRef idx="0">
-              <a:schemeClr val="accent1"/>
-            </a:effectRef>
-            <a:fontRef idx="minor">
-              <a:schemeClr val="lt1"/>
-            </a:fontRef>
-          </p:style>
-          <p:txBody>
-            <a:bodyPr rtlCol="0" anchor="ctr"/>
-            <a:lstStyle/>
-            <a:p>
-              <a:pPr algn="ctr"/>
-              <a:endParaRPr lang="en-US"/>
-            </a:p>
-          </p:txBody>
-        </p:sp>
-        <p:sp>
-          <p:nvSpPr>
-            <p:cNvPr id="7" name="Oval 6">
-              <a:extLst>
-                <a:ext uri="{FF2B5EF4-FFF2-40B4-BE49-F238E27FC236}">
-                  <a16:creationId xmlns:a16="http://schemas.microsoft.com/office/drawing/2014/main" id="{730CC340-B41A-C1BF-AA1A-C0A8249A96BF}"/>
-                </a:ext>
-              </a:extLst>
-            </p:cNvPr>
-            <p:cNvSpPr>
-              <a:spLocks noChangeAspect="1"/>
-            </p:cNvSpPr>
-            <p:nvPr/>
-          </p:nvSpPr>
-          <p:spPr>
-            <a:xfrm>
-              <a:off x="3464069" y="209723"/>
-              <a:ext cx="457200" cy="457200"/>
-            </a:xfrm>
-            <a:prstGeom prst="ellipse">
-              <a:avLst/>
-            </a:prstGeom>
-            <a:solidFill>
-              <a:schemeClr val="accent1"/>
-            </a:solidFill>
-            <a:ln>
-              <a:solidFill>
-                <a:schemeClr val="bg1"/>
-              </a:solidFill>
-            </a:ln>
-          </p:spPr>
-          <p:style>
-            <a:lnRef idx="2">
-              <a:schemeClr val="accent1">
-                <a:shade val="15000"/>
-              </a:schemeClr>
-            </a:lnRef>
-            <a:fillRef idx="1">
-              <a:schemeClr val="accent1"/>
-            </a:fillRef>
-            <a:effectRef idx="0">
-              <a:schemeClr val="accent1"/>
-            </a:effectRef>
-            <a:fontRef idx="minor">
-              <a:schemeClr val="lt1"/>
-            </a:fontRef>
-          </p:style>
-          <p:txBody>
-            <a:bodyPr rtlCol="0" anchor="ctr"/>
-            <a:lstStyle/>
-            <a:p>
-              <a:pPr algn="ctr"/>
-              <a:endParaRPr lang="en-US"/>
-            </a:p>
-          </p:txBody>
-        </p:sp>
-        <p:sp>
-          <p:nvSpPr>
-            <p:cNvPr id="8" name="Oval 7">
-              <a:extLst>
-                <a:ext uri="{FF2B5EF4-FFF2-40B4-BE49-F238E27FC236}">
-                  <a16:creationId xmlns:a16="http://schemas.microsoft.com/office/drawing/2014/main" id="{70CD2B94-2B55-4624-1745-C58A42C05884}"/>
-                </a:ext>
-              </a:extLst>
-            </p:cNvPr>
-            <p:cNvSpPr>
-              <a:spLocks noChangeAspect="1"/>
-            </p:cNvSpPr>
-            <p:nvPr/>
-          </p:nvSpPr>
-          <p:spPr>
-            <a:xfrm>
-              <a:off x="4096482" y="209723"/>
-              <a:ext cx="457200" cy="457200"/>
-            </a:xfrm>
-            <a:prstGeom prst="ellipse">
-              <a:avLst/>
-            </a:prstGeom>
-            <a:solidFill>
-              <a:schemeClr val="accent1"/>
-            </a:solidFill>
-            <a:ln>
-              <a:solidFill>
-                <a:schemeClr val="bg1"/>
-              </a:solidFill>
-            </a:ln>
-          </p:spPr>
-          <p:style>
-            <a:lnRef idx="2">
-              <a:schemeClr val="accent1">
-                <a:shade val="15000"/>
-              </a:schemeClr>
-            </a:lnRef>
-            <a:fillRef idx="1">
-              <a:schemeClr val="accent1"/>
-            </a:fillRef>
-            <a:effectRef idx="0">
-              <a:schemeClr val="accent1"/>
-            </a:effectRef>
-            <a:fontRef idx="minor">
-              <a:schemeClr val="lt1"/>
-            </a:fontRef>
-          </p:style>
-          <p:txBody>
-            <a:bodyPr rtlCol="0" anchor="ctr"/>
-            <a:lstStyle/>
-            <a:p>
-              <a:pPr algn="ctr"/>
-              <a:endParaRPr lang="en-US"/>
-            </a:p>
-          </p:txBody>
-        </p:sp>
-        <p:sp>
-          <p:nvSpPr>
-            <p:cNvPr id="9" name="Oval 8">
-              <a:extLst>
-                <a:ext uri="{FF2B5EF4-FFF2-40B4-BE49-F238E27FC236}">
-                  <a16:creationId xmlns:a16="http://schemas.microsoft.com/office/drawing/2014/main" id="{10F1CB95-9BF4-A680-4312-13475DFD8B68}"/>
-                </a:ext>
-              </a:extLst>
-            </p:cNvPr>
-            <p:cNvSpPr>
-              <a:spLocks noChangeAspect="1"/>
-            </p:cNvSpPr>
-            <p:nvPr/>
-          </p:nvSpPr>
-          <p:spPr>
-            <a:xfrm>
-              <a:off x="4728895" y="209723"/>
-              <a:ext cx="457200" cy="457200"/>
-            </a:xfrm>
-            <a:prstGeom prst="ellipse">
-              <a:avLst/>
-            </a:prstGeom>
-            <a:noFill/>
-            <a:ln>
-              <a:solidFill>
-                <a:schemeClr val="bg2">
-                  <a:lumMod val="90000"/>
-                </a:schemeClr>
-              </a:solidFill>
-            </a:ln>
-          </p:spPr>
-          <p:style>
-            <a:lnRef idx="2">
-              <a:schemeClr val="accent1">
-                <a:shade val="15000"/>
-              </a:schemeClr>
-            </a:lnRef>
-            <a:fillRef idx="1">
-              <a:schemeClr val="accent1"/>
-            </a:fillRef>
-            <a:effectRef idx="0">
-              <a:schemeClr val="accent1"/>
-            </a:effectRef>
-            <a:fontRef idx="minor">
-              <a:schemeClr val="lt1"/>
-            </a:fontRef>
-          </p:style>
-          <p:txBody>
-            <a:bodyPr rtlCol="0" anchor="ctr"/>
-            <a:lstStyle/>
-            <a:p>
-              <a:pPr algn="ctr"/>
-              <a:endParaRPr lang="en-US"/>
-            </a:p>
-          </p:txBody>
-        </p:sp>
-        <p:sp>
-          <p:nvSpPr>
-            <p:cNvPr id="10" name="Oval 9">
-              <a:extLst>
-                <a:ext uri="{FF2B5EF4-FFF2-40B4-BE49-F238E27FC236}">
-                  <a16:creationId xmlns:a16="http://schemas.microsoft.com/office/drawing/2014/main" id="{59D94D4D-7E0C-4494-F341-FBE2131EB03C}"/>
-                </a:ext>
-              </a:extLst>
-            </p:cNvPr>
-            <p:cNvSpPr>
-              <a:spLocks noChangeAspect="1"/>
-            </p:cNvSpPr>
-            <p:nvPr/>
-          </p:nvSpPr>
-          <p:spPr>
-            <a:xfrm>
-              <a:off x="5361308" y="209723"/>
-              <a:ext cx="457200" cy="457200"/>
-            </a:xfrm>
-            <a:prstGeom prst="ellipse">
-              <a:avLst/>
-            </a:prstGeom>
-            <a:noFill/>
-            <a:ln>
-              <a:solidFill>
-                <a:schemeClr val="bg2">
-                  <a:lumMod val="90000"/>
-                </a:schemeClr>
-              </a:solidFill>
-            </a:ln>
-          </p:spPr>
-          <p:style>
-            <a:lnRef idx="2">
-              <a:schemeClr val="accent1">
-                <a:shade val="15000"/>
-              </a:schemeClr>
-            </a:lnRef>
-            <a:fillRef idx="1">
-              <a:schemeClr val="accent1"/>
-            </a:fillRef>
-            <a:effectRef idx="0">
-              <a:schemeClr val="accent1"/>
-            </a:effectRef>
-            <a:fontRef idx="minor">
-              <a:schemeClr val="lt1"/>
-            </a:fontRef>
-          </p:style>
-          <p:txBody>
-            <a:bodyPr rtlCol="0" anchor="ctr"/>
-            <a:lstStyle/>
-            <a:p>
-              <a:pPr algn="ctr"/>
-              <a:endParaRPr lang="en-US"/>
-            </a:p>
-          </p:txBody>
-        </p:sp>
-        <p:sp>
-          <p:nvSpPr>
-            <p:cNvPr id="11" name="Oval 10">
-              <a:extLst>
-                <a:ext uri="{FF2B5EF4-FFF2-40B4-BE49-F238E27FC236}">
-                  <a16:creationId xmlns:a16="http://schemas.microsoft.com/office/drawing/2014/main" id="{1DDC0C14-AF90-0C50-A905-D7B722E7DB75}"/>
-                </a:ext>
-              </a:extLst>
-            </p:cNvPr>
-            <p:cNvSpPr>
-              <a:spLocks noChangeAspect="1"/>
-            </p:cNvSpPr>
-            <p:nvPr/>
-          </p:nvSpPr>
-          <p:spPr>
-            <a:xfrm>
-              <a:off x="5993722" y="209723"/>
-              <a:ext cx="457200" cy="457200"/>
-            </a:xfrm>
-            <a:prstGeom prst="ellipse">
-              <a:avLst/>
-            </a:prstGeom>
-            <a:noFill/>
-            <a:ln>
-              <a:solidFill>
-                <a:schemeClr val="bg2">
-                  <a:lumMod val="90000"/>
-                </a:schemeClr>
-              </a:solidFill>
-            </a:ln>
-          </p:spPr>
-          <p:style>
-            <a:lnRef idx="2">
-              <a:schemeClr val="accent1">
-                <a:shade val="15000"/>
-              </a:schemeClr>
-            </a:lnRef>
-            <a:fillRef idx="1">
-              <a:schemeClr val="accent1"/>
-            </a:fillRef>
-            <a:effectRef idx="0">
-              <a:schemeClr val="accent1"/>
-            </a:effectRef>
-            <a:fontRef idx="minor">
-              <a:schemeClr val="lt1"/>
-            </a:fontRef>
-          </p:style>
-          <p:txBody>
-            <a:bodyPr rtlCol="0" anchor="ctr"/>
-            <a:lstStyle/>
-            <a:p>
-              <a:pPr algn="ctr"/>
-              <a:endParaRPr lang="en-US"/>
-            </a:p>
-          </p:txBody>
-        </p:sp>
-      </p:grpSp>
+          </a:ln>
+        </p:spPr>
+        <p:style>
+          <a:lnRef idx="2">
+            <a:schemeClr val="accent1">
+              <a:shade val="15000"/>
+            </a:schemeClr>
+          </a:lnRef>
+          <a:fillRef idx="1">
+            <a:schemeClr val="accent1"/>
+          </a:fillRef>
+          <a:effectRef idx="0">
+            <a:schemeClr val="accent1"/>
+          </a:effectRef>
+          <a:fontRef idx="minor">
+            <a:schemeClr val="lt1"/>
+          </a:fontRef>
+        </p:style>
+        <p:txBody>
+          <a:bodyPr rtlCol="0" anchor="ctr"/>
+          <a:lstStyle/>
+          <a:p>
+            <a:pPr algn="ctr"/>
+            <a:endParaRPr lang="en-US"/>
+          </a:p>
+        </p:txBody>
+      </p:sp>
     </p:spTree>
     <p:extLst>
       <p:ext uri="{BB962C8B-B14F-4D97-AF65-F5344CB8AC3E}">
-        <p14:creationId xmlns:p14="http://schemas.microsoft.com/office/powerpoint/2010/main" val="2113437952"/>
+        <p14:creationId xmlns:p14="http://schemas.microsoft.com/office/powerpoint/2010/main" val="2627533321"/>
+      </p:ext>
+    </p:extLst>
+  </p:cSld>
+  <p:clrMapOvr>
+    <a:masterClrMapping/>
+  </p:clrMapOvr>
+</p:sld>
+</file>
+
+<file path=ppt/slides/slide4.xml><?xml version="1.0" encoding="utf-8"?>
+<p:sld xmlns:a="http://schemas.openxmlformats.org/drawingml/2006/main" xmlns:r="http://schemas.openxmlformats.org/officeDocument/2006/relationships" xmlns:p="http://schemas.openxmlformats.org/presentationml/2006/main">
+  <p:cSld>
+    <p:spTree>
+      <p:nvGrpSpPr>
+        <p:cNvPr id="1" name="">
+          <a:extLst>
+            <a:ext uri="{FF2B5EF4-FFF2-40B4-BE49-F238E27FC236}">
+              <a16:creationId xmlns:a16="http://schemas.microsoft.com/office/drawing/2014/main" id="{AFDA15A9-46AF-C444-D983-1FBA0E6E30FA}"/>
+            </a:ext>
+          </a:extLst>
+        </p:cNvPr>
+        <p:cNvGrpSpPr/>
+        <p:nvPr/>
+      </p:nvGrpSpPr>
+      <p:grpSpPr>
+        <a:xfrm>
+          <a:off x="0" y="0"/>
+          <a:ext cx="0" cy="0"/>
+          <a:chOff x="0" y="0"/>
+          <a:chExt cx="0" cy="0"/>
+        </a:xfrm>
+      </p:grpSpPr>
+      <p:pic>
+        <p:nvPicPr>
+          <p:cNvPr id="10" name="Picture 9">
+            <a:extLst>
+              <a:ext uri="{FF2B5EF4-FFF2-40B4-BE49-F238E27FC236}">
+                <a16:creationId xmlns:a16="http://schemas.microsoft.com/office/drawing/2014/main" id="{0994901E-1F82-000E-4537-0B7D300BF267}"/>
+              </a:ext>
+            </a:extLst>
+          </p:cNvPr>
+          <p:cNvPicPr>
+            <a:picLocks noChangeAspect="1"/>
+          </p:cNvPicPr>
+          <p:nvPr/>
+        </p:nvPicPr>
+        <p:blipFill>
+          <a:blip r:embed="rId2"/>
+          <a:stretch>
+            <a:fillRect/>
+          </a:stretch>
+        </p:blipFill>
+        <p:spPr>
+          <a:xfrm>
+            <a:off x="4020843" y="215900"/>
+            <a:ext cx="469900" cy="482600"/>
+          </a:xfrm>
+          <a:prstGeom prst="rect">
+            <a:avLst/>
+          </a:prstGeom>
+        </p:spPr>
+      </p:pic>
+      <p:sp>
+        <p:nvSpPr>
+          <p:cNvPr id="9" name="Oval 8">
+            <a:extLst>
+              <a:ext uri="{FF2B5EF4-FFF2-40B4-BE49-F238E27FC236}">
+                <a16:creationId xmlns:a16="http://schemas.microsoft.com/office/drawing/2014/main" id="{64C73B5F-49AC-4ABA-E30A-20B1E68F422B}"/>
+              </a:ext>
+            </a:extLst>
+          </p:cNvPr>
+          <p:cNvSpPr>
+            <a:spLocks noChangeAspect="1"/>
+          </p:cNvSpPr>
+          <p:nvPr/>
+        </p:nvSpPr>
+        <p:spPr>
+          <a:xfrm>
+            <a:off x="3394779" y="228600"/>
+            <a:ext cx="457200" cy="457200"/>
+          </a:xfrm>
+          <a:prstGeom prst="ellipse">
+            <a:avLst/>
+          </a:prstGeom>
+          <a:solidFill>
+            <a:schemeClr val="accent4"/>
+          </a:solidFill>
+          <a:ln>
+            <a:solidFill>
+              <a:schemeClr val="bg1"/>
+            </a:solidFill>
+          </a:ln>
+        </p:spPr>
+        <p:style>
+          <a:lnRef idx="2">
+            <a:schemeClr val="accent1">
+              <a:shade val="15000"/>
+            </a:schemeClr>
+          </a:lnRef>
+          <a:fillRef idx="1">
+            <a:schemeClr val="accent1"/>
+          </a:fillRef>
+          <a:effectRef idx="0">
+            <a:schemeClr val="accent1"/>
+          </a:effectRef>
+          <a:fontRef idx="minor">
+            <a:schemeClr val="lt1"/>
+          </a:fontRef>
+        </p:style>
+        <p:txBody>
+          <a:bodyPr rtlCol="0" anchor="ctr"/>
+          <a:lstStyle/>
+          <a:p>
+            <a:pPr algn="ctr"/>
+            <a:endParaRPr lang="en-US" dirty="0"/>
+          </a:p>
+        </p:txBody>
+      </p:sp>
+      <p:sp>
+        <p:nvSpPr>
+          <p:cNvPr id="2" name="Oval 1">
+            <a:extLst>
+              <a:ext uri="{FF2B5EF4-FFF2-40B4-BE49-F238E27FC236}">
+                <a16:creationId xmlns:a16="http://schemas.microsoft.com/office/drawing/2014/main" id="{C9D4F90A-DA99-D3FE-ED25-985DDF60E899}"/>
+              </a:ext>
+            </a:extLst>
+          </p:cNvPr>
+          <p:cNvSpPr>
+            <a:spLocks noChangeAspect="1"/>
+          </p:cNvSpPr>
+          <p:nvPr/>
+        </p:nvSpPr>
+        <p:spPr>
+          <a:xfrm>
+            <a:off x="1497541" y="228600"/>
+            <a:ext cx="457200" cy="457200"/>
+          </a:xfrm>
+          <a:prstGeom prst="ellipse">
+            <a:avLst/>
+          </a:prstGeom>
+          <a:solidFill>
+            <a:schemeClr val="accent4"/>
+          </a:solidFill>
+          <a:ln>
+            <a:solidFill>
+              <a:schemeClr val="bg1"/>
+            </a:solidFill>
+          </a:ln>
+        </p:spPr>
+        <p:style>
+          <a:lnRef idx="2">
+            <a:schemeClr val="accent1">
+              <a:shade val="15000"/>
+            </a:schemeClr>
+          </a:lnRef>
+          <a:fillRef idx="1">
+            <a:schemeClr val="accent1"/>
+          </a:fillRef>
+          <a:effectRef idx="0">
+            <a:schemeClr val="accent1"/>
+          </a:effectRef>
+          <a:fontRef idx="minor">
+            <a:schemeClr val="lt1"/>
+          </a:fontRef>
+        </p:style>
+        <p:txBody>
+          <a:bodyPr rtlCol="0" anchor="ctr"/>
+          <a:lstStyle/>
+          <a:p>
+            <a:pPr algn="ctr"/>
+            <a:endParaRPr lang="en-US"/>
+          </a:p>
+        </p:txBody>
+      </p:sp>
+      <p:sp>
+        <p:nvSpPr>
+          <p:cNvPr id="3" name="Oval 2">
+            <a:extLst>
+              <a:ext uri="{FF2B5EF4-FFF2-40B4-BE49-F238E27FC236}">
+                <a16:creationId xmlns:a16="http://schemas.microsoft.com/office/drawing/2014/main" id="{EC605D0A-4CDA-B53C-F2BF-D845A54A7BC1}"/>
+              </a:ext>
+            </a:extLst>
+          </p:cNvPr>
+          <p:cNvSpPr>
+            <a:spLocks noChangeAspect="1"/>
+          </p:cNvSpPr>
+          <p:nvPr/>
+        </p:nvSpPr>
+        <p:spPr>
+          <a:xfrm>
+            <a:off x="2129954" y="228600"/>
+            <a:ext cx="457200" cy="457200"/>
+          </a:xfrm>
+          <a:prstGeom prst="ellipse">
+            <a:avLst/>
+          </a:prstGeom>
+          <a:solidFill>
+            <a:schemeClr val="accent4"/>
+          </a:solidFill>
+          <a:ln>
+            <a:solidFill>
+              <a:schemeClr val="bg1"/>
+            </a:solidFill>
+          </a:ln>
+        </p:spPr>
+        <p:style>
+          <a:lnRef idx="2">
+            <a:schemeClr val="accent1">
+              <a:shade val="15000"/>
+            </a:schemeClr>
+          </a:lnRef>
+          <a:fillRef idx="1">
+            <a:schemeClr val="accent1"/>
+          </a:fillRef>
+          <a:effectRef idx="0">
+            <a:schemeClr val="accent1"/>
+          </a:effectRef>
+          <a:fontRef idx="minor">
+            <a:schemeClr val="lt1"/>
+          </a:fontRef>
+        </p:style>
+        <p:txBody>
+          <a:bodyPr rtlCol="0" anchor="ctr"/>
+          <a:lstStyle/>
+          <a:p>
+            <a:pPr algn="ctr"/>
+            <a:endParaRPr lang="en-US"/>
+          </a:p>
+        </p:txBody>
+      </p:sp>
+      <p:sp>
+        <p:nvSpPr>
+          <p:cNvPr id="4" name="Oval 3">
+            <a:extLst>
+              <a:ext uri="{FF2B5EF4-FFF2-40B4-BE49-F238E27FC236}">
+                <a16:creationId xmlns:a16="http://schemas.microsoft.com/office/drawing/2014/main" id="{43BD11E1-2184-3B3C-E18B-3D880D4C705B}"/>
+              </a:ext>
+            </a:extLst>
+          </p:cNvPr>
+          <p:cNvSpPr>
+            <a:spLocks noChangeAspect="1"/>
+          </p:cNvSpPr>
+          <p:nvPr/>
+        </p:nvSpPr>
+        <p:spPr>
+          <a:xfrm>
+            <a:off x="2762367" y="228600"/>
+            <a:ext cx="457200" cy="457200"/>
+          </a:xfrm>
+          <a:prstGeom prst="ellipse">
+            <a:avLst/>
+          </a:prstGeom>
+          <a:solidFill>
+            <a:schemeClr val="accent4"/>
+          </a:solidFill>
+          <a:ln>
+            <a:solidFill>
+              <a:schemeClr val="bg1"/>
+            </a:solidFill>
+          </a:ln>
+        </p:spPr>
+        <p:style>
+          <a:lnRef idx="2">
+            <a:schemeClr val="accent1">
+              <a:shade val="15000"/>
+            </a:schemeClr>
+          </a:lnRef>
+          <a:fillRef idx="1">
+            <a:schemeClr val="accent1"/>
+          </a:fillRef>
+          <a:effectRef idx="0">
+            <a:schemeClr val="accent1"/>
+          </a:effectRef>
+          <a:fontRef idx="minor">
+            <a:schemeClr val="lt1"/>
+          </a:fontRef>
+        </p:style>
+        <p:txBody>
+          <a:bodyPr rtlCol="0" anchor="ctr"/>
+          <a:lstStyle/>
+          <a:p>
+            <a:pPr algn="ctr"/>
+            <a:endParaRPr lang="en-US" dirty="0"/>
+          </a:p>
+        </p:txBody>
+      </p:sp>
+      <p:sp>
+        <p:nvSpPr>
+          <p:cNvPr id="6" name="Oval 5">
+            <a:extLst>
+              <a:ext uri="{FF2B5EF4-FFF2-40B4-BE49-F238E27FC236}">
+                <a16:creationId xmlns:a16="http://schemas.microsoft.com/office/drawing/2014/main" id="{9A91A194-3212-F8A4-0CA7-4F03874D1508}"/>
+              </a:ext>
+            </a:extLst>
+          </p:cNvPr>
+          <p:cNvSpPr>
+            <a:spLocks noChangeAspect="1"/>
+          </p:cNvSpPr>
+          <p:nvPr/>
+        </p:nvSpPr>
+        <p:spPr>
+          <a:xfrm>
+            <a:off x="4660099" y="228600"/>
+            <a:ext cx="457200" cy="457200"/>
+          </a:xfrm>
+          <a:prstGeom prst="ellipse">
+            <a:avLst/>
+          </a:prstGeom>
+          <a:solidFill>
+            <a:schemeClr val="accent1"/>
+          </a:solidFill>
+          <a:ln>
+            <a:solidFill>
+              <a:schemeClr val="bg1"/>
+            </a:solidFill>
+          </a:ln>
+        </p:spPr>
+        <p:style>
+          <a:lnRef idx="2">
+            <a:schemeClr val="accent1">
+              <a:shade val="15000"/>
+            </a:schemeClr>
+          </a:lnRef>
+          <a:fillRef idx="1">
+            <a:schemeClr val="accent1"/>
+          </a:fillRef>
+          <a:effectRef idx="0">
+            <a:schemeClr val="accent1"/>
+          </a:effectRef>
+          <a:fontRef idx="minor">
+            <a:schemeClr val="lt1"/>
+          </a:fontRef>
+        </p:style>
+        <p:txBody>
+          <a:bodyPr rtlCol="0" anchor="ctr"/>
+          <a:lstStyle/>
+          <a:p>
+            <a:pPr algn="ctr"/>
+            <a:endParaRPr lang="en-US"/>
+          </a:p>
+        </p:txBody>
+      </p:sp>
+      <p:sp>
+        <p:nvSpPr>
+          <p:cNvPr id="11" name="Oval 10">
+            <a:extLst>
+              <a:ext uri="{FF2B5EF4-FFF2-40B4-BE49-F238E27FC236}">
+                <a16:creationId xmlns:a16="http://schemas.microsoft.com/office/drawing/2014/main" id="{B9F45C54-DD7E-C8B4-5252-D549DAE7E868}"/>
+              </a:ext>
+            </a:extLst>
+          </p:cNvPr>
+          <p:cNvSpPr>
+            <a:spLocks noChangeAspect="1"/>
+          </p:cNvSpPr>
+          <p:nvPr/>
+        </p:nvSpPr>
+        <p:spPr>
+          <a:xfrm>
+            <a:off x="7189259" y="228600"/>
+            <a:ext cx="457200" cy="457200"/>
+          </a:xfrm>
+          <a:prstGeom prst="ellipse">
+            <a:avLst/>
+          </a:prstGeom>
+          <a:noFill/>
+          <a:ln>
+            <a:solidFill>
+              <a:schemeClr val="bg2">
+                <a:lumMod val="90000"/>
+              </a:schemeClr>
+            </a:solidFill>
+          </a:ln>
+        </p:spPr>
+        <p:style>
+          <a:lnRef idx="2">
+            <a:schemeClr val="accent1">
+              <a:shade val="15000"/>
+            </a:schemeClr>
+          </a:lnRef>
+          <a:fillRef idx="1">
+            <a:schemeClr val="accent1"/>
+          </a:fillRef>
+          <a:effectRef idx="0">
+            <a:schemeClr val="accent1"/>
+          </a:effectRef>
+          <a:fontRef idx="minor">
+            <a:schemeClr val="lt1"/>
+          </a:fontRef>
+        </p:style>
+        <p:txBody>
+          <a:bodyPr rtlCol="0" anchor="ctr"/>
+          <a:lstStyle/>
+          <a:p>
+            <a:pPr algn="ctr"/>
+            <a:endParaRPr lang="en-US"/>
+          </a:p>
+        </p:txBody>
+      </p:sp>
+      <p:sp>
+        <p:nvSpPr>
+          <p:cNvPr id="14" name="Oval 13">
+            <a:extLst>
+              <a:ext uri="{FF2B5EF4-FFF2-40B4-BE49-F238E27FC236}">
+                <a16:creationId xmlns:a16="http://schemas.microsoft.com/office/drawing/2014/main" id="{03D6907F-E43C-4A80-0AE5-688B823867D3}"/>
+              </a:ext>
+            </a:extLst>
+          </p:cNvPr>
+          <p:cNvSpPr>
+            <a:spLocks noChangeAspect="1"/>
+          </p:cNvSpPr>
+          <p:nvPr/>
+        </p:nvSpPr>
+        <p:spPr>
+          <a:xfrm>
+            <a:off x="6556846" y="228600"/>
+            <a:ext cx="457200" cy="457200"/>
+          </a:xfrm>
+          <a:prstGeom prst="ellipse">
+            <a:avLst/>
+          </a:prstGeom>
+          <a:noFill/>
+          <a:ln>
+            <a:solidFill>
+              <a:schemeClr val="bg2">
+                <a:lumMod val="90000"/>
+              </a:schemeClr>
+            </a:solidFill>
+          </a:ln>
+        </p:spPr>
+        <p:style>
+          <a:lnRef idx="2">
+            <a:schemeClr val="accent1">
+              <a:shade val="15000"/>
+            </a:schemeClr>
+          </a:lnRef>
+          <a:fillRef idx="1">
+            <a:schemeClr val="accent1"/>
+          </a:fillRef>
+          <a:effectRef idx="0">
+            <a:schemeClr val="accent1"/>
+          </a:effectRef>
+          <a:fontRef idx="minor">
+            <a:schemeClr val="lt1"/>
+          </a:fontRef>
+        </p:style>
+        <p:txBody>
+          <a:bodyPr rtlCol="0" anchor="ctr"/>
+          <a:lstStyle/>
+          <a:p>
+            <a:pPr algn="ctr"/>
+            <a:endParaRPr lang="en-US"/>
+          </a:p>
+        </p:txBody>
+      </p:sp>
+      <p:sp>
+        <p:nvSpPr>
+          <p:cNvPr id="15" name="Oval 14">
+            <a:extLst>
+              <a:ext uri="{FF2B5EF4-FFF2-40B4-BE49-F238E27FC236}">
+                <a16:creationId xmlns:a16="http://schemas.microsoft.com/office/drawing/2014/main" id="{3F36AC7B-3D84-3ABC-55C7-A0D4590B5C77}"/>
+              </a:ext>
+            </a:extLst>
+          </p:cNvPr>
+          <p:cNvSpPr>
+            <a:spLocks noChangeAspect="1"/>
+          </p:cNvSpPr>
+          <p:nvPr/>
+        </p:nvSpPr>
+        <p:spPr>
+          <a:xfrm>
+            <a:off x="5924433" y="228600"/>
+            <a:ext cx="457200" cy="457200"/>
+          </a:xfrm>
+          <a:prstGeom prst="ellipse">
+            <a:avLst/>
+          </a:prstGeom>
+          <a:noFill/>
+          <a:ln>
+            <a:solidFill>
+              <a:schemeClr val="bg2">
+                <a:lumMod val="90000"/>
+              </a:schemeClr>
+            </a:solidFill>
+          </a:ln>
+        </p:spPr>
+        <p:style>
+          <a:lnRef idx="2">
+            <a:schemeClr val="accent1">
+              <a:shade val="15000"/>
+            </a:schemeClr>
+          </a:lnRef>
+          <a:fillRef idx="1">
+            <a:schemeClr val="accent1"/>
+          </a:fillRef>
+          <a:effectRef idx="0">
+            <a:schemeClr val="accent1"/>
+          </a:effectRef>
+          <a:fontRef idx="minor">
+            <a:schemeClr val="lt1"/>
+          </a:fontRef>
+        </p:style>
+        <p:txBody>
+          <a:bodyPr rtlCol="0" anchor="ctr"/>
+          <a:lstStyle/>
+          <a:p>
+            <a:pPr algn="ctr"/>
+            <a:endParaRPr lang="en-US"/>
+          </a:p>
+        </p:txBody>
+      </p:sp>
+      <p:sp>
+        <p:nvSpPr>
+          <p:cNvPr id="16" name="Oval 15">
+            <a:extLst>
+              <a:ext uri="{FF2B5EF4-FFF2-40B4-BE49-F238E27FC236}">
+                <a16:creationId xmlns:a16="http://schemas.microsoft.com/office/drawing/2014/main" id="{891C7881-D350-1754-4E7E-8DF6645C7131}"/>
+              </a:ext>
+            </a:extLst>
+          </p:cNvPr>
+          <p:cNvSpPr>
+            <a:spLocks noChangeAspect="1"/>
+          </p:cNvSpPr>
+          <p:nvPr/>
+        </p:nvSpPr>
+        <p:spPr>
+          <a:xfrm>
+            <a:off x="5298369" y="228600"/>
+            <a:ext cx="457200" cy="457200"/>
+          </a:xfrm>
+          <a:prstGeom prst="ellipse">
+            <a:avLst/>
+          </a:prstGeom>
+          <a:noFill/>
+          <a:ln>
+            <a:solidFill>
+              <a:schemeClr val="bg2">
+                <a:lumMod val="90000"/>
+              </a:schemeClr>
+            </a:solidFill>
+          </a:ln>
+        </p:spPr>
+        <p:style>
+          <a:lnRef idx="2">
+            <a:schemeClr val="accent1">
+              <a:shade val="15000"/>
+            </a:schemeClr>
+          </a:lnRef>
+          <a:fillRef idx="1">
+            <a:schemeClr val="accent1"/>
+          </a:fillRef>
+          <a:effectRef idx="0">
+            <a:schemeClr val="accent1"/>
+          </a:effectRef>
+          <a:fontRef idx="minor">
+            <a:schemeClr val="lt1"/>
+          </a:fontRef>
+        </p:style>
+        <p:txBody>
+          <a:bodyPr rtlCol="0" anchor="ctr"/>
+          <a:lstStyle/>
+          <a:p>
+            <a:pPr algn="ctr"/>
+            <a:endParaRPr lang="en-US"/>
+          </a:p>
+        </p:txBody>
+      </p:sp>
+    </p:spTree>
+    <p:extLst>
+      <p:ext uri="{BB962C8B-B14F-4D97-AF65-F5344CB8AC3E}">
+        <p14:creationId xmlns:p14="http://schemas.microsoft.com/office/powerpoint/2010/main" val="1063829774"/>
+      </p:ext>
+    </p:extLst>
+  </p:cSld>
+  <p:clrMapOvr>
+    <a:masterClrMapping/>
+  </p:clrMapOvr>
+</p:sld>
+</file>
+
+<file path=ppt/slides/slide5.xml><?xml version="1.0" encoding="utf-8"?>
+<p:sld xmlns:a="http://schemas.openxmlformats.org/drawingml/2006/main" xmlns:r="http://schemas.openxmlformats.org/officeDocument/2006/relationships" xmlns:p="http://schemas.openxmlformats.org/presentationml/2006/main">
+  <p:cSld>
+    <p:spTree>
+      <p:nvGrpSpPr>
+        <p:cNvPr id="1" name="">
+          <a:extLst>
+            <a:ext uri="{FF2B5EF4-FFF2-40B4-BE49-F238E27FC236}">
+              <a16:creationId xmlns:a16="http://schemas.microsoft.com/office/drawing/2014/main" id="{2BCFF462-6D02-ABD8-D0F0-F6D66A08B2DA}"/>
+            </a:ext>
+          </a:extLst>
+        </p:cNvPr>
+        <p:cNvGrpSpPr/>
+        <p:nvPr/>
+      </p:nvGrpSpPr>
+      <p:grpSpPr>
+        <a:xfrm>
+          <a:off x="0" y="0"/>
+          <a:ext cx="0" cy="0"/>
+          <a:chOff x="0" y="0"/>
+          <a:chExt cx="0" cy="0"/>
+        </a:xfrm>
+      </p:grpSpPr>
+      <p:sp>
+        <p:nvSpPr>
+          <p:cNvPr id="9" name="Oval 8">
+            <a:extLst>
+              <a:ext uri="{FF2B5EF4-FFF2-40B4-BE49-F238E27FC236}">
+                <a16:creationId xmlns:a16="http://schemas.microsoft.com/office/drawing/2014/main" id="{3C4668FD-4F71-6CC5-6CD4-0E63638C0EE0}"/>
+              </a:ext>
+            </a:extLst>
+          </p:cNvPr>
+          <p:cNvSpPr>
+            <a:spLocks noChangeAspect="1"/>
+          </p:cNvSpPr>
+          <p:nvPr/>
+        </p:nvSpPr>
+        <p:spPr>
+          <a:xfrm>
+            <a:off x="7189258" y="229969"/>
+            <a:ext cx="457200" cy="457200"/>
+          </a:xfrm>
+          <a:prstGeom prst="ellipse">
+            <a:avLst/>
+          </a:prstGeom>
+          <a:solidFill>
+            <a:schemeClr val="accent1"/>
+          </a:solidFill>
+          <a:ln>
+            <a:solidFill>
+              <a:schemeClr val="bg1"/>
+            </a:solidFill>
+          </a:ln>
+        </p:spPr>
+        <p:style>
+          <a:lnRef idx="2">
+            <a:schemeClr val="accent1">
+              <a:shade val="15000"/>
+            </a:schemeClr>
+          </a:lnRef>
+          <a:fillRef idx="1">
+            <a:schemeClr val="accent1"/>
+          </a:fillRef>
+          <a:effectRef idx="0">
+            <a:schemeClr val="accent1"/>
+          </a:effectRef>
+          <a:fontRef idx="minor">
+            <a:schemeClr val="lt1"/>
+          </a:fontRef>
+        </p:style>
+        <p:txBody>
+          <a:bodyPr rtlCol="0" anchor="ctr"/>
+          <a:lstStyle/>
+          <a:p>
+            <a:pPr algn="ctr"/>
+            <a:endParaRPr lang="en-US"/>
+          </a:p>
+        </p:txBody>
+      </p:sp>
+      <p:pic>
+        <p:nvPicPr>
+          <p:cNvPr id="12" name="Picture 11">
+            <a:extLst>
+              <a:ext uri="{FF2B5EF4-FFF2-40B4-BE49-F238E27FC236}">
+                <a16:creationId xmlns:a16="http://schemas.microsoft.com/office/drawing/2014/main" id="{F7EAADBF-EC0C-74D8-87C2-68A127CEA18C}"/>
+              </a:ext>
+            </a:extLst>
+          </p:cNvPr>
+          <p:cNvPicPr>
+            <a:picLocks noChangeAspect="1"/>
+          </p:cNvPicPr>
+          <p:nvPr/>
+        </p:nvPicPr>
+        <p:blipFill>
+          <a:blip r:embed="rId2"/>
+          <a:stretch>
+            <a:fillRect/>
+          </a:stretch>
+        </p:blipFill>
+        <p:spPr>
+          <a:xfrm>
+            <a:off x="4014493" y="215900"/>
+            <a:ext cx="469900" cy="482600"/>
+          </a:xfrm>
+          <a:prstGeom prst="rect">
+            <a:avLst/>
+          </a:prstGeom>
+        </p:spPr>
+      </p:pic>
+      <p:pic>
+        <p:nvPicPr>
+          <p:cNvPr id="13" name="Picture 12">
+            <a:extLst>
+              <a:ext uri="{FF2B5EF4-FFF2-40B4-BE49-F238E27FC236}">
+                <a16:creationId xmlns:a16="http://schemas.microsoft.com/office/drawing/2014/main" id="{E5F3D737-C6CB-505A-E68E-601109EBF26F}"/>
+              </a:ext>
+            </a:extLst>
+          </p:cNvPr>
+          <p:cNvPicPr>
+            <a:picLocks noChangeAspect="1"/>
+          </p:cNvPicPr>
+          <p:nvPr/>
+        </p:nvPicPr>
+        <p:blipFill>
+          <a:blip r:embed="rId2"/>
+          <a:stretch>
+            <a:fillRect/>
+          </a:stretch>
+        </p:blipFill>
+        <p:spPr>
+          <a:xfrm>
+            <a:off x="3394780" y="215900"/>
+            <a:ext cx="469900" cy="482600"/>
+          </a:xfrm>
+          <a:prstGeom prst="rect">
+            <a:avLst/>
+          </a:prstGeom>
+        </p:spPr>
+      </p:pic>
+      <p:sp>
+        <p:nvSpPr>
+          <p:cNvPr id="2" name="Oval 1">
+            <a:extLst>
+              <a:ext uri="{FF2B5EF4-FFF2-40B4-BE49-F238E27FC236}">
+                <a16:creationId xmlns:a16="http://schemas.microsoft.com/office/drawing/2014/main" id="{FCAE959D-F221-53F0-3CE8-5CC2A733840B}"/>
+              </a:ext>
+            </a:extLst>
+          </p:cNvPr>
+          <p:cNvSpPr>
+            <a:spLocks noChangeAspect="1"/>
+          </p:cNvSpPr>
+          <p:nvPr/>
+        </p:nvSpPr>
+        <p:spPr>
+          <a:xfrm>
+            <a:off x="1497541" y="228600"/>
+            <a:ext cx="457200" cy="457200"/>
+          </a:xfrm>
+          <a:prstGeom prst="ellipse">
+            <a:avLst/>
+          </a:prstGeom>
+          <a:solidFill>
+            <a:schemeClr val="accent4"/>
+          </a:solidFill>
+          <a:ln>
+            <a:solidFill>
+              <a:schemeClr val="bg1"/>
+            </a:solidFill>
+          </a:ln>
+        </p:spPr>
+        <p:style>
+          <a:lnRef idx="2">
+            <a:schemeClr val="accent1">
+              <a:shade val="15000"/>
+            </a:schemeClr>
+          </a:lnRef>
+          <a:fillRef idx="1">
+            <a:schemeClr val="accent1"/>
+          </a:fillRef>
+          <a:effectRef idx="0">
+            <a:schemeClr val="accent1"/>
+          </a:effectRef>
+          <a:fontRef idx="minor">
+            <a:schemeClr val="lt1"/>
+          </a:fontRef>
+        </p:style>
+        <p:txBody>
+          <a:bodyPr rtlCol="0" anchor="ctr"/>
+          <a:lstStyle/>
+          <a:p>
+            <a:pPr algn="ctr"/>
+            <a:endParaRPr lang="en-US"/>
+          </a:p>
+        </p:txBody>
+      </p:sp>
+      <p:sp>
+        <p:nvSpPr>
+          <p:cNvPr id="3" name="Oval 2">
+            <a:extLst>
+              <a:ext uri="{FF2B5EF4-FFF2-40B4-BE49-F238E27FC236}">
+                <a16:creationId xmlns:a16="http://schemas.microsoft.com/office/drawing/2014/main" id="{21D186A7-05B9-6779-A193-9A0B698BA647}"/>
+              </a:ext>
+            </a:extLst>
+          </p:cNvPr>
+          <p:cNvSpPr>
+            <a:spLocks noChangeAspect="1"/>
+          </p:cNvSpPr>
+          <p:nvPr/>
+        </p:nvSpPr>
+        <p:spPr>
+          <a:xfrm>
+            <a:off x="2129954" y="228600"/>
+            <a:ext cx="457200" cy="457200"/>
+          </a:xfrm>
+          <a:prstGeom prst="ellipse">
+            <a:avLst/>
+          </a:prstGeom>
+          <a:solidFill>
+            <a:schemeClr val="accent4"/>
+          </a:solidFill>
+          <a:ln>
+            <a:solidFill>
+              <a:schemeClr val="bg1"/>
+            </a:solidFill>
+          </a:ln>
+        </p:spPr>
+        <p:style>
+          <a:lnRef idx="2">
+            <a:schemeClr val="accent1">
+              <a:shade val="15000"/>
+            </a:schemeClr>
+          </a:lnRef>
+          <a:fillRef idx="1">
+            <a:schemeClr val="accent1"/>
+          </a:fillRef>
+          <a:effectRef idx="0">
+            <a:schemeClr val="accent1"/>
+          </a:effectRef>
+          <a:fontRef idx="minor">
+            <a:schemeClr val="lt1"/>
+          </a:fontRef>
+        </p:style>
+        <p:txBody>
+          <a:bodyPr rtlCol="0" anchor="ctr"/>
+          <a:lstStyle/>
+          <a:p>
+            <a:pPr algn="ctr"/>
+            <a:endParaRPr lang="en-US"/>
+          </a:p>
+        </p:txBody>
+      </p:sp>
+      <p:sp>
+        <p:nvSpPr>
+          <p:cNvPr id="4" name="Oval 3">
+            <a:extLst>
+              <a:ext uri="{FF2B5EF4-FFF2-40B4-BE49-F238E27FC236}">
+                <a16:creationId xmlns:a16="http://schemas.microsoft.com/office/drawing/2014/main" id="{3B5536C3-E99E-21BB-3909-2A971A399500}"/>
+              </a:ext>
+            </a:extLst>
+          </p:cNvPr>
+          <p:cNvSpPr>
+            <a:spLocks noChangeAspect="1"/>
+          </p:cNvSpPr>
+          <p:nvPr/>
+        </p:nvSpPr>
+        <p:spPr>
+          <a:xfrm>
+            <a:off x="2762367" y="228600"/>
+            <a:ext cx="457200" cy="457200"/>
+          </a:xfrm>
+          <a:prstGeom prst="ellipse">
+            <a:avLst/>
+          </a:prstGeom>
+          <a:solidFill>
+            <a:schemeClr val="accent4"/>
+          </a:solidFill>
+          <a:ln>
+            <a:solidFill>
+              <a:schemeClr val="bg1"/>
+            </a:solidFill>
+          </a:ln>
+        </p:spPr>
+        <p:style>
+          <a:lnRef idx="2">
+            <a:schemeClr val="accent1">
+              <a:shade val="15000"/>
+            </a:schemeClr>
+          </a:lnRef>
+          <a:fillRef idx="1">
+            <a:schemeClr val="accent1"/>
+          </a:fillRef>
+          <a:effectRef idx="0">
+            <a:schemeClr val="accent1"/>
+          </a:effectRef>
+          <a:fontRef idx="minor">
+            <a:schemeClr val="lt1"/>
+          </a:fontRef>
+        </p:style>
+        <p:txBody>
+          <a:bodyPr rtlCol="0" anchor="ctr"/>
+          <a:lstStyle/>
+          <a:p>
+            <a:pPr algn="ctr"/>
+            <a:endParaRPr lang="en-US" dirty="0"/>
+          </a:p>
+        </p:txBody>
+      </p:sp>
+      <p:sp>
+        <p:nvSpPr>
+          <p:cNvPr id="5" name="Oval 4">
+            <a:extLst>
+              <a:ext uri="{FF2B5EF4-FFF2-40B4-BE49-F238E27FC236}">
+                <a16:creationId xmlns:a16="http://schemas.microsoft.com/office/drawing/2014/main" id="{7FCE81F4-3A2B-506D-7302-FEE14B771576}"/>
+              </a:ext>
+            </a:extLst>
+          </p:cNvPr>
+          <p:cNvSpPr>
+            <a:spLocks noChangeAspect="1"/>
+          </p:cNvSpPr>
+          <p:nvPr/>
+        </p:nvSpPr>
+        <p:spPr>
+          <a:xfrm>
+            <a:off x="4659606" y="228600"/>
+            <a:ext cx="457200" cy="457200"/>
+          </a:xfrm>
+          <a:prstGeom prst="ellipse">
+            <a:avLst/>
+          </a:prstGeom>
+          <a:solidFill>
+            <a:schemeClr val="accent1"/>
+          </a:solidFill>
+          <a:ln>
+            <a:solidFill>
+              <a:schemeClr val="bg1"/>
+            </a:solidFill>
+          </a:ln>
+        </p:spPr>
+        <p:style>
+          <a:lnRef idx="2">
+            <a:schemeClr val="accent1">
+              <a:shade val="15000"/>
+            </a:schemeClr>
+          </a:lnRef>
+          <a:fillRef idx="1">
+            <a:schemeClr val="accent1"/>
+          </a:fillRef>
+          <a:effectRef idx="0">
+            <a:schemeClr val="accent1"/>
+          </a:effectRef>
+          <a:fontRef idx="minor">
+            <a:schemeClr val="lt1"/>
+          </a:fontRef>
+        </p:style>
+        <p:txBody>
+          <a:bodyPr rtlCol="0" anchor="ctr"/>
+          <a:lstStyle/>
+          <a:p>
+            <a:pPr algn="ctr"/>
+            <a:endParaRPr lang="en-US"/>
+          </a:p>
+        </p:txBody>
+      </p:sp>
+      <p:sp>
+        <p:nvSpPr>
+          <p:cNvPr id="6" name="Oval 5">
+            <a:extLst>
+              <a:ext uri="{FF2B5EF4-FFF2-40B4-BE49-F238E27FC236}">
+                <a16:creationId xmlns:a16="http://schemas.microsoft.com/office/drawing/2014/main" id="{CB5F98B9-3190-CDD7-A5A6-4374FDEEF975}"/>
+              </a:ext>
+            </a:extLst>
+          </p:cNvPr>
+          <p:cNvSpPr>
+            <a:spLocks noChangeAspect="1"/>
+          </p:cNvSpPr>
+          <p:nvPr/>
+        </p:nvSpPr>
+        <p:spPr>
+          <a:xfrm>
+            <a:off x="5292019" y="228600"/>
+            <a:ext cx="457200" cy="457200"/>
+          </a:xfrm>
+          <a:prstGeom prst="ellipse">
+            <a:avLst/>
+          </a:prstGeom>
+          <a:solidFill>
+            <a:schemeClr val="accent1"/>
+          </a:solidFill>
+          <a:ln>
+            <a:solidFill>
+              <a:schemeClr val="bg1"/>
+            </a:solidFill>
+          </a:ln>
+        </p:spPr>
+        <p:style>
+          <a:lnRef idx="2">
+            <a:schemeClr val="accent1">
+              <a:shade val="15000"/>
+            </a:schemeClr>
+          </a:lnRef>
+          <a:fillRef idx="1">
+            <a:schemeClr val="accent1"/>
+          </a:fillRef>
+          <a:effectRef idx="0">
+            <a:schemeClr val="accent1"/>
+          </a:effectRef>
+          <a:fontRef idx="minor">
+            <a:schemeClr val="lt1"/>
+          </a:fontRef>
+        </p:style>
+        <p:txBody>
+          <a:bodyPr rtlCol="0" anchor="ctr"/>
+          <a:lstStyle/>
+          <a:p>
+            <a:pPr algn="ctr"/>
+            <a:endParaRPr lang="en-US"/>
+          </a:p>
+        </p:txBody>
+      </p:sp>
+      <p:sp>
+        <p:nvSpPr>
+          <p:cNvPr id="7" name="Oval 6">
+            <a:extLst>
+              <a:ext uri="{FF2B5EF4-FFF2-40B4-BE49-F238E27FC236}">
+                <a16:creationId xmlns:a16="http://schemas.microsoft.com/office/drawing/2014/main" id="{C92DDD63-5FF6-7614-9303-1DD5F11CD790}"/>
+              </a:ext>
+            </a:extLst>
+          </p:cNvPr>
+          <p:cNvSpPr>
+            <a:spLocks noChangeAspect="1"/>
+          </p:cNvSpPr>
+          <p:nvPr/>
+        </p:nvSpPr>
+        <p:spPr>
+          <a:xfrm>
+            <a:off x="5924432" y="228600"/>
+            <a:ext cx="457200" cy="457200"/>
+          </a:xfrm>
+          <a:prstGeom prst="ellipse">
+            <a:avLst/>
+          </a:prstGeom>
+          <a:solidFill>
+            <a:schemeClr val="accent1"/>
+          </a:solidFill>
+          <a:ln>
+            <a:solidFill>
+              <a:schemeClr val="bg1"/>
+            </a:solidFill>
+          </a:ln>
+        </p:spPr>
+        <p:style>
+          <a:lnRef idx="2">
+            <a:schemeClr val="accent1">
+              <a:shade val="15000"/>
+            </a:schemeClr>
+          </a:lnRef>
+          <a:fillRef idx="1">
+            <a:schemeClr val="accent1"/>
+          </a:fillRef>
+          <a:effectRef idx="0">
+            <a:schemeClr val="accent1"/>
+          </a:effectRef>
+          <a:fontRef idx="minor">
+            <a:schemeClr val="lt1"/>
+          </a:fontRef>
+        </p:style>
+        <p:txBody>
+          <a:bodyPr rtlCol="0" anchor="ctr"/>
+          <a:lstStyle/>
+          <a:p>
+            <a:pPr algn="ctr"/>
+            <a:endParaRPr lang="en-US"/>
+          </a:p>
+        </p:txBody>
+      </p:sp>
+      <p:sp>
+        <p:nvSpPr>
+          <p:cNvPr id="8" name="Oval 7">
+            <a:extLst>
+              <a:ext uri="{FF2B5EF4-FFF2-40B4-BE49-F238E27FC236}">
+                <a16:creationId xmlns:a16="http://schemas.microsoft.com/office/drawing/2014/main" id="{36363076-DFAC-B84C-2529-468D426CDEFF}"/>
+              </a:ext>
+            </a:extLst>
+          </p:cNvPr>
+          <p:cNvSpPr>
+            <a:spLocks noChangeAspect="1"/>
+          </p:cNvSpPr>
+          <p:nvPr/>
+        </p:nvSpPr>
+        <p:spPr>
+          <a:xfrm>
+            <a:off x="6556845" y="228600"/>
+            <a:ext cx="457200" cy="457200"/>
+          </a:xfrm>
+          <a:prstGeom prst="ellipse">
+            <a:avLst/>
+          </a:prstGeom>
+          <a:solidFill>
+            <a:schemeClr val="accent1"/>
+          </a:solidFill>
+          <a:ln>
+            <a:solidFill>
+              <a:schemeClr val="bg1"/>
+            </a:solidFill>
+          </a:ln>
+        </p:spPr>
+        <p:style>
+          <a:lnRef idx="2">
+            <a:schemeClr val="accent1">
+              <a:shade val="15000"/>
+            </a:schemeClr>
+          </a:lnRef>
+          <a:fillRef idx="1">
+            <a:schemeClr val="accent1"/>
+          </a:fillRef>
+          <a:effectRef idx="0">
+            <a:schemeClr val="accent1"/>
+          </a:effectRef>
+          <a:fontRef idx="minor">
+            <a:schemeClr val="lt1"/>
+          </a:fontRef>
+        </p:style>
+        <p:txBody>
+          <a:bodyPr rtlCol="0" anchor="ctr"/>
+          <a:lstStyle/>
+          <a:p>
+            <a:pPr algn="ctr"/>
+            <a:endParaRPr lang="en-US"/>
+          </a:p>
+        </p:txBody>
+      </p:sp>
+    </p:spTree>
+    <p:extLst>
+      <p:ext uri="{BB962C8B-B14F-4D97-AF65-F5344CB8AC3E}">
+        <p14:creationId xmlns:p14="http://schemas.microsoft.com/office/powerpoint/2010/main" val="3331756550"/>
+      </p:ext>
+    </p:extLst>
+  </p:cSld>
+  <p:clrMapOvr>
+    <a:masterClrMapping/>
+  </p:clrMapOvr>
+</p:sld>
+</file>
+
+<file path=ppt/slides/slide6.xml><?xml version="1.0" encoding="utf-8"?>
+<p:sld xmlns:a="http://schemas.openxmlformats.org/drawingml/2006/main" xmlns:r="http://schemas.openxmlformats.org/officeDocument/2006/relationships" xmlns:p="http://schemas.openxmlformats.org/presentationml/2006/main">
+  <p:cSld>
+    <p:spTree>
+      <p:nvGrpSpPr>
+        <p:cNvPr id="1" name="">
+          <a:extLst>
+            <a:ext uri="{FF2B5EF4-FFF2-40B4-BE49-F238E27FC236}">
+              <a16:creationId xmlns:a16="http://schemas.microsoft.com/office/drawing/2014/main" id="{E3AE5EF0-E930-35D7-0CFB-244465FB42A7}"/>
+            </a:ext>
+          </a:extLst>
+        </p:cNvPr>
+        <p:cNvGrpSpPr/>
+        <p:nvPr/>
+      </p:nvGrpSpPr>
+      <p:grpSpPr>
+        <a:xfrm>
+          <a:off x="0" y="0"/>
+          <a:ext cx="0" cy="0"/>
+          <a:chOff x="0" y="0"/>
+          <a:chExt cx="0" cy="0"/>
+        </a:xfrm>
+      </p:grpSpPr>
+      <p:sp>
+        <p:nvSpPr>
+          <p:cNvPr id="14" name="Oval 13">
+            <a:extLst>
+              <a:ext uri="{FF2B5EF4-FFF2-40B4-BE49-F238E27FC236}">
+                <a16:creationId xmlns:a16="http://schemas.microsoft.com/office/drawing/2014/main" id="{47900B81-F698-873B-5E47-423B8E56884D}"/>
+              </a:ext>
+            </a:extLst>
+          </p:cNvPr>
+          <p:cNvSpPr>
+            <a:spLocks noChangeAspect="1"/>
+          </p:cNvSpPr>
+          <p:nvPr/>
+        </p:nvSpPr>
+        <p:spPr>
+          <a:xfrm>
+            <a:off x="4020843" y="228600"/>
+            <a:ext cx="457200" cy="457200"/>
+          </a:xfrm>
+          <a:prstGeom prst="ellipse">
+            <a:avLst/>
+          </a:prstGeom>
+          <a:solidFill>
+            <a:schemeClr val="accent1"/>
+          </a:solidFill>
+          <a:ln>
+            <a:solidFill>
+              <a:schemeClr val="bg1"/>
+            </a:solidFill>
+          </a:ln>
+        </p:spPr>
+        <p:style>
+          <a:lnRef idx="2">
+            <a:schemeClr val="accent1">
+              <a:shade val="15000"/>
+            </a:schemeClr>
+          </a:lnRef>
+          <a:fillRef idx="1">
+            <a:schemeClr val="accent1"/>
+          </a:fillRef>
+          <a:effectRef idx="0">
+            <a:schemeClr val="accent1"/>
+          </a:effectRef>
+          <a:fontRef idx="minor">
+            <a:schemeClr val="lt1"/>
+          </a:fontRef>
+        </p:style>
+        <p:txBody>
+          <a:bodyPr rtlCol="0" anchor="ctr"/>
+          <a:lstStyle/>
+          <a:p>
+            <a:pPr algn="ctr"/>
+            <a:endParaRPr lang="en-US"/>
+          </a:p>
+        </p:txBody>
+      </p:sp>
+      <p:sp>
+        <p:nvSpPr>
+          <p:cNvPr id="10" name="Oval 9">
+            <a:extLst>
+              <a:ext uri="{FF2B5EF4-FFF2-40B4-BE49-F238E27FC236}">
+                <a16:creationId xmlns:a16="http://schemas.microsoft.com/office/drawing/2014/main" id="{30DB1858-50C9-FE22-81D9-D906AFEB31EC}"/>
+              </a:ext>
+            </a:extLst>
+          </p:cNvPr>
+          <p:cNvSpPr>
+            <a:spLocks noChangeAspect="1"/>
+          </p:cNvSpPr>
+          <p:nvPr/>
+        </p:nvSpPr>
+        <p:spPr>
+          <a:xfrm>
+            <a:off x="3401130" y="228600"/>
+            <a:ext cx="457200" cy="457200"/>
+          </a:xfrm>
+          <a:prstGeom prst="ellipse">
+            <a:avLst/>
+          </a:prstGeom>
+          <a:solidFill>
+            <a:schemeClr val="accent1"/>
+          </a:solidFill>
+          <a:ln>
+            <a:solidFill>
+              <a:schemeClr val="bg1"/>
+            </a:solidFill>
+          </a:ln>
+        </p:spPr>
+        <p:style>
+          <a:lnRef idx="2">
+            <a:schemeClr val="accent1">
+              <a:shade val="15000"/>
+            </a:schemeClr>
+          </a:lnRef>
+          <a:fillRef idx="1">
+            <a:schemeClr val="accent1"/>
+          </a:fillRef>
+          <a:effectRef idx="0">
+            <a:schemeClr val="accent1"/>
+          </a:effectRef>
+          <a:fontRef idx="minor">
+            <a:schemeClr val="lt1"/>
+          </a:fontRef>
+        </p:style>
+        <p:txBody>
+          <a:bodyPr rtlCol="0" anchor="ctr"/>
+          <a:lstStyle/>
+          <a:p>
+            <a:pPr algn="ctr"/>
+            <a:endParaRPr lang="en-US" dirty="0"/>
+          </a:p>
+        </p:txBody>
+      </p:sp>
+      <p:sp>
+        <p:nvSpPr>
+          <p:cNvPr id="9" name="Oval 8">
+            <a:extLst>
+              <a:ext uri="{FF2B5EF4-FFF2-40B4-BE49-F238E27FC236}">
+                <a16:creationId xmlns:a16="http://schemas.microsoft.com/office/drawing/2014/main" id="{4E8A1D61-826F-D984-345F-60F1B9BBA3CE}"/>
+              </a:ext>
+            </a:extLst>
+          </p:cNvPr>
+          <p:cNvSpPr>
+            <a:spLocks noChangeAspect="1"/>
+          </p:cNvSpPr>
+          <p:nvPr/>
+        </p:nvSpPr>
+        <p:spPr>
+          <a:xfrm>
+            <a:off x="7189258" y="229969"/>
+            <a:ext cx="457200" cy="457200"/>
+          </a:xfrm>
+          <a:prstGeom prst="ellipse">
+            <a:avLst/>
+          </a:prstGeom>
+          <a:solidFill>
+            <a:schemeClr val="accent1"/>
+          </a:solidFill>
+          <a:ln>
+            <a:solidFill>
+              <a:schemeClr val="bg1"/>
+            </a:solidFill>
+          </a:ln>
+        </p:spPr>
+        <p:style>
+          <a:lnRef idx="2">
+            <a:schemeClr val="accent1">
+              <a:shade val="15000"/>
+            </a:schemeClr>
+          </a:lnRef>
+          <a:fillRef idx="1">
+            <a:schemeClr val="accent1"/>
+          </a:fillRef>
+          <a:effectRef idx="0">
+            <a:schemeClr val="accent1"/>
+          </a:effectRef>
+          <a:fontRef idx="minor">
+            <a:schemeClr val="lt1"/>
+          </a:fontRef>
+        </p:style>
+        <p:txBody>
+          <a:bodyPr rtlCol="0" anchor="ctr"/>
+          <a:lstStyle/>
+          <a:p>
+            <a:pPr algn="ctr"/>
+            <a:endParaRPr lang="en-US"/>
+          </a:p>
+        </p:txBody>
+      </p:sp>
+      <p:sp>
+        <p:nvSpPr>
+          <p:cNvPr id="2" name="Oval 1">
+            <a:extLst>
+              <a:ext uri="{FF2B5EF4-FFF2-40B4-BE49-F238E27FC236}">
+                <a16:creationId xmlns:a16="http://schemas.microsoft.com/office/drawing/2014/main" id="{AE99F2E1-DAAA-F63E-5A3A-D7AE592921CD}"/>
+              </a:ext>
+            </a:extLst>
+          </p:cNvPr>
+          <p:cNvSpPr>
+            <a:spLocks noChangeAspect="1"/>
+          </p:cNvSpPr>
+          <p:nvPr/>
+        </p:nvSpPr>
+        <p:spPr>
+          <a:xfrm>
+            <a:off x="1497541" y="228600"/>
+            <a:ext cx="457200" cy="457200"/>
+          </a:xfrm>
+          <a:prstGeom prst="ellipse">
+            <a:avLst/>
+          </a:prstGeom>
+          <a:solidFill>
+            <a:schemeClr val="accent4"/>
+          </a:solidFill>
+          <a:ln>
+            <a:solidFill>
+              <a:schemeClr val="bg1"/>
+            </a:solidFill>
+          </a:ln>
+        </p:spPr>
+        <p:style>
+          <a:lnRef idx="2">
+            <a:schemeClr val="accent1">
+              <a:shade val="15000"/>
+            </a:schemeClr>
+          </a:lnRef>
+          <a:fillRef idx="1">
+            <a:schemeClr val="accent1"/>
+          </a:fillRef>
+          <a:effectRef idx="0">
+            <a:schemeClr val="accent1"/>
+          </a:effectRef>
+          <a:fontRef idx="minor">
+            <a:schemeClr val="lt1"/>
+          </a:fontRef>
+        </p:style>
+        <p:txBody>
+          <a:bodyPr rtlCol="0" anchor="ctr"/>
+          <a:lstStyle/>
+          <a:p>
+            <a:pPr algn="ctr"/>
+            <a:endParaRPr lang="en-US"/>
+          </a:p>
+        </p:txBody>
+      </p:sp>
+      <p:sp>
+        <p:nvSpPr>
+          <p:cNvPr id="3" name="Oval 2">
+            <a:extLst>
+              <a:ext uri="{FF2B5EF4-FFF2-40B4-BE49-F238E27FC236}">
+                <a16:creationId xmlns:a16="http://schemas.microsoft.com/office/drawing/2014/main" id="{29FC8C44-4630-3654-E59A-46F0E3BD55B2}"/>
+              </a:ext>
+            </a:extLst>
+          </p:cNvPr>
+          <p:cNvSpPr>
+            <a:spLocks noChangeAspect="1"/>
+          </p:cNvSpPr>
+          <p:nvPr/>
+        </p:nvSpPr>
+        <p:spPr>
+          <a:xfrm>
+            <a:off x="2129954" y="228600"/>
+            <a:ext cx="457200" cy="457200"/>
+          </a:xfrm>
+          <a:prstGeom prst="ellipse">
+            <a:avLst/>
+          </a:prstGeom>
+          <a:solidFill>
+            <a:schemeClr val="accent4"/>
+          </a:solidFill>
+          <a:ln>
+            <a:solidFill>
+              <a:schemeClr val="bg1"/>
+            </a:solidFill>
+          </a:ln>
+        </p:spPr>
+        <p:style>
+          <a:lnRef idx="2">
+            <a:schemeClr val="accent1">
+              <a:shade val="15000"/>
+            </a:schemeClr>
+          </a:lnRef>
+          <a:fillRef idx="1">
+            <a:schemeClr val="accent1"/>
+          </a:fillRef>
+          <a:effectRef idx="0">
+            <a:schemeClr val="accent1"/>
+          </a:effectRef>
+          <a:fontRef idx="minor">
+            <a:schemeClr val="lt1"/>
+          </a:fontRef>
+        </p:style>
+        <p:txBody>
+          <a:bodyPr rtlCol="0" anchor="ctr"/>
+          <a:lstStyle/>
+          <a:p>
+            <a:pPr algn="ctr"/>
+            <a:endParaRPr lang="en-US"/>
+          </a:p>
+        </p:txBody>
+      </p:sp>
+      <p:sp>
+        <p:nvSpPr>
+          <p:cNvPr id="4" name="Oval 3">
+            <a:extLst>
+              <a:ext uri="{FF2B5EF4-FFF2-40B4-BE49-F238E27FC236}">
+                <a16:creationId xmlns:a16="http://schemas.microsoft.com/office/drawing/2014/main" id="{EF37E217-9081-6B09-F8BB-7985ACC5BC6E}"/>
+              </a:ext>
+            </a:extLst>
+          </p:cNvPr>
+          <p:cNvSpPr>
+            <a:spLocks noChangeAspect="1"/>
+          </p:cNvSpPr>
+          <p:nvPr/>
+        </p:nvSpPr>
+        <p:spPr>
+          <a:xfrm>
+            <a:off x="2762367" y="228600"/>
+            <a:ext cx="457200" cy="457200"/>
+          </a:xfrm>
+          <a:prstGeom prst="ellipse">
+            <a:avLst/>
+          </a:prstGeom>
+          <a:solidFill>
+            <a:schemeClr val="accent4"/>
+          </a:solidFill>
+          <a:ln>
+            <a:solidFill>
+              <a:schemeClr val="bg1"/>
+            </a:solidFill>
+          </a:ln>
+        </p:spPr>
+        <p:style>
+          <a:lnRef idx="2">
+            <a:schemeClr val="accent1">
+              <a:shade val="15000"/>
+            </a:schemeClr>
+          </a:lnRef>
+          <a:fillRef idx="1">
+            <a:schemeClr val="accent1"/>
+          </a:fillRef>
+          <a:effectRef idx="0">
+            <a:schemeClr val="accent1"/>
+          </a:effectRef>
+          <a:fontRef idx="minor">
+            <a:schemeClr val="lt1"/>
+          </a:fontRef>
+        </p:style>
+        <p:txBody>
+          <a:bodyPr rtlCol="0" anchor="ctr"/>
+          <a:lstStyle/>
+          <a:p>
+            <a:pPr algn="ctr"/>
+            <a:endParaRPr lang="en-US" dirty="0"/>
+          </a:p>
+        </p:txBody>
+      </p:sp>
+      <p:sp>
+        <p:nvSpPr>
+          <p:cNvPr id="5" name="Oval 4">
+            <a:extLst>
+              <a:ext uri="{FF2B5EF4-FFF2-40B4-BE49-F238E27FC236}">
+                <a16:creationId xmlns:a16="http://schemas.microsoft.com/office/drawing/2014/main" id="{682F8661-DAA4-8CA7-D8C5-0284829D501F}"/>
+              </a:ext>
+            </a:extLst>
+          </p:cNvPr>
+          <p:cNvSpPr>
+            <a:spLocks noChangeAspect="1"/>
+          </p:cNvSpPr>
+          <p:nvPr/>
+        </p:nvSpPr>
+        <p:spPr>
+          <a:xfrm>
+            <a:off x="4659606" y="228600"/>
+            <a:ext cx="457200" cy="457200"/>
+          </a:xfrm>
+          <a:prstGeom prst="ellipse">
+            <a:avLst/>
+          </a:prstGeom>
+          <a:solidFill>
+            <a:schemeClr val="accent1"/>
+          </a:solidFill>
+          <a:ln>
+            <a:solidFill>
+              <a:schemeClr val="bg1"/>
+            </a:solidFill>
+          </a:ln>
+        </p:spPr>
+        <p:style>
+          <a:lnRef idx="2">
+            <a:schemeClr val="accent1">
+              <a:shade val="15000"/>
+            </a:schemeClr>
+          </a:lnRef>
+          <a:fillRef idx="1">
+            <a:schemeClr val="accent1"/>
+          </a:fillRef>
+          <a:effectRef idx="0">
+            <a:schemeClr val="accent1"/>
+          </a:effectRef>
+          <a:fontRef idx="minor">
+            <a:schemeClr val="lt1"/>
+          </a:fontRef>
+        </p:style>
+        <p:txBody>
+          <a:bodyPr rtlCol="0" anchor="ctr"/>
+          <a:lstStyle/>
+          <a:p>
+            <a:pPr algn="ctr"/>
+            <a:endParaRPr lang="en-US"/>
+          </a:p>
+        </p:txBody>
+      </p:sp>
+      <p:sp>
+        <p:nvSpPr>
+          <p:cNvPr id="6" name="Oval 5">
+            <a:extLst>
+              <a:ext uri="{FF2B5EF4-FFF2-40B4-BE49-F238E27FC236}">
+                <a16:creationId xmlns:a16="http://schemas.microsoft.com/office/drawing/2014/main" id="{BDF974F0-0A76-90E5-936D-EC6685A42F7C}"/>
+              </a:ext>
+            </a:extLst>
+          </p:cNvPr>
+          <p:cNvSpPr>
+            <a:spLocks noChangeAspect="1"/>
+          </p:cNvSpPr>
+          <p:nvPr/>
+        </p:nvSpPr>
+        <p:spPr>
+          <a:xfrm>
+            <a:off x="5292019" y="228600"/>
+            <a:ext cx="457200" cy="457200"/>
+          </a:xfrm>
+          <a:prstGeom prst="ellipse">
+            <a:avLst/>
+          </a:prstGeom>
+          <a:solidFill>
+            <a:schemeClr val="accent1"/>
+          </a:solidFill>
+          <a:ln>
+            <a:solidFill>
+              <a:schemeClr val="bg1"/>
+            </a:solidFill>
+          </a:ln>
+        </p:spPr>
+        <p:style>
+          <a:lnRef idx="2">
+            <a:schemeClr val="accent1">
+              <a:shade val="15000"/>
+            </a:schemeClr>
+          </a:lnRef>
+          <a:fillRef idx="1">
+            <a:schemeClr val="accent1"/>
+          </a:fillRef>
+          <a:effectRef idx="0">
+            <a:schemeClr val="accent1"/>
+          </a:effectRef>
+          <a:fontRef idx="minor">
+            <a:schemeClr val="lt1"/>
+          </a:fontRef>
+        </p:style>
+        <p:txBody>
+          <a:bodyPr rtlCol="0" anchor="ctr"/>
+          <a:lstStyle/>
+          <a:p>
+            <a:pPr algn="ctr"/>
+            <a:endParaRPr lang="en-US"/>
+          </a:p>
+        </p:txBody>
+      </p:sp>
+      <p:sp>
+        <p:nvSpPr>
+          <p:cNvPr id="7" name="Oval 6">
+            <a:extLst>
+              <a:ext uri="{FF2B5EF4-FFF2-40B4-BE49-F238E27FC236}">
+                <a16:creationId xmlns:a16="http://schemas.microsoft.com/office/drawing/2014/main" id="{3EB687CB-D635-F093-E185-316AA823416E}"/>
+              </a:ext>
+            </a:extLst>
+          </p:cNvPr>
+          <p:cNvSpPr>
+            <a:spLocks noChangeAspect="1"/>
+          </p:cNvSpPr>
+          <p:nvPr/>
+        </p:nvSpPr>
+        <p:spPr>
+          <a:xfrm>
+            <a:off x="5924432" y="228600"/>
+            <a:ext cx="457200" cy="457200"/>
+          </a:xfrm>
+          <a:prstGeom prst="ellipse">
+            <a:avLst/>
+          </a:prstGeom>
+          <a:solidFill>
+            <a:schemeClr val="accent1"/>
+          </a:solidFill>
+          <a:ln>
+            <a:solidFill>
+              <a:schemeClr val="bg1"/>
+            </a:solidFill>
+          </a:ln>
+        </p:spPr>
+        <p:style>
+          <a:lnRef idx="2">
+            <a:schemeClr val="accent1">
+              <a:shade val="15000"/>
+            </a:schemeClr>
+          </a:lnRef>
+          <a:fillRef idx="1">
+            <a:schemeClr val="accent1"/>
+          </a:fillRef>
+          <a:effectRef idx="0">
+            <a:schemeClr val="accent1"/>
+          </a:effectRef>
+          <a:fontRef idx="minor">
+            <a:schemeClr val="lt1"/>
+          </a:fontRef>
+        </p:style>
+        <p:txBody>
+          <a:bodyPr rtlCol="0" anchor="ctr"/>
+          <a:lstStyle/>
+          <a:p>
+            <a:pPr algn="ctr"/>
+            <a:endParaRPr lang="en-US"/>
+          </a:p>
+        </p:txBody>
+      </p:sp>
+      <p:sp>
+        <p:nvSpPr>
+          <p:cNvPr id="8" name="Oval 7">
+            <a:extLst>
+              <a:ext uri="{FF2B5EF4-FFF2-40B4-BE49-F238E27FC236}">
+                <a16:creationId xmlns:a16="http://schemas.microsoft.com/office/drawing/2014/main" id="{8EF5889E-2F46-0276-89E2-E7FFA6302E4B}"/>
+              </a:ext>
+            </a:extLst>
+          </p:cNvPr>
+          <p:cNvSpPr>
+            <a:spLocks noChangeAspect="1"/>
+          </p:cNvSpPr>
+          <p:nvPr/>
+        </p:nvSpPr>
+        <p:spPr>
+          <a:xfrm>
+            <a:off x="6556845" y="228600"/>
+            <a:ext cx="457200" cy="457200"/>
+          </a:xfrm>
+          <a:prstGeom prst="ellipse">
+            <a:avLst/>
+          </a:prstGeom>
+          <a:solidFill>
+            <a:schemeClr val="accent1"/>
+          </a:solidFill>
+          <a:ln>
+            <a:solidFill>
+              <a:schemeClr val="bg1"/>
+            </a:solidFill>
+          </a:ln>
+        </p:spPr>
+        <p:style>
+          <a:lnRef idx="2">
+            <a:schemeClr val="accent1">
+              <a:shade val="15000"/>
+            </a:schemeClr>
+          </a:lnRef>
+          <a:fillRef idx="1">
+            <a:schemeClr val="accent1"/>
+          </a:fillRef>
+          <a:effectRef idx="0">
+            <a:schemeClr val="accent1"/>
+          </a:effectRef>
+          <a:fontRef idx="minor">
+            <a:schemeClr val="lt1"/>
+          </a:fontRef>
+        </p:style>
+        <p:txBody>
+          <a:bodyPr rtlCol="0" anchor="ctr"/>
+          <a:lstStyle/>
+          <a:p>
+            <a:pPr algn="ctr"/>
+            <a:endParaRPr lang="en-US"/>
+          </a:p>
+        </p:txBody>
+      </p:sp>
+    </p:spTree>
+    <p:extLst>
+      <p:ext uri="{BB962C8B-B14F-4D97-AF65-F5344CB8AC3E}">
+        <p14:creationId xmlns:p14="http://schemas.microsoft.com/office/powerpoint/2010/main" val="3887831179"/>
       </p:ext>
     </p:extLst>
   </p:cSld>

--- a/lectures/from_propositional_logic_to_probability_theory/proportional_syllogism_on_steroids.pptx
+++ b/lectures/from_propositional_logic_to_probability_theory/proportional_syllogism_on_steroids.pptx
@@ -5,7 +5,7 @@
     <p:sldMasterId id="2147483708" r:id="rId1"/>
   </p:sldMasterIdLst>
   <p:notesMasterIdLst>
-    <p:notesMasterId r:id="rId8"/>
+    <p:notesMasterId r:id="rId9"/>
   </p:notesMasterIdLst>
   <p:sldIdLst>
     <p:sldId id="341" r:id="rId2"/>
@@ -14,6 +14,7 @@
     <p:sldId id="348" r:id="rId5"/>
     <p:sldId id="350" r:id="rId6"/>
     <p:sldId id="351" r:id="rId7"/>
+    <p:sldId id="352" r:id="rId8"/>
   </p:sldIdLst>
   <p:sldSz cx="9144000" cy="914400"/>
   <p:notesSz cx="6858000" cy="9144000"/>
@@ -6294,10 +6295,10 @@
       </p:sp>
       <p:sp>
         <p:nvSpPr>
-          <p:cNvPr id="9" name="Oval 8">
+          <p:cNvPr id="2" name="Oval 1">
             <a:extLst>
               <a:ext uri="{FF2B5EF4-FFF2-40B4-BE49-F238E27FC236}">
-                <a16:creationId xmlns:a16="http://schemas.microsoft.com/office/drawing/2014/main" id="{4E8A1D61-826F-D984-345F-60F1B9BBA3CE}"/>
+                <a16:creationId xmlns:a16="http://schemas.microsoft.com/office/drawing/2014/main" id="{AE99F2E1-DAAA-F63E-5A3A-D7AE592921CD}"/>
               </a:ext>
             </a:extLst>
           </p:cNvPr>
@@ -6308,14 +6309,14 @@
         </p:nvSpPr>
         <p:spPr>
           <a:xfrm>
-            <a:off x="7189258" y="229969"/>
+            <a:off x="1497541" y="228600"/>
             <a:ext cx="457200" cy="457200"/>
           </a:xfrm>
           <a:prstGeom prst="ellipse">
             <a:avLst/>
           </a:prstGeom>
           <a:solidFill>
-            <a:schemeClr val="accent1"/>
+            <a:schemeClr val="accent4"/>
           </a:solidFill>
           <a:ln>
             <a:solidFill>
@@ -6350,10 +6351,10 @@
       </p:sp>
       <p:sp>
         <p:nvSpPr>
-          <p:cNvPr id="2" name="Oval 1">
+          <p:cNvPr id="3" name="Oval 2">
             <a:extLst>
               <a:ext uri="{FF2B5EF4-FFF2-40B4-BE49-F238E27FC236}">
-                <a16:creationId xmlns:a16="http://schemas.microsoft.com/office/drawing/2014/main" id="{AE99F2E1-DAAA-F63E-5A3A-D7AE592921CD}"/>
+                <a16:creationId xmlns:a16="http://schemas.microsoft.com/office/drawing/2014/main" id="{29FC8C44-4630-3654-E59A-46F0E3BD55B2}"/>
               </a:ext>
             </a:extLst>
           </p:cNvPr>
@@ -6364,7 +6365,7 @@
         </p:nvSpPr>
         <p:spPr>
           <a:xfrm>
-            <a:off x="1497541" y="228600"/>
+            <a:off x="2129954" y="228600"/>
             <a:ext cx="457200" cy="457200"/>
           </a:xfrm>
           <a:prstGeom prst="ellipse">
@@ -6406,10 +6407,10 @@
       </p:sp>
       <p:sp>
         <p:nvSpPr>
-          <p:cNvPr id="3" name="Oval 2">
+          <p:cNvPr id="4" name="Oval 3">
             <a:extLst>
               <a:ext uri="{FF2B5EF4-FFF2-40B4-BE49-F238E27FC236}">
-                <a16:creationId xmlns:a16="http://schemas.microsoft.com/office/drawing/2014/main" id="{29FC8C44-4630-3654-E59A-46F0E3BD55B2}"/>
+                <a16:creationId xmlns:a16="http://schemas.microsoft.com/office/drawing/2014/main" id="{EF37E217-9081-6B09-F8BB-7985ACC5BC6E}"/>
               </a:ext>
             </a:extLst>
           </p:cNvPr>
@@ -6420,7 +6421,7 @@
         </p:nvSpPr>
         <p:spPr>
           <a:xfrm>
-            <a:off x="2129954" y="228600"/>
+            <a:off x="2762367" y="228600"/>
             <a:ext cx="457200" cy="457200"/>
           </a:xfrm>
           <a:prstGeom prst="ellipse">
@@ -6456,16 +6457,16 @@
           <a:lstStyle/>
           <a:p>
             <a:pPr algn="ctr"/>
-            <a:endParaRPr lang="en-US"/>
-          </a:p>
-        </p:txBody>
-      </p:sp>
-      <p:sp>
-        <p:nvSpPr>
-          <p:cNvPr id="4" name="Oval 3">
+            <a:endParaRPr lang="en-US" dirty="0"/>
+          </a:p>
+        </p:txBody>
+      </p:sp>
+      <p:sp>
+        <p:nvSpPr>
+          <p:cNvPr id="5" name="Oval 4">
             <a:extLst>
               <a:ext uri="{FF2B5EF4-FFF2-40B4-BE49-F238E27FC236}">
-                <a16:creationId xmlns:a16="http://schemas.microsoft.com/office/drawing/2014/main" id="{EF37E217-9081-6B09-F8BB-7985ACC5BC6E}"/>
+                <a16:creationId xmlns:a16="http://schemas.microsoft.com/office/drawing/2014/main" id="{682F8661-DAA4-8CA7-D8C5-0284829D501F}"/>
               </a:ext>
             </a:extLst>
           </p:cNvPr>
@@ -6476,14 +6477,14 @@
         </p:nvSpPr>
         <p:spPr>
           <a:xfrm>
-            <a:off x="2762367" y="228600"/>
+            <a:off x="4659606" y="228600"/>
             <a:ext cx="457200" cy="457200"/>
           </a:xfrm>
           <a:prstGeom prst="ellipse">
             <a:avLst/>
           </a:prstGeom>
           <a:solidFill>
-            <a:schemeClr val="accent4"/>
+            <a:schemeClr val="accent1"/>
           </a:solidFill>
           <a:ln>
             <a:solidFill>
@@ -6512,16 +6513,16 @@
           <a:lstStyle/>
           <a:p>
             <a:pPr algn="ctr"/>
-            <a:endParaRPr lang="en-US" dirty="0"/>
-          </a:p>
-        </p:txBody>
-      </p:sp>
-      <p:sp>
-        <p:nvSpPr>
-          <p:cNvPr id="5" name="Oval 4">
+            <a:endParaRPr lang="en-US"/>
+          </a:p>
+        </p:txBody>
+      </p:sp>
+      <p:sp>
+        <p:nvSpPr>
+          <p:cNvPr id="6" name="Oval 5">
             <a:extLst>
               <a:ext uri="{FF2B5EF4-FFF2-40B4-BE49-F238E27FC236}">
-                <a16:creationId xmlns:a16="http://schemas.microsoft.com/office/drawing/2014/main" id="{682F8661-DAA4-8CA7-D8C5-0284829D501F}"/>
+                <a16:creationId xmlns:a16="http://schemas.microsoft.com/office/drawing/2014/main" id="{BDF974F0-0A76-90E5-936D-EC6685A42F7C}"/>
               </a:ext>
             </a:extLst>
           </p:cNvPr>
@@ -6532,7 +6533,7 @@
         </p:nvSpPr>
         <p:spPr>
           <a:xfrm>
-            <a:off x="4659606" y="228600"/>
+            <a:off x="5292019" y="228600"/>
             <a:ext cx="457200" cy="457200"/>
           </a:xfrm>
           <a:prstGeom prst="ellipse">
@@ -6574,10 +6575,10 @@
       </p:sp>
       <p:sp>
         <p:nvSpPr>
-          <p:cNvPr id="6" name="Oval 5">
+          <p:cNvPr id="7" name="Oval 6">
             <a:extLst>
               <a:ext uri="{FF2B5EF4-FFF2-40B4-BE49-F238E27FC236}">
-                <a16:creationId xmlns:a16="http://schemas.microsoft.com/office/drawing/2014/main" id="{BDF974F0-0A76-90E5-936D-EC6685A42F7C}"/>
+                <a16:creationId xmlns:a16="http://schemas.microsoft.com/office/drawing/2014/main" id="{3EB687CB-D635-F093-E185-316AA823416E}"/>
               </a:ext>
             </a:extLst>
           </p:cNvPr>
@@ -6588,7 +6589,7 @@
         </p:nvSpPr>
         <p:spPr>
           <a:xfrm>
-            <a:off x="5292019" y="228600"/>
+            <a:off x="5924432" y="228600"/>
             <a:ext cx="457200" cy="457200"/>
           </a:xfrm>
           <a:prstGeom prst="ellipse">
@@ -6630,10 +6631,10 @@
       </p:sp>
       <p:sp>
         <p:nvSpPr>
-          <p:cNvPr id="7" name="Oval 6">
+          <p:cNvPr id="8" name="Oval 7">
             <a:extLst>
               <a:ext uri="{FF2B5EF4-FFF2-40B4-BE49-F238E27FC236}">
-                <a16:creationId xmlns:a16="http://schemas.microsoft.com/office/drawing/2014/main" id="{3EB687CB-D635-F093-E185-316AA823416E}"/>
+                <a16:creationId xmlns:a16="http://schemas.microsoft.com/office/drawing/2014/main" id="{8EF5889E-2F46-0276-89E2-E7FFA6302E4B}"/>
               </a:ext>
             </a:extLst>
           </p:cNvPr>
@@ -6644,7 +6645,7 @@
         </p:nvSpPr>
         <p:spPr>
           <a:xfrm>
-            <a:off x="5924432" y="228600"/>
+            <a:off x="6556845" y="228600"/>
             <a:ext cx="457200" cy="457200"/>
           </a:xfrm>
           <a:prstGeom prst="ellipse">
@@ -6686,10 +6687,10 @@
       </p:sp>
       <p:sp>
         <p:nvSpPr>
-          <p:cNvPr id="8" name="Oval 7">
+          <p:cNvPr id="11" name="Oval 10">
             <a:extLst>
               <a:ext uri="{FF2B5EF4-FFF2-40B4-BE49-F238E27FC236}">
-                <a16:creationId xmlns:a16="http://schemas.microsoft.com/office/drawing/2014/main" id="{8EF5889E-2F46-0276-89E2-E7FFA6302E4B}"/>
+                <a16:creationId xmlns:a16="http://schemas.microsoft.com/office/drawing/2014/main" id="{1CAF534E-2DD4-AF86-18CA-DB514213C572}"/>
               </a:ext>
             </a:extLst>
           </p:cNvPr>
@@ -6700,18 +6701,18 @@
         </p:nvSpPr>
         <p:spPr>
           <a:xfrm>
-            <a:off x="6556845" y="228600"/>
+            <a:off x="7189259" y="228600"/>
             <a:ext cx="457200" cy="457200"/>
           </a:xfrm>
           <a:prstGeom prst="ellipse">
             <a:avLst/>
           </a:prstGeom>
-          <a:solidFill>
-            <a:schemeClr val="accent1"/>
-          </a:solidFill>
+          <a:noFill/>
           <a:ln>
             <a:solidFill>
-              <a:schemeClr val="bg1"/>
+              <a:schemeClr val="bg2">
+                <a:lumMod val="90000"/>
+              </a:schemeClr>
             </a:solidFill>
           </a:ln>
         </p:spPr>
@@ -6744,6 +6745,602 @@
     <p:extLst>
       <p:ext uri="{BB962C8B-B14F-4D97-AF65-F5344CB8AC3E}">
         <p14:creationId xmlns:p14="http://schemas.microsoft.com/office/powerpoint/2010/main" val="3887831179"/>
+      </p:ext>
+    </p:extLst>
+  </p:cSld>
+  <p:clrMapOvr>
+    <a:masterClrMapping/>
+  </p:clrMapOvr>
+</p:sld>
+</file>
+
+<file path=ppt/slides/slide7.xml><?xml version="1.0" encoding="utf-8"?>
+<p:sld xmlns:a="http://schemas.openxmlformats.org/drawingml/2006/main" xmlns:r="http://schemas.openxmlformats.org/officeDocument/2006/relationships" xmlns:p="http://schemas.openxmlformats.org/presentationml/2006/main">
+  <p:cSld>
+    <p:spTree>
+      <p:nvGrpSpPr>
+        <p:cNvPr id="1" name="">
+          <a:extLst>
+            <a:ext uri="{FF2B5EF4-FFF2-40B4-BE49-F238E27FC236}">
+              <a16:creationId xmlns:a16="http://schemas.microsoft.com/office/drawing/2014/main" id="{0A46E06E-D6F6-5C27-5608-95C666B92DBD}"/>
+            </a:ext>
+          </a:extLst>
+        </p:cNvPr>
+        <p:cNvGrpSpPr/>
+        <p:nvPr/>
+      </p:nvGrpSpPr>
+      <p:grpSpPr>
+        <a:xfrm>
+          <a:off x="0" y="0"/>
+          <a:ext cx="0" cy="0"/>
+          <a:chOff x="0" y="0"/>
+          <a:chExt cx="0" cy="0"/>
+        </a:xfrm>
+      </p:grpSpPr>
+      <p:sp>
+        <p:nvSpPr>
+          <p:cNvPr id="14" name="Oval 13">
+            <a:extLst>
+              <a:ext uri="{FF2B5EF4-FFF2-40B4-BE49-F238E27FC236}">
+                <a16:creationId xmlns:a16="http://schemas.microsoft.com/office/drawing/2014/main" id="{52CB5852-35FC-20C4-F726-823EED5BA2C7}"/>
+              </a:ext>
+            </a:extLst>
+          </p:cNvPr>
+          <p:cNvSpPr>
+            <a:spLocks noChangeAspect="1"/>
+          </p:cNvSpPr>
+          <p:nvPr/>
+        </p:nvSpPr>
+        <p:spPr>
+          <a:xfrm>
+            <a:off x="4020843" y="228600"/>
+            <a:ext cx="457200" cy="457200"/>
+          </a:xfrm>
+          <a:prstGeom prst="ellipse">
+            <a:avLst/>
+          </a:prstGeom>
+          <a:solidFill>
+            <a:schemeClr val="accent1"/>
+          </a:solidFill>
+          <a:ln>
+            <a:solidFill>
+              <a:schemeClr val="bg1"/>
+            </a:solidFill>
+          </a:ln>
+        </p:spPr>
+        <p:style>
+          <a:lnRef idx="2">
+            <a:schemeClr val="accent1">
+              <a:shade val="15000"/>
+            </a:schemeClr>
+          </a:lnRef>
+          <a:fillRef idx="1">
+            <a:schemeClr val="accent1"/>
+          </a:fillRef>
+          <a:effectRef idx="0">
+            <a:schemeClr val="accent1"/>
+          </a:effectRef>
+          <a:fontRef idx="minor">
+            <a:schemeClr val="lt1"/>
+          </a:fontRef>
+        </p:style>
+        <p:txBody>
+          <a:bodyPr rtlCol="0" anchor="ctr"/>
+          <a:lstStyle/>
+          <a:p>
+            <a:pPr algn="ctr"/>
+            <a:endParaRPr lang="en-US"/>
+          </a:p>
+        </p:txBody>
+      </p:sp>
+      <p:sp>
+        <p:nvSpPr>
+          <p:cNvPr id="10" name="Oval 9">
+            <a:extLst>
+              <a:ext uri="{FF2B5EF4-FFF2-40B4-BE49-F238E27FC236}">
+                <a16:creationId xmlns:a16="http://schemas.microsoft.com/office/drawing/2014/main" id="{69F74B10-78EC-A66D-AE9C-60272977D869}"/>
+              </a:ext>
+            </a:extLst>
+          </p:cNvPr>
+          <p:cNvSpPr>
+            <a:spLocks noChangeAspect="1"/>
+          </p:cNvSpPr>
+          <p:nvPr/>
+        </p:nvSpPr>
+        <p:spPr>
+          <a:xfrm>
+            <a:off x="3401130" y="228600"/>
+            <a:ext cx="457200" cy="457200"/>
+          </a:xfrm>
+          <a:prstGeom prst="ellipse">
+            <a:avLst/>
+          </a:prstGeom>
+          <a:solidFill>
+            <a:schemeClr val="accent1"/>
+          </a:solidFill>
+          <a:ln>
+            <a:solidFill>
+              <a:schemeClr val="bg1"/>
+            </a:solidFill>
+          </a:ln>
+        </p:spPr>
+        <p:style>
+          <a:lnRef idx="2">
+            <a:schemeClr val="accent1">
+              <a:shade val="15000"/>
+            </a:schemeClr>
+          </a:lnRef>
+          <a:fillRef idx="1">
+            <a:schemeClr val="accent1"/>
+          </a:fillRef>
+          <a:effectRef idx="0">
+            <a:schemeClr val="accent1"/>
+          </a:effectRef>
+          <a:fontRef idx="minor">
+            <a:schemeClr val="lt1"/>
+          </a:fontRef>
+        </p:style>
+        <p:txBody>
+          <a:bodyPr rtlCol="0" anchor="ctr"/>
+          <a:lstStyle/>
+          <a:p>
+            <a:pPr algn="ctr"/>
+            <a:endParaRPr lang="en-US" dirty="0"/>
+          </a:p>
+        </p:txBody>
+      </p:sp>
+      <p:sp>
+        <p:nvSpPr>
+          <p:cNvPr id="9" name="Oval 8">
+            <a:extLst>
+              <a:ext uri="{FF2B5EF4-FFF2-40B4-BE49-F238E27FC236}">
+                <a16:creationId xmlns:a16="http://schemas.microsoft.com/office/drawing/2014/main" id="{910A3F45-B014-1546-4156-3DCB266AE32F}"/>
+              </a:ext>
+            </a:extLst>
+          </p:cNvPr>
+          <p:cNvSpPr>
+            <a:spLocks noChangeAspect="1"/>
+          </p:cNvSpPr>
+          <p:nvPr/>
+        </p:nvSpPr>
+        <p:spPr>
+          <a:xfrm>
+            <a:off x="7189258" y="229969"/>
+            <a:ext cx="457200" cy="457200"/>
+          </a:xfrm>
+          <a:prstGeom prst="ellipse">
+            <a:avLst/>
+          </a:prstGeom>
+          <a:solidFill>
+            <a:schemeClr val="accent1"/>
+          </a:solidFill>
+          <a:ln>
+            <a:solidFill>
+              <a:schemeClr val="bg1"/>
+            </a:solidFill>
+          </a:ln>
+        </p:spPr>
+        <p:style>
+          <a:lnRef idx="2">
+            <a:schemeClr val="accent1">
+              <a:shade val="15000"/>
+            </a:schemeClr>
+          </a:lnRef>
+          <a:fillRef idx="1">
+            <a:schemeClr val="accent1"/>
+          </a:fillRef>
+          <a:effectRef idx="0">
+            <a:schemeClr val="accent1"/>
+          </a:effectRef>
+          <a:fontRef idx="minor">
+            <a:schemeClr val="lt1"/>
+          </a:fontRef>
+        </p:style>
+        <p:txBody>
+          <a:bodyPr rtlCol="0" anchor="ctr"/>
+          <a:lstStyle/>
+          <a:p>
+            <a:pPr algn="ctr"/>
+            <a:endParaRPr lang="en-US"/>
+          </a:p>
+        </p:txBody>
+      </p:sp>
+      <p:sp>
+        <p:nvSpPr>
+          <p:cNvPr id="2" name="Oval 1">
+            <a:extLst>
+              <a:ext uri="{FF2B5EF4-FFF2-40B4-BE49-F238E27FC236}">
+                <a16:creationId xmlns:a16="http://schemas.microsoft.com/office/drawing/2014/main" id="{D7586966-4C39-E61C-C239-2BE412461625}"/>
+              </a:ext>
+            </a:extLst>
+          </p:cNvPr>
+          <p:cNvSpPr>
+            <a:spLocks noChangeAspect="1"/>
+          </p:cNvSpPr>
+          <p:nvPr/>
+        </p:nvSpPr>
+        <p:spPr>
+          <a:xfrm>
+            <a:off x="1497541" y="228600"/>
+            <a:ext cx="457200" cy="457200"/>
+          </a:xfrm>
+          <a:prstGeom prst="ellipse">
+            <a:avLst/>
+          </a:prstGeom>
+          <a:solidFill>
+            <a:schemeClr val="accent4"/>
+          </a:solidFill>
+          <a:ln>
+            <a:solidFill>
+              <a:schemeClr val="bg1"/>
+            </a:solidFill>
+          </a:ln>
+        </p:spPr>
+        <p:style>
+          <a:lnRef idx="2">
+            <a:schemeClr val="accent1">
+              <a:shade val="15000"/>
+            </a:schemeClr>
+          </a:lnRef>
+          <a:fillRef idx="1">
+            <a:schemeClr val="accent1"/>
+          </a:fillRef>
+          <a:effectRef idx="0">
+            <a:schemeClr val="accent1"/>
+          </a:effectRef>
+          <a:fontRef idx="minor">
+            <a:schemeClr val="lt1"/>
+          </a:fontRef>
+        </p:style>
+        <p:txBody>
+          <a:bodyPr rtlCol="0" anchor="ctr"/>
+          <a:lstStyle/>
+          <a:p>
+            <a:pPr algn="ctr"/>
+            <a:endParaRPr lang="en-US"/>
+          </a:p>
+        </p:txBody>
+      </p:sp>
+      <p:sp>
+        <p:nvSpPr>
+          <p:cNvPr id="3" name="Oval 2">
+            <a:extLst>
+              <a:ext uri="{FF2B5EF4-FFF2-40B4-BE49-F238E27FC236}">
+                <a16:creationId xmlns:a16="http://schemas.microsoft.com/office/drawing/2014/main" id="{C446A577-E563-6CE6-247F-77BE6A0CB5BB}"/>
+              </a:ext>
+            </a:extLst>
+          </p:cNvPr>
+          <p:cNvSpPr>
+            <a:spLocks noChangeAspect="1"/>
+          </p:cNvSpPr>
+          <p:nvPr/>
+        </p:nvSpPr>
+        <p:spPr>
+          <a:xfrm>
+            <a:off x="2129954" y="228600"/>
+            <a:ext cx="457200" cy="457200"/>
+          </a:xfrm>
+          <a:prstGeom prst="ellipse">
+            <a:avLst/>
+          </a:prstGeom>
+          <a:solidFill>
+            <a:schemeClr val="accent4"/>
+          </a:solidFill>
+          <a:ln>
+            <a:solidFill>
+              <a:schemeClr val="bg1"/>
+            </a:solidFill>
+          </a:ln>
+        </p:spPr>
+        <p:style>
+          <a:lnRef idx="2">
+            <a:schemeClr val="accent1">
+              <a:shade val="15000"/>
+            </a:schemeClr>
+          </a:lnRef>
+          <a:fillRef idx="1">
+            <a:schemeClr val="accent1"/>
+          </a:fillRef>
+          <a:effectRef idx="0">
+            <a:schemeClr val="accent1"/>
+          </a:effectRef>
+          <a:fontRef idx="minor">
+            <a:schemeClr val="lt1"/>
+          </a:fontRef>
+        </p:style>
+        <p:txBody>
+          <a:bodyPr rtlCol="0" anchor="ctr"/>
+          <a:lstStyle/>
+          <a:p>
+            <a:pPr algn="ctr"/>
+            <a:endParaRPr lang="en-US"/>
+          </a:p>
+        </p:txBody>
+      </p:sp>
+      <p:sp>
+        <p:nvSpPr>
+          <p:cNvPr id="4" name="Oval 3">
+            <a:extLst>
+              <a:ext uri="{FF2B5EF4-FFF2-40B4-BE49-F238E27FC236}">
+                <a16:creationId xmlns:a16="http://schemas.microsoft.com/office/drawing/2014/main" id="{2BD50B31-9C42-646C-5186-6E9A97EB28E8}"/>
+              </a:ext>
+            </a:extLst>
+          </p:cNvPr>
+          <p:cNvSpPr>
+            <a:spLocks noChangeAspect="1"/>
+          </p:cNvSpPr>
+          <p:nvPr/>
+        </p:nvSpPr>
+        <p:spPr>
+          <a:xfrm>
+            <a:off x="2762367" y="228600"/>
+            <a:ext cx="457200" cy="457200"/>
+          </a:xfrm>
+          <a:prstGeom prst="ellipse">
+            <a:avLst/>
+          </a:prstGeom>
+          <a:solidFill>
+            <a:schemeClr val="accent4"/>
+          </a:solidFill>
+          <a:ln>
+            <a:solidFill>
+              <a:schemeClr val="bg1"/>
+            </a:solidFill>
+          </a:ln>
+        </p:spPr>
+        <p:style>
+          <a:lnRef idx="2">
+            <a:schemeClr val="accent1">
+              <a:shade val="15000"/>
+            </a:schemeClr>
+          </a:lnRef>
+          <a:fillRef idx="1">
+            <a:schemeClr val="accent1"/>
+          </a:fillRef>
+          <a:effectRef idx="0">
+            <a:schemeClr val="accent1"/>
+          </a:effectRef>
+          <a:fontRef idx="minor">
+            <a:schemeClr val="lt1"/>
+          </a:fontRef>
+        </p:style>
+        <p:txBody>
+          <a:bodyPr rtlCol="0" anchor="ctr"/>
+          <a:lstStyle/>
+          <a:p>
+            <a:pPr algn="ctr"/>
+            <a:endParaRPr lang="en-US" dirty="0"/>
+          </a:p>
+        </p:txBody>
+      </p:sp>
+      <p:sp>
+        <p:nvSpPr>
+          <p:cNvPr id="5" name="Oval 4">
+            <a:extLst>
+              <a:ext uri="{FF2B5EF4-FFF2-40B4-BE49-F238E27FC236}">
+                <a16:creationId xmlns:a16="http://schemas.microsoft.com/office/drawing/2014/main" id="{A141567D-7CFB-4DA0-5872-7745B17A64FA}"/>
+              </a:ext>
+            </a:extLst>
+          </p:cNvPr>
+          <p:cNvSpPr>
+            <a:spLocks noChangeAspect="1"/>
+          </p:cNvSpPr>
+          <p:nvPr/>
+        </p:nvSpPr>
+        <p:spPr>
+          <a:xfrm>
+            <a:off x="4659606" y="228600"/>
+            <a:ext cx="457200" cy="457200"/>
+          </a:xfrm>
+          <a:prstGeom prst="ellipse">
+            <a:avLst/>
+          </a:prstGeom>
+          <a:solidFill>
+            <a:schemeClr val="accent1"/>
+          </a:solidFill>
+          <a:ln>
+            <a:solidFill>
+              <a:schemeClr val="bg1"/>
+            </a:solidFill>
+          </a:ln>
+        </p:spPr>
+        <p:style>
+          <a:lnRef idx="2">
+            <a:schemeClr val="accent1">
+              <a:shade val="15000"/>
+            </a:schemeClr>
+          </a:lnRef>
+          <a:fillRef idx="1">
+            <a:schemeClr val="accent1"/>
+          </a:fillRef>
+          <a:effectRef idx="0">
+            <a:schemeClr val="accent1"/>
+          </a:effectRef>
+          <a:fontRef idx="minor">
+            <a:schemeClr val="lt1"/>
+          </a:fontRef>
+        </p:style>
+        <p:txBody>
+          <a:bodyPr rtlCol="0" anchor="ctr"/>
+          <a:lstStyle/>
+          <a:p>
+            <a:pPr algn="ctr"/>
+            <a:endParaRPr lang="en-US"/>
+          </a:p>
+        </p:txBody>
+      </p:sp>
+      <p:sp>
+        <p:nvSpPr>
+          <p:cNvPr id="6" name="Oval 5">
+            <a:extLst>
+              <a:ext uri="{FF2B5EF4-FFF2-40B4-BE49-F238E27FC236}">
+                <a16:creationId xmlns:a16="http://schemas.microsoft.com/office/drawing/2014/main" id="{CC2EAFF2-238D-CA44-FB51-A151D0A8A635}"/>
+              </a:ext>
+            </a:extLst>
+          </p:cNvPr>
+          <p:cNvSpPr>
+            <a:spLocks noChangeAspect="1"/>
+          </p:cNvSpPr>
+          <p:nvPr/>
+        </p:nvSpPr>
+        <p:spPr>
+          <a:xfrm>
+            <a:off x="5292019" y="228600"/>
+            <a:ext cx="457200" cy="457200"/>
+          </a:xfrm>
+          <a:prstGeom prst="ellipse">
+            <a:avLst/>
+          </a:prstGeom>
+          <a:solidFill>
+            <a:schemeClr val="accent1"/>
+          </a:solidFill>
+          <a:ln>
+            <a:solidFill>
+              <a:schemeClr val="bg1"/>
+            </a:solidFill>
+          </a:ln>
+        </p:spPr>
+        <p:style>
+          <a:lnRef idx="2">
+            <a:schemeClr val="accent1">
+              <a:shade val="15000"/>
+            </a:schemeClr>
+          </a:lnRef>
+          <a:fillRef idx="1">
+            <a:schemeClr val="accent1"/>
+          </a:fillRef>
+          <a:effectRef idx="0">
+            <a:schemeClr val="accent1"/>
+          </a:effectRef>
+          <a:fontRef idx="minor">
+            <a:schemeClr val="lt1"/>
+          </a:fontRef>
+        </p:style>
+        <p:txBody>
+          <a:bodyPr rtlCol="0" anchor="ctr"/>
+          <a:lstStyle/>
+          <a:p>
+            <a:pPr algn="ctr"/>
+            <a:endParaRPr lang="en-US"/>
+          </a:p>
+        </p:txBody>
+      </p:sp>
+      <p:sp>
+        <p:nvSpPr>
+          <p:cNvPr id="7" name="Oval 6">
+            <a:extLst>
+              <a:ext uri="{FF2B5EF4-FFF2-40B4-BE49-F238E27FC236}">
+                <a16:creationId xmlns:a16="http://schemas.microsoft.com/office/drawing/2014/main" id="{B18FD4A6-FE42-F0ED-6E77-373AC3F6297D}"/>
+              </a:ext>
+            </a:extLst>
+          </p:cNvPr>
+          <p:cNvSpPr>
+            <a:spLocks noChangeAspect="1"/>
+          </p:cNvSpPr>
+          <p:nvPr/>
+        </p:nvSpPr>
+        <p:spPr>
+          <a:xfrm>
+            <a:off x="5924432" y="228600"/>
+            <a:ext cx="457200" cy="457200"/>
+          </a:xfrm>
+          <a:prstGeom prst="ellipse">
+            <a:avLst/>
+          </a:prstGeom>
+          <a:solidFill>
+            <a:schemeClr val="accent1"/>
+          </a:solidFill>
+          <a:ln>
+            <a:solidFill>
+              <a:schemeClr val="bg1"/>
+            </a:solidFill>
+          </a:ln>
+        </p:spPr>
+        <p:style>
+          <a:lnRef idx="2">
+            <a:schemeClr val="accent1">
+              <a:shade val="15000"/>
+            </a:schemeClr>
+          </a:lnRef>
+          <a:fillRef idx="1">
+            <a:schemeClr val="accent1"/>
+          </a:fillRef>
+          <a:effectRef idx="0">
+            <a:schemeClr val="accent1"/>
+          </a:effectRef>
+          <a:fontRef idx="minor">
+            <a:schemeClr val="lt1"/>
+          </a:fontRef>
+        </p:style>
+        <p:txBody>
+          <a:bodyPr rtlCol="0" anchor="ctr"/>
+          <a:lstStyle/>
+          <a:p>
+            <a:pPr algn="ctr"/>
+            <a:endParaRPr lang="en-US"/>
+          </a:p>
+        </p:txBody>
+      </p:sp>
+      <p:sp>
+        <p:nvSpPr>
+          <p:cNvPr id="8" name="Oval 7">
+            <a:extLst>
+              <a:ext uri="{FF2B5EF4-FFF2-40B4-BE49-F238E27FC236}">
+                <a16:creationId xmlns:a16="http://schemas.microsoft.com/office/drawing/2014/main" id="{9778A5BF-7EA8-E792-B738-D2AEE9C93F08}"/>
+              </a:ext>
+            </a:extLst>
+          </p:cNvPr>
+          <p:cNvSpPr>
+            <a:spLocks noChangeAspect="1"/>
+          </p:cNvSpPr>
+          <p:nvPr/>
+        </p:nvSpPr>
+        <p:spPr>
+          <a:xfrm>
+            <a:off x="6556845" y="228600"/>
+            <a:ext cx="457200" cy="457200"/>
+          </a:xfrm>
+          <a:prstGeom prst="ellipse">
+            <a:avLst/>
+          </a:prstGeom>
+          <a:solidFill>
+            <a:schemeClr val="accent1"/>
+          </a:solidFill>
+          <a:ln>
+            <a:solidFill>
+              <a:schemeClr val="bg1"/>
+            </a:solidFill>
+          </a:ln>
+        </p:spPr>
+        <p:style>
+          <a:lnRef idx="2">
+            <a:schemeClr val="accent1">
+              <a:shade val="15000"/>
+            </a:schemeClr>
+          </a:lnRef>
+          <a:fillRef idx="1">
+            <a:schemeClr val="accent1"/>
+          </a:fillRef>
+          <a:effectRef idx="0">
+            <a:schemeClr val="accent1"/>
+          </a:effectRef>
+          <a:fontRef idx="minor">
+            <a:schemeClr val="lt1"/>
+          </a:fontRef>
+        </p:style>
+        <p:txBody>
+          <a:bodyPr rtlCol="0" anchor="ctr"/>
+          <a:lstStyle/>
+          <a:p>
+            <a:pPr algn="ctr"/>
+            <a:endParaRPr lang="en-US"/>
+          </a:p>
+        </p:txBody>
+      </p:sp>
+    </p:spTree>
+    <p:extLst>
+      <p:ext uri="{BB962C8B-B14F-4D97-AF65-F5344CB8AC3E}">
+        <p14:creationId xmlns:p14="http://schemas.microsoft.com/office/powerpoint/2010/main" val="1729984583"/>
       </p:ext>
     </p:extLst>
   </p:cSld>
